--- a/docs/design/Diagram.pptx
+++ b/docs/design/Diagram.pptx
@@ -4121,8 +4121,8 @@
         </p:nvSpPr>
         <p:spPr>
           <a:xfrm>
-            <a:off x="365760" y="2072640"/>
-            <a:ext cx="12694920" cy="746760"/>
+            <a:off x="365760" y="2072944"/>
+            <a:ext cx="12694920" cy="621792"/>
           </a:xfrm>
           <a:prstGeom prst="roundRect">
             <a:avLst>
@@ -4169,8 +4169,8 @@
         </p:nvSpPr>
         <p:spPr>
           <a:xfrm>
-            <a:off x="411480" y="2125980"/>
-            <a:ext cx="1203960" cy="640080"/>
+            <a:off x="411480" y="2117357"/>
+            <a:ext cx="1203960" cy="532964"/>
           </a:xfrm>
           <a:prstGeom prst="roundRect">
             <a:avLst>
@@ -4200,14 +4200,14 @@
           </a:fontRef>
         </p:style>
         <p:txBody>
-          <a:bodyPr rtlCol="0" anchor="ctr" lIns="0" rIns="0" tIns="0" bIns="0" wrap="none">
+          <a:bodyPr rtlCol="0" anchor="ctr" lIns="0" rIns="0" tIns="12700" bIns="12700" wrap="none">
             <a:noAutofit/>
           </a:bodyPr>
           <a:lstStyle/>
           <a:p>
             <a:pPr algn="ctr">
               <a:lnSpc>
-                <a:spcPct val="108000"/>
+                <a:spcPts val="1530"/>
               </a:lnSpc>
               <a:spcBef>
                 <a:spcPts val="0"/>
@@ -4217,7 +4217,7 @@
               </a:spcAft>
             </a:pPr>
             <a:r>
-              <a:rPr sz="1560" b="1" lang="en-US">
+              <a:rPr sz="1400" b="1" lang="en-US">
                 <a:solidFill>
                   <a:srgbClr val="FFFFFF"/>
                 </a:solidFill>
@@ -4229,7 +4229,7 @@
           <a:p>
             <a:pPr algn="ctr">
               <a:lnSpc>
-                <a:spcPct val="108000"/>
+                <a:spcPts val="1310"/>
               </a:lnSpc>
               <a:spcBef>
                 <a:spcPts val="0"/>
@@ -4239,7 +4239,7 @@
               </a:spcAft>
             </a:pPr>
             <a:r>
-              <a:rPr sz="1560" b="1" lang="en-US">
+              <a:rPr sz="1180" b="1" lang="en-US">
                 <a:solidFill>
                   <a:srgbClr val="FFFFFF"/>
                 </a:solidFill>
@@ -4258,7 +4258,7 @@
         </p:nvCxnSpPr>
         <p:spPr>
           <a:xfrm>
-            <a:off x="1615440" y="2446020"/>
+            <a:off x="1615440" y="2383840"/>
             <a:ext cx="335280" cy="0"/>
           </a:xfrm>
           <a:prstGeom prst="line">
@@ -4295,8 +4295,8 @@
         </p:nvSpPr>
         <p:spPr>
           <a:xfrm>
-            <a:off x="1950720" y="2141220"/>
-            <a:ext cx="1950720" cy="609600"/>
+            <a:off x="1950720" y="2130047"/>
+            <a:ext cx="1950720" cy="507585"/>
           </a:xfrm>
           <a:prstGeom prst="roundRect">
             <a:avLst>
@@ -4328,14 +4328,14 @@
           </a:fontRef>
         </p:style>
         <p:txBody>
-          <a:bodyPr rtlCol="0" anchor="ctr" lIns="0" rIns="0" tIns="0" bIns="0" wrap="none">
+          <a:bodyPr rtlCol="0" anchor="ctr" lIns="0" rIns="0" tIns="12700" bIns="12700" wrap="none">
             <a:noAutofit/>
           </a:bodyPr>
           <a:lstStyle/>
           <a:p>
             <a:pPr algn="ctr">
               <a:lnSpc>
-                <a:spcPct val="114000"/>
+                <a:spcPts val="1530"/>
               </a:lnSpc>
               <a:spcBef>
                 <a:spcPts val="0"/>
@@ -4345,7 +4345,7 @@
               </a:spcAft>
             </a:pPr>
             <a:r>
-              <a:rPr sz="1560" b="1" lang="en-US">
+              <a:rPr sz="1400" b="1" lang="en-US">
                 <a:solidFill>
                   <a:srgbClr val="05604A"/>
                 </a:solidFill>
@@ -4357,7 +4357,7 @@
           <a:p>
             <a:pPr algn="ctr">
               <a:lnSpc>
-                <a:spcPct val="114000"/>
+                <a:spcPts val="1310"/>
               </a:lnSpc>
               <a:spcBef>
                 <a:spcPts val="0"/>
@@ -4367,7 +4367,7 @@
               </a:spcAft>
             </a:pPr>
             <a:r>
-              <a:rPr sz="1380" b="0" lang="en-US">
+              <a:rPr sz="1180" b="0" lang="en-US">
                 <a:solidFill>
                   <a:srgbClr val="405779"/>
                 </a:solidFill>
@@ -4386,8 +4386,8 @@
         </p:nvSpPr>
         <p:spPr>
           <a:xfrm>
-            <a:off x="4236720" y="2141220"/>
-            <a:ext cx="1889760" cy="609600"/>
+            <a:off x="4236720" y="2130047"/>
+            <a:ext cx="1889760" cy="507585"/>
           </a:xfrm>
           <a:prstGeom prst="roundRect">
             <a:avLst>
@@ -4419,14 +4419,14 @@
           </a:fontRef>
         </p:style>
         <p:txBody>
-          <a:bodyPr rtlCol="0" anchor="ctr" lIns="0" rIns="0" tIns="0" bIns="0" wrap="none">
+          <a:bodyPr rtlCol="0" anchor="ctr" lIns="0" rIns="0" tIns="12700" bIns="12700" wrap="none">
             <a:noAutofit/>
           </a:bodyPr>
           <a:lstStyle/>
           <a:p>
             <a:pPr algn="ctr">
               <a:lnSpc>
-                <a:spcPct val="114000"/>
+                <a:spcPts val="1530"/>
               </a:lnSpc>
               <a:spcBef>
                 <a:spcPts val="0"/>
@@ -4436,7 +4436,7 @@
               </a:spcAft>
             </a:pPr>
             <a:r>
-              <a:rPr sz="1560" b="1" lang="en-US">
+              <a:rPr sz="1400" b="1" lang="en-US">
                 <a:solidFill>
                   <a:srgbClr val="05604A"/>
                 </a:solidFill>
@@ -4448,7 +4448,7 @@
           <a:p>
             <a:pPr algn="ctr">
               <a:lnSpc>
-                <a:spcPct val="114000"/>
+                <a:spcPts val="1310"/>
               </a:lnSpc>
               <a:spcBef>
                 <a:spcPts val="0"/>
@@ -4458,7 +4458,7 @@
               </a:spcAft>
             </a:pPr>
             <a:r>
-              <a:rPr sz="1380" b="0" lang="en-US">
+              <a:rPr sz="1180" b="0" lang="en-US">
                 <a:solidFill>
                   <a:srgbClr val="405779"/>
                 </a:solidFill>
@@ -4477,8 +4477,8 @@
         </p:nvSpPr>
         <p:spPr>
           <a:xfrm>
-            <a:off x="6461760" y="2141220"/>
-            <a:ext cx="1767840" cy="609600"/>
+            <a:off x="6461760" y="2130047"/>
+            <a:ext cx="1767840" cy="507585"/>
           </a:xfrm>
           <a:prstGeom prst="roundRect">
             <a:avLst>
@@ -4510,14 +4510,14 @@
           </a:fontRef>
         </p:style>
         <p:txBody>
-          <a:bodyPr rtlCol="0" anchor="ctr" lIns="0" rIns="0" tIns="0" bIns="0" wrap="none">
+          <a:bodyPr rtlCol="0" anchor="ctr" lIns="0" rIns="0" tIns="12700" bIns="12700" wrap="none">
             <a:noAutofit/>
           </a:bodyPr>
           <a:lstStyle/>
           <a:p>
             <a:pPr algn="ctr">
               <a:lnSpc>
-                <a:spcPct val="114000"/>
+                <a:spcPts val="1530"/>
               </a:lnSpc>
               <a:spcBef>
                 <a:spcPts val="0"/>
@@ -4527,7 +4527,7 @@
               </a:spcAft>
             </a:pPr>
             <a:r>
-              <a:rPr sz="1560" b="1" lang="en-US">
+              <a:rPr sz="1400" b="1" lang="en-US">
                 <a:solidFill>
                   <a:srgbClr val="05604A"/>
                 </a:solidFill>
@@ -4539,7 +4539,7 @@
           <a:p>
             <a:pPr algn="ctr">
               <a:lnSpc>
-                <a:spcPct val="114000"/>
+                <a:spcPts val="1310"/>
               </a:lnSpc>
               <a:spcBef>
                 <a:spcPts val="0"/>
@@ -4549,7 +4549,7 @@
               </a:spcAft>
             </a:pPr>
             <a:r>
-              <a:rPr sz="1380" b="0" lang="en-US">
+              <a:rPr sz="1180" b="0" lang="en-US">
                 <a:solidFill>
                   <a:srgbClr val="405779"/>
                 </a:solidFill>
@@ -4568,7 +4568,7 @@
         </p:nvCxnSpPr>
         <p:spPr>
           <a:xfrm>
-            <a:off x="3901440" y="2446020"/>
+            <a:off x="3901440" y="2383840"/>
             <a:ext cx="335280" cy="0"/>
           </a:xfrm>
           <a:prstGeom prst="line">
@@ -4605,7 +4605,7 @@
         </p:nvCxnSpPr>
         <p:spPr>
           <a:xfrm>
-            <a:off x="6126480" y="2446020"/>
+            <a:off x="6126480" y="2383840"/>
             <a:ext cx="335280" cy="0"/>
           </a:xfrm>
           <a:prstGeom prst="line">
@@ -4642,7 +4642,7 @@
         </p:nvCxnSpPr>
         <p:spPr>
           <a:xfrm>
-            <a:off x="8229600" y="2446020"/>
+            <a:off x="8229600" y="2383840"/>
             <a:ext cx="335280" cy="0"/>
           </a:xfrm>
           <a:prstGeom prst="line">
@@ -4679,8 +4679,8 @@
         </p:nvSpPr>
         <p:spPr>
           <a:xfrm>
-            <a:off x="8564880" y="2141220"/>
-            <a:ext cx="1783080" cy="609600"/>
+            <a:off x="8564880" y="2130047"/>
+            <a:ext cx="1783080" cy="507585"/>
           </a:xfrm>
           <a:prstGeom prst="roundRect">
             <a:avLst>
@@ -4712,14 +4712,14 @@
           </a:fontRef>
         </p:style>
         <p:txBody>
-          <a:bodyPr rtlCol="0" anchor="ctr" lIns="0" rIns="0" tIns="0" bIns="0" wrap="none">
+          <a:bodyPr rtlCol="0" anchor="ctr" lIns="0" rIns="0" tIns="12700" bIns="12700" wrap="none">
             <a:noAutofit/>
           </a:bodyPr>
           <a:lstStyle/>
           <a:p>
             <a:pPr algn="ctr">
               <a:lnSpc>
-                <a:spcPct val="114000"/>
+                <a:spcPts val="1530"/>
               </a:lnSpc>
               <a:spcBef>
                 <a:spcPts val="0"/>
@@ -4729,7 +4729,7 @@
               </a:spcAft>
             </a:pPr>
             <a:r>
-              <a:rPr sz="1560" b="1" lang="en-US">
+              <a:rPr sz="1400" b="1" lang="en-US">
                 <a:solidFill>
                   <a:srgbClr val="05604A"/>
                 </a:solidFill>
@@ -4741,7 +4741,7 @@
           <a:p>
             <a:pPr algn="ctr">
               <a:lnSpc>
-                <a:spcPct val="114000"/>
+                <a:spcPts val="1210"/>
               </a:lnSpc>
               <a:spcBef>
                 <a:spcPts val="0"/>
@@ -4751,13 +4751,35 @@
               </a:spcAft>
             </a:pPr>
             <a:r>
-              <a:rPr sz="1380" b="0" lang="en-US">
+              <a:rPr sz="1080" b="0" lang="en-US">
                 <a:solidFill>
                   <a:srgbClr val="405779"/>
                 </a:solidFill>
                 <a:latin typeface="Arial"/>
               </a:rPr>
-              <a:t>1024-D</a:t>
+              <a:t>Input ≤512 tokens</a:t>
+            </a:r>
+          </a:p>
+          <a:p>
+            <a:pPr algn="ctr">
+              <a:lnSpc>
+                <a:spcPts val="1210"/>
+              </a:lnSpc>
+              <a:spcBef>
+                <a:spcPts val="0"/>
+              </a:spcBef>
+              <a:spcAft>
+                <a:spcPts val="0"/>
+              </a:spcAft>
+            </a:pPr>
+            <a:r>
+              <a:rPr sz="1080" b="0" lang="en-US">
+                <a:solidFill>
+                  <a:srgbClr val="405779"/>
+                </a:solidFill>
+                <a:latin typeface="Arial"/>
+              </a:rPr>
+              <a:t>Output 1024-D</a:t>
             </a:r>
           </a:p>
         </p:txBody>
@@ -4770,7 +4792,7 @@
         </p:nvCxnSpPr>
         <p:spPr>
           <a:xfrm>
-            <a:off x="10347960" y="2446020"/>
+            <a:off x="10347960" y="2383840"/>
             <a:ext cx="350520" cy="0"/>
           </a:xfrm>
           <a:prstGeom prst="line">
@@ -4807,8 +4829,8 @@
         </p:nvSpPr>
         <p:spPr>
           <a:xfrm>
-            <a:off x="10698480" y="2141220"/>
-            <a:ext cx="2255520" cy="609600"/>
+            <a:off x="10698480" y="2130047"/>
+            <a:ext cx="2255520" cy="507585"/>
           </a:xfrm>
           <a:prstGeom prst="roundRect">
             <a:avLst>
@@ -4838,14 +4860,14 @@
           </a:fontRef>
         </p:style>
         <p:txBody>
-          <a:bodyPr rtlCol="0" anchor="ctr" lIns="0" rIns="0" tIns="0" bIns="0" wrap="none">
+          <a:bodyPr rtlCol="0" anchor="ctr" lIns="0" rIns="0" tIns="12700" bIns="12700" wrap="none">
             <a:noAutofit/>
           </a:bodyPr>
           <a:lstStyle/>
           <a:p>
             <a:pPr algn="ctr">
               <a:lnSpc>
-                <a:spcPct val="112000"/>
+                <a:spcPts val="1530"/>
               </a:lnSpc>
               <a:spcBef>
                 <a:spcPts val="0"/>
@@ -4855,7 +4877,7 @@
               </a:spcAft>
             </a:pPr>
             <a:r>
-              <a:rPr sz="1560" b="1" lang="en-US">
+              <a:rPr sz="1400" b="1" lang="en-US">
                 <a:solidFill>
                   <a:srgbClr val="FFFFFF"/>
                 </a:solidFill>
@@ -4867,7 +4889,7 @@
           <a:p>
             <a:pPr algn="ctr">
               <a:lnSpc>
-                <a:spcPct val="112000"/>
+                <a:spcPts val="1230"/>
               </a:lnSpc>
               <a:spcBef>
                 <a:spcPts val="0"/>
@@ -4877,7 +4899,29 @@
               </a:spcAft>
             </a:pPr>
             <a:r>
-              <a:rPr sz="1380" b="0" lang="en-US">
+              <a:rPr sz="1100" b="0" lang="en-US">
+                <a:solidFill>
+                  <a:srgbClr val="FFFFFF"/>
+                </a:solidFill>
+                <a:latin typeface="Arial"/>
+              </a:rPr>
+              <a:t>1024 → 512-D</a:t>
+            </a:r>
+          </a:p>
+          <a:p>
+            <a:pPr algn="ctr">
+              <a:lnSpc>
+                <a:spcPts val="1230"/>
+              </a:lnSpc>
+              <a:spcBef>
+                <a:spcPts val="0"/>
+              </a:spcBef>
+              <a:spcAft>
+                <a:spcPts val="0"/>
+              </a:spcAft>
+            </a:pPr>
+            <a:r>
+              <a:rPr sz="1100" b="0" lang="en-US">
                 <a:solidFill>
                   <a:srgbClr val="FFFFFF"/>
                 </a:solidFill>
@@ -4896,8 +4940,8 @@
         </p:nvSpPr>
         <p:spPr>
           <a:xfrm>
-            <a:off x="365760" y="2956560"/>
-            <a:ext cx="12694920" cy="746760"/>
+            <a:off x="365760" y="2763316"/>
+            <a:ext cx="12694920" cy="621792"/>
           </a:xfrm>
           <a:prstGeom prst="roundRect">
             <a:avLst>
@@ -4944,8 +4988,8 @@
         </p:nvSpPr>
         <p:spPr>
           <a:xfrm>
-            <a:off x="411480" y="3009900"/>
-            <a:ext cx="1203960" cy="640080"/>
+            <a:off x="411480" y="2807729"/>
+            <a:ext cx="1203960" cy="532964"/>
           </a:xfrm>
           <a:prstGeom prst="roundRect">
             <a:avLst>
@@ -4975,14 +5019,14 @@
           </a:fontRef>
         </p:style>
         <p:txBody>
-          <a:bodyPr rtlCol="0" anchor="ctr" lIns="0" rIns="0" tIns="0" bIns="0" wrap="none">
+          <a:bodyPr rtlCol="0" anchor="ctr" lIns="0" rIns="0" tIns="12700" bIns="12700" wrap="none">
             <a:noAutofit/>
           </a:bodyPr>
           <a:lstStyle/>
           <a:p>
             <a:pPr algn="ctr">
               <a:lnSpc>
-                <a:spcPct val="108000"/>
+                <a:spcPts val="1530"/>
               </a:lnSpc>
               <a:spcBef>
                 <a:spcPts val="0"/>
@@ -4992,7 +5036,7 @@
               </a:spcAft>
             </a:pPr>
             <a:r>
-              <a:rPr sz="1560" b="1" lang="en-US">
+              <a:rPr sz="1400" b="1" lang="en-US">
                 <a:solidFill>
                   <a:srgbClr val="FFFFFF"/>
                 </a:solidFill>
@@ -5004,7 +5048,7 @@
           <a:p>
             <a:pPr algn="ctr">
               <a:lnSpc>
-                <a:spcPct val="108000"/>
+                <a:spcPts val="1310"/>
               </a:lnSpc>
               <a:spcBef>
                 <a:spcPts val="0"/>
@@ -5014,7 +5058,7 @@
               </a:spcAft>
             </a:pPr>
             <a:r>
-              <a:rPr sz="1560" b="1" lang="en-US">
+              <a:rPr sz="1180" b="1" lang="en-US">
                 <a:solidFill>
                   <a:srgbClr val="FFFFFF"/>
                 </a:solidFill>
@@ -5033,7 +5077,7 @@
         </p:nvCxnSpPr>
         <p:spPr>
           <a:xfrm>
-            <a:off x="1615440" y="3329940"/>
+            <a:off x="1615440" y="3074212"/>
             <a:ext cx="335280" cy="0"/>
           </a:xfrm>
           <a:prstGeom prst="line">
@@ -5070,8 +5114,8 @@
         </p:nvSpPr>
         <p:spPr>
           <a:xfrm>
-            <a:off x="1950720" y="3025140"/>
-            <a:ext cx="1950720" cy="609600"/>
+            <a:off x="1950720" y="2820419"/>
+            <a:ext cx="1950720" cy="507585"/>
           </a:xfrm>
           <a:prstGeom prst="roundRect">
             <a:avLst>
@@ -5103,14 +5147,14 @@
           </a:fontRef>
         </p:style>
         <p:txBody>
-          <a:bodyPr rtlCol="0" anchor="ctr" lIns="0" rIns="0" tIns="0" bIns="0" wrap="none">
+          <a:bodyPr rtlCol="0" anchor="ctr" lIns="0" rIns="0" tIns="12700" bIns="12700" wrap="none">
             <a:noAutofit/>
           </a:bodyPr>
           <a:lstStyle/>
           <a:p>
             <a:pPr algn="ctr">
               <a:lnSpc>
-                <a:spcPct val="114000"/>
+                <a:spcPts val="1530"/>
               </a:lnSpc>
               <a:spcBef>
                 <a:spcPts val="0"/>
@@ -5120,7 +5164,7 @@
               </a:spcAft>
             </a:pPr>
             <a:r>
-              <a:rPr sz="1560" b="1" lang="en-US">
+              <a:rPr sz="1400" b="1" lang="en-US">
                 <a:solidFill>
                   <a:srgbClr val="07686B"/>
                 </a:solidFill>
@@ -5132,7 +5176,7 @@
           <a:p>
             <a:pPr algn="ctr">
               <a:lnSpc>
-                <a:spcPct val="114000"/>
+                <a:spcPts val="1310"/>
               </a:lnSpc>
               <a:spcBef>
                 <a:spcPts val="0"/>
@@ -5142,7 +5186,7 @@
               </a:spcAft>
             </a:pPr>
             <a:r>
-              <a:rPr sz="1380" b="0" lang="en-US">
+              <a:rPr sz="1180" b="0" lang="en-US">
                 <a:solidFill>
                   <a:srgbClr val="405779"/>
                 </a:solidFill>
@@ -5161,8 +5205,8 @@
         </p:nvSpPr>
         <p:spPr>
           <a:xfrm>
-            <a:off x="4236720" y="3025140"/>
-            <a:ext cx="1889760" cy="609600"/>
+            <a:off x="4236720" y="2820419"/>
+            <a:ext cx="1889760" cy="507585"/>
           </a:xfrm>
           <a:prstGeom prst="roundRect">
             <a:avLst>
@@ -5194,14 +5238,14 @@
           </a:fontRef>
         </p:style>
         <p:txBody>
-          <a:bodyPr rtlCol="0" anchor="ctr" lIns="0" rIns="0" tIns="0" bIns="0" wrap="none">
+          <a:bodyPr rtlCol="0" anchor="ctr" lIns="0" rIns="0" tIns="12700" bIns="12700" wrap="none">
             <a:noAutofit/>
           </a:bodyPr>
           <a:lstStyle/>
           <a:p>
             <a:pPr algn="ctr">
               <a:lnSpc>
-                <a:spcPct val="114000"/>
+                <a:spcPts val="1530"/>
               </a:lnSpc>
               <a:spcBef>
                 <a:spcPts val="0"/>
@@ -5211,7 +5255,7 @@
               </a:spcAft>
             </a:pPr>
             <a:r>
-              <a:rPr sz="1560" b="1" lang="en-US">
+              <a:rPr sz="1400" b="1" lang="en-US">
                 <a:solidFill>
                   <a:srgbClr val="07686B"/>
                 </a:solidFill>
@@ -5223,7 +5267,7 @@
           <a:p>
             <a:pPr algn="ctr">
               <a:lnSpc>
-                <a:spcPct val="114000"/>
+                <a:spcPts val="1310"/>
               </a:lnSpc>
               <a:spcBef>
                 <a:spcPts val="0"/>
@@ -5233,7 +5277,7 @@
               </a:spcAft>
             </a:pPr>
             <a:r>
-              <a:rPr sz="1380" b="0" lang="en-US">
+              <a:rPr sz="1180" b="0" lang="en-US">
                 <a:solidFill>
                   <a:srgbClr val="405779"/>
                 </a:solidFill>
@@ -5252,8 +5296,8 @@
         </p:nvSpPr>
         <p:spPr>
           <a:xfrm>
-            <a:off x="6461760" y="3025140"/>
-            <a:ext cx="1767840" cy="609600"/>
+            <a:off x="6461760" y="2820419"/>
+            <a:ext cx="1767840" cy="507585"/>
           </a:xfrm>
           <a:prstGeom prst="roundRect">
             <a:avLst>
@@ -5285,14 +5329,14 @@
           </a:fontRef>
         </p:style>
         <p:txBody>
-          <a:bodyPr rtlCol="0" anchor="ctr" lIns="0" rIns="0" tIns="0" bIns="0" wrap="none">
+          <a:bodyPr rtlCol="0" anchor="ctr" lIns="0" rIns="0" tIns="12700" bIns="12700" wrap="none">
             <a:noAutofit/>
           </a:bodyPr>
           <a:lstStyle/>
           <a:p>
             <a:pPr algn="ctr">
               <a:lnSpc>
-                <a:spcPct val="114000"/>
+                <a:spcPts val="1530"/>
               </a:lnSpc>
               <a:spcBef>
                 <a:spcPts val="0"/>
@@ -5302,7 +5346,7 @@
               </a:spcAft>
             </a:pPr>
             <a:r>
-              <a:rPr sz="1560" b="1" lang="en-US">
+              <a:rPr sz="1400" b="1" lang="en-US">
                 <a:solidFill>
                   <a:srgbClr val="07686B"/>
                 </a:solidFill>
@@ -5314,7 +5358,7 @@
           <a:p>
             <a:pPr algn="ctr">
               <a:lnSpc>
-                <a:spcPct val="114000"/>
+                <a:spcPts val="1310"/>
               </a:lnSpc>
               <a:spcBef>
                 <a:spcPts val="0"/>
@@ -5324,7 +5368,7 @@
               </a:spcAft>
             </a:pPr>
             <a:r>
-              <a:rPr sz="1380" b="0" lang="en-US">
+              <a:rPr sz="1180" b="0" lang="en-US">
                 <a:solidFill>
                   <a:srgbClr val="405779"/>
                 </a:solidFill>
@@ -5343,7 +5387,7 @@
         </p:nvCxnSpPr>
         <p:spPr>
           <a:xfrm>
-            <a:off x="3901440" y="3329940"/>
+            <a:off x="3901440" y="3074212"/>
             <a:ext cx="335280" cy="0"/>
           </a:xfrm>
           <a:prstGeom prst="line">
@@ -5380,7 +5424,7 @@
         </p:nvCxnSpPr>
         <p:spPr>
           <a:xfrm>
-            <a:off x="6126480" y="3329940"/>
+            <a:off x="6126480" y="3074212"/>
             <a:ext cx="335280" cy="0"/>
           </a:xfrm>
           <a:prstGeom prst="line">
@@ -5417,7 +5461,7 @@
         </p:nvCxnSpPr>
         <p:spPr>
           <a:xfrm>
-            <a:off x="8229600" y="3329940"/>
+            <a:off x="8229600" y="3074212"/>
             <a:ext cx="335280" cy="0"/>
           </a:xfrm>
           <a:prstGeom prst="line">
@@ -5454,8 +5498,8 @@
         </p:nvSpPr>
         <p:spPr>
           <a:xfrm>
-            <a:off x="8564880" y="3025140"/>
-            <a:ext cx="1783080" cy="609600"/>
+            <a:off x="8564880" y="2820419"/>
+            <a:ext cx="1783080" cy="507585"/>
           </a:xfrm>
           <a:prstGeom prst="roundRect">
             <a:avLst>
@@ -5487,14 +5531,14 @@
           </a:fontRef>
         </p:style>
         <p:txBody>
-          <a:bodyPr rtlCol="0" anchor="ctr" lIns="0" rIns="0" tIns="0" bIns="0" wrap="none">
+          <a:bodyPr rtlCol="0" anchor="ctr" lIns="0" rIns="0" tIns="12700" bIns="12700" wrap="none">
             <a:noAutofit/>
           </a:bodyPr>
           <a:lstStyle/>
           <a:p>
             <a:pPr algn="ctr">
               <a:lnSpc>
-                <a:spcPct val="114000"/>
+                <a:spcPts val="1530"/>
               </a:lnSpc>
               <a:spcBef>
                 <a:spcPts val="0"/>
@@ -5504,7 +5548,7 @@
               </a:spcAft>
             </a:pPr>
             <a:r>
-              <a:rPr sz="1560" b="1" lang="en-US">
+              <a:rPr sz="1400" b="1" lang="en-US">
                 <a:solidFill>
                   <a:srgbClr val="07686B"/>
                 </a:solidFill>
@@ -5516,7 +5560,7 @@
           <a:p>
             <a:pPr algn="ctr">
               <a:lnSpc>
-                <a:spcPct val="114000"/>
+                <a:spcPts val="1210"/>
               </a:lnSpc>
               <a:spcBef>
                 <a:spcPts val="0"/>
@@ -5526,13 +5570,35 @@
               </a:spcAft>
             </a:pPr>
             <a:r>
-              <a:rPr sz="1380" b="0" lang="en-US">
+              <a:rPr sz="1080" b="0" lang="en-US">
                 <a:solidFill>
                   <a:srgbClr val="405779"/>
                 </a:solidFill>
                 <a:latin typeface="Arial"/>
               </a:rPr>
-              <a:t>1024-D</a:t>
+              <a:t>Input ≤512 tokens</a:t>
+            </a:r>
+          </a:p>
+          <a:p>
+            <a:pPr algn="ctr">
+              <a:lnSpc>
+                <a:spcPts val="1210"/>
+              </a:lnSpc>
+              <a:spcBef>
+                <a:spcPts val="0"/>
+              </a:spcBef>
+              <a:spcAft>
+                <a:spcPts val="0"/>
+              </a:spcAft>
+            </a:pPr>
+            <a:r>
+              <a:rPr sz="1080" b="0" lang="en-US">
+                <a:solidFill>
+                  <a:srgbClr val="405779"/>
+                </a:solidFill>
+                <a:latin typeface="Arial"/>
+              </a:rPr>
+              <a:t>Output 1024-D</a:t>
             </a:r>
           </a:p>
         </p:txBody>
@@ -5545,7 +5611,7 @@
         </p:nvCxnSpPr>
         <p:spPr>
           <a:xfrm>
-            <a:off x="10347960" y="3329940"/>
+            <a:off x="10347960" y="3074212"/>
             <a:ext cx="350520" cy="0"/>
           </a:xfrm>
           <a:prstGeom prst="line">
@@ -5582,8 +5648,8 @@
         </p:nvSpPr>
         <p:spPr>
           <a:xfrm>
-            <a:off x="10698480" y="3025140"/>
-            <a:ext cx="2255520" cy="609600"/>
+            <a:off x="10698480" y="2820419"/>
+            <a:ext cx="2255520" cy="507585"/>
           </a:xfrm>
           <a:prstGeom prst="roundRect">
             <a:avLst>
@@ -5613,14 +5679,14 @@
           </a:fontRef>
         </p:style>
         <p:txBody>
-          <a:bodyPr rtlCol="0" anchor="ctr" lIns="0" rIns="0" tIns="0" bIns="0" wrap="none">
+          <a:bodyPr rtlCol="0" anchor="ctr" lIns="0" rIns="0" tIns="12700" bIns="12700" wrap="none">
             <a:noAutofit/>
           </a:bodyPr>
           <a:lstStyle/>
           <a:p>
             <a:pPr algn="ctr">
               <a:lnSpc>
-                <a:spcPct val="112000"/>
+                <a:spcPts val="1530"/>
               </a:lnSpc>
               <a:spcBef>
                 <a:spcPts val="0"/>
@@ -5630,7 +5696,7 @@
               </a:spcAft>
             </a:pPr>
             <a:r>
-              <a:rPr sz="1560" b="1" lang="en-US">
+              <a:rPr sz="1400" b="1" lang="en-US">
                 <a:solidFill>
                   <a:srgbClr val="FFFFFF"/>
                 </a:solidFill>
@@ -5642,7 +5708,7 @@
           <a:p>
             <a:pPr algn="ctr">
               <a:lnSpc>
-                <a:spcPct val="112000"/>
+                <a:spcPts val="1230"/>
               </a:lnSpc>
               <a:spcBef>
                 <a:spcPts val="0"/>
@@ -5652,7 +5718,29 @@
               </a:spcAft>
             </a:pPr>
             <a:r>
-              <a:rPr sz="1380" b="0" lang="en-US">
+              <a:rPr sz="1100" b="0" lang="en-US">
+                <a:solidFill>
+                  <a:srgbClr val="FFFFFF"/>
+                </a:solidFill>
+                <a:latin typeface="Arial"/>
+              </a:rPr>
+              <a:t>1024 → 512-D</a:t>
+            </a:r>
+          </a:p>
+          <a:p>
+            <a:pPr algn="ctr">
+              <a:lnSpc>
+                <a:spcPts val="1230"/>
+              </a:lnSpc>
+              <a:spcBef>
+                <a:spcPts val="0"/>
+              </a:spcBef>
+              <a:spcAft>
+                <a:spcPts val="0"/>
+              </a:spcAft>
+            </a:pPr>
+            <a:r>
+              <a:rPr sz="1100" b="0" lang="en-US">
                 <a:solidFill>
                   <a:srgbClr val="FFFFFF"/>
                 </a:solidFill>
@@ -5671,8 +5759,8 @@
         </p:nvSpPr>
         <p:spPr>
           <a:xfrm>
-            <a:off x="365760" y="3840480"/>
-            <a:ext cx="12694920" cy="746760"/>
+            <a:off x="365760" y="3453688"/>
+            <a:ext cx="12694920" cy="621792"/>
           </a:xfrm>
           <a:prstGeom prst="roundRect">
             <a:avLst>
@@ -5719,8 +5807,8 @@
         </p:nvSpPr>
         <p:spPr>
           <a:xfrm>
-            <a:off x="411480" y="3893820"/>
-            <a:ext cx="1203960" cy="640080"/>
+            <a:off x="411480" y="3498101"/>
+            <a:ext cx="1203960" cy="532964"/>
           </a:xfrm>
           <a:prstGeom prst="roundRect">
             <a:avLst>
@@ -5750,14 +5838,14 @@
           </a:fontRef>
         </p:style>
         <p:txBody>
-          <a:bodyPr rtlCol="0" anchor="ctr" lIns="0" rIns="0" tIns="0" bIns="0" wrap="none">
+          <a:bodyPr rtlCol="0" anchor="ctr" lIns="0" rIns="0" tIns="12700" bIns="12700" wrap="none">
             <a:noAutofit/>
           </a:bodyPr>
           <a:lstStyle/>
           <a:p>
             <a:pPr algn="ctr">
               <a:lnSpc>
-                <a:spcPct val="108000"/>
+                <a:spcPts val="1530"/>
               </a:lnSpc>
               <a:spcBef>
                 <a:spcPts val="0"/>
@@ -5767,13 +5855,35 @@
               </a:spcAft>
             </a:pPr>
             <a:r>
-              <a:rPr sz="1560" b="1" lang="en-US">
+              <a:rPr sz="1400" b="1" lang="en-US">
                 <a:solidFill>
                   <a:srgbClr val="FFFFFF"/>
                 </a:solidFill>
                 <a:latin typeface="Arial"/>
               </a:rPr>
               <a:t>Description</a:t>
+            </a:r>
+          </a:p>
+          <a:p>
+            <a:pPr algn="ctr">
+              <a:lnSpc>
+                <a:spcPts val="1530"/>
+              </a:lnSpc>
+              <a:spcBef>
+                <a:spcPts val="0"/>
+              </a:spcBef>
+              <a:spcAft>
+                <a:spcPts val="0"/>
+              </a:spcAft>
+            </a:pPr>
+            <a:r>
+              <a:rPr sz="1400" b="1" lang="en-US">
+                <a:solidFill>
+                  <a:srgbClr val="FFFFFF"/>
+                </a:solidFill>
+                <a:latin typeface="Arial"/>
+              </a:rPr>
+              <a:t>Qwen</a:t>
             </a:r>
           </a:p>
         </p:txBody>
@@ -5786,7 +5896,7 @@
         </p:nvCxnSpPr>
         <p:spPr>
           <a:xfrm>
-            <a:off x="1615440" y="4213860"/>
+            <a:off x="1615440" y="3764584"/>
             <a:ext cx="335280" cy="0"/>
           </a:xfrm>
           <a:prstGeom prst="line">
@@ -5823,8 +5933,8 @@
         </p:nvSpPr>
         <p:spPr>
           <a:xfrm>
-            <a:off x="1950720" y="3909060"/>
-            <a:ext cx="1950720" cy="609600"/>
+            <a:off x="1950720" y="3510791"/>
+            <a:ext cx="1950720" cy="507585"/>
           </a:xfrm>
           <a:prstGeom prst="roundRect">
             <a:avLst>
@@ -5856,14 +5966,14 @@
           </a:fontRef>
         </p:style>
         <p:txBody>
-          <a:bodyPr rtlCol="0" anchor="ctr" lIns="0" rIns="0" tIns="0" bIns="0" wrap="none">
+          <a:bodyPr rtlCol="0" anchor="ctr" lIns="0" rIns="0" tIns="12700" bIns="12700" wrap="none">
             <a:noAutofit/>
           </a:bodyPr>
           <a:lstStyle/>
           <a:p>
             <a:pPr algn="ctr">
               <a:lnSpc>
-                <a:spcPct val="114000"/>
+                <a:spcPts val="1530"/>
               </a:lnSpc>
               <a:spcBef>
                 <a:spcPts val="0"/>
@@ -5873,7 +5983,7 @@
               </a:spcAft>
             </a:pPr>
             <a:r>
-              <a:rPr sz="1560" b="1" lang="en-US">
+              <a:rPr sz="1400" b="1" lang="en-US">
                 <a:solidFill>
                   <a:srgbClr val="2454B8"/>
                 </a:solidFill>
@@ -5885,7 +5995,7 @@
           <a:p>
             <a:pPr algn="ctr">
               <a:lnSpc>
-                <a:spcPct val="114000"/>
+                <a:spcPts val="1310"/>
               </a:lnSpc>
               <a:spcBef>
                 <a:spcPts val="0"/>
@@ -5895,7 +6005,7 @@
               </a:spcAft>
             </a:pPr>
             <a:r>
-              <a:rPr sz="1380" b="0" lang="en-US">
+              <a:rPr sz="1180" b="0" lang="en-US">
                 <a:solidFill>
                   <a:srgbClr val="405779"/>
                 </a:solidFill>
@@ -5914,8 +6024,8 @@
         </p:nvSpPr>
         <p:spPr>
           <a:xfrm>
-            <a:off x="4236720" y="3909060"/>
-            <a:ext cx="1889760" cy="609600"/>
+            <a:off x="4236720" y="3510791"/>
+            <a:ext cx="1889760" cy="507585"/>
           </a:xfrm>
           <a:prstGeom prst="roundRect">
             <a:avLst>
@@ -5947,14 +6057,14 @@
           </a:fontRef>
         </p:style>
         <p:txBody>
-          <a:bodyPr rtlCol="0" anchor="ctr" lIns="0" rIns="0" tIns="0" bIns="0" wrap="none">
+          <a:bodyPr rtlCol="0" anchor="ctr" lIns="0" rIns="0" tIns="12700" bIns="12700" wrap="none">
             <a:noAutofit/>
           </a:bodyPr>
           <a:lstStyle/>
           <a:p>
             <a:pPr algn="ctr">
               <a:lnSpc>
-                <a:spcPct val="114000"/>
+                <a:spcPts val="1530"/>
               </a:lnSpc>
               <a:spcBef>
                 <a:spcPts val="0"/>
@@ -5964,7 +6074,7 @@
               </a:spcAft>
             </a:pPr>
             <a:r>
-              <a:rPr sz="1560" b="1" lang="en-US">
+              <a:rPr sz="1400" b="1" lang="en-US">
                 <a:solidFill>
                   <a:srgbClr val="2454B8"/>
                 </a:solidFill>
@@ -5976,7 +6086,7 @@
           <a:p>
             <a:pPr algn="ctr">
               <a:lnSpc>
-                <a:spcPct val="114000"/>
+                <a:spcPts val="1310"/>
               </a:lnSpc>
               <a:spcBef>
                 <a:spcPts val="0"/>
@@ -5986,7 +6096,7 @@
               </a:spcAft>
             </a:pPr>
             <a:r>
-              <a:rPr sz="1380" b="0" lang="en-US">
+              <a:rPr sz="1180" b="0" lang="en-US">
                 <a:solidFill>
                   <a:srgbClr val="405779"/>
                 </a:solidFill>
@@ -6005,8 +6115,8 @@
         </p:nvSpPr>
         <p:spPr>
           <a:xfrm>
-            <a:off x="6461760" y="3909060"/>
-            <a:ext cx="1767840" cy="609600"/>
+            <a:off x="6461760" y="3510791"/>
+            <a:ext cx="1767840" cy="507585"/>
           </a:xfrm>
           <a:prstGeom prst="roundRect">
             <a:avLst>
@@ -6038,14 +6148,14 @@
           </a:fontRef>
         </p:style>
         <p:txBody>
-          <a:bodyPr rtlCol="0" anchor="ctr" lIns="0" rIns="0" tIns="0" bIns="0" wrap="none">
+          <a:bodyPr rtlCol="0" anchor="ctr" lIns="0" rIns="0" tIns="12700" bIns="12700" wrap="none">
             <a:noAutofit/>
           </a:bodyPr>
           <a:lstStyle/>
           <a:p>
             <a:pPr algn="ctr">
               <a:lnSpc>
-                <a:spcPct val="114000"/>
+                <a:spcPts val="1530"/>
               </a:lnSpc>
               <a:spcBef>
                 <a:spcPts val="0"/>
@@ -6055,7 +6165,7 @@
               </a:spcAft>
             </a:pPr>
             <a:r>
-              <a:rPr sz="1560" b="1" lang="en-US">
+              <a:rPr sz="1400" b="1" lang="en-US">
                 <a:solidFill>
                   <a:srgbClr val="2454B8"/>
                 </a:solidFill>
@@ -6067,7 +6177,7 @@
           <a:p>
             <a:pPr algn="ctr">
               <a:lnSpc>
-                <a:spcPct val="114000"/>
+                <a:spcPts val="1310"/>
               </a:lnSpc>
               <a:spcBef>
                 <a:spcPts val="0"/>
@@ -6077,7 +6187,7 @@
               </a:spcAft>
             </a:pPr>
             <a:r>
-              <a:rPr sz="1380" b="0" lang="en-US">
+              <a:rPr sz="1180" b="0" lang="en-US">
                 <a:solidFill>
                   <a:srgbClr val="405779"/>
                 </a:solidFill>
@@ -6096,7 +6206,7 @@
         </p:nvCxnSpPr>
         <p:spPr>
           <a:xfrm>
-            <a:off x="3901440" y="4213860"/>
+            <a:off x="3901440" y="3764584"/>
             <a:ext cx="335280" cy="0"/>
           </a:xfrm>
           <a:prstGeom prst="line">
@@ -6133,7 +6243,7 @@
         </p:nvCxnSpPr>
         <p:spPr>
           <a:xfrm>
-            <a:off x="6126480" y="4213860"/>
+            <a:off x="6126480" y="3764584"/>
             <a:ext cx="335280" cy="0"/>
           </a:xfrm>
           <a:prstGeom prst="line">
@@ -6170,7 +6280,7 @@
         </p:nvCxnSpPr>
         <p:spPr>
           <a:xfrm>
-            <a:off x="8229600" y="4213860"/>
+            <a:off x="8229600" y="3764584"/>
             <a:ext cx="335280" cy="0"/>
           </a:xfrm>
           <a:prstGeom prst="line">
@@ -6207,8 +6317,8 @@
         </p:nvSpPr>
         <p:spPr>
           <a:xfrm>
-            <a:off x="8564880" y="3909060"/>
-            <a:ext cx="1783080" cy="609600"/>
+            <a:off x="8564880" y="3510791"/>
+            <a:ext cx="1783080" cy="507585"/>
           </a:xfrm>
           <a:prstGeom prst="roundRect">
             <a:avLst>
@@ -6240,14 +6350,14 @@
           </a:fontRef>
         </p:style>
         <p:txBody>
-          <a:bodyPr rtlCol="0" anchor="ctr" lIns="0" rIns="0" tIns="0" bIns="0" wrap="none">
+          <a:bodyPr rtlCol="0" anchor="ctr" lIns="0" rIns="0" tIns="12700" bIns="12700" wrap="none">
             <a:noAutofit/>
           </a:bodyPr>
           <a:lstStyle/>
           <a:p>
             <a:pPr algn="ctr">
               <a:lnSpc>
-                <a:spcPct val="114000"/>
+                <a:spcPts val="1530"/>
               </a:lnSpc>
               <a:spcBef>
                 <a:spcPts val="0"/>
@@ -6257,7 +6367,7 @@
               </a:spcAft>
             </a:pPr>
             <a:r>
-              <a:rPr sz="1560" b="1" lang="en-US">
+              <a:rPr sz="1400" b="1" lang="en-US">
                 <a:solidFill>
                   <a:srgbClr val="2454B8"/>
                 </a:solidFill>
@@ -6269,7 +6379,7 @@
           <a:p>
             <a:pPr algn="ctr">
               <a:lnSpc>
-                <a:spcPct val="114000"/>
+                <a:spcPts val="1210"/>
               </a:lnSpc>
               <a:spcBef>
                 <a:spcPts val="0"/>
@@ -6279,13 +6389,35 @@
               </a:spcAft>
             </a:pPr>
             <a:r>
-              <a:rPr sz="1380" b="0" lang="en-US">
+              <a:rPr sz="1080" b="0" lang="en-US">
                 <a:solidFill>
                   <a:srgbClr val="405779"/>
                 </a:solidFill>
                 <a:latin typeface="Arial"/>
               </a:rPr>
-              <a:t>1024-D</a:t>
+              <a:t>Input ≤512 tokens</a:t>
+            </a:r>
+          </a:p>
+          <a:p>
+            <a:pPr algn="ctr">
+              <a:lnSpc>
+                <a:spcPts val="1210"/>
+              </a:lnSpc>
+              <a:spcBef>
+                <a:spcPts val="0"/>
+              </a:spcBef>
+              <a:spcAft>
+                <a:spcPts val="0"/>
+              </a:spcAft>
+            </a:pPr>
+            <a:r>
+              <a:rPr sz="1080" b="0" lang="en-US">
+                <a:solidFill>
+                  <a:srgbClr val="405779"/>
+                </a:solidFill>
+                <a:latin typeface="Arial"/>
+              </a:rPr>
+              <a:t>Output 1024-D</a:t>
             </a:r>
           </a:p>
         </p:txBody>
@@ -6298,7 +6430,7 @@
         </p:nvCxnSpPr>
         <p:spPr>
           <a:xfrm>
-            <a:off x="10347960" y="4213860"/>
+            <a:off x="10347960" y="3764584"/>
             <a:ext cx="350520" cy="0"/>
           </a:xfrm>
           <a:prstGeom prst="line">
@@ -6335,8 +6467,8 @@
         </p:nvSpPr>
         <p:spPr>
           <a:xfrm>
-            <a:off x="10698480" y="3909060"/>
-            <a:ext cx="2255520" cy="609600"/>
+            <a:off x="10698480" y="3510791"/>
+            <a:ext cx="2255520" cy="507585"/>
           </a:xfrm>
           <a:prstGeom prst="roundRect">
             <a:avLst>
@@ -6366,14 +6498,14 @@
           </a:fontRef>
         </p:style>
         <p:txBody>
-          <a:bodyPr rtlCol="0" anchor="ctr" lIns="0" rIns="0" tIns="0" bIns="0" wrap="none">
+          <a:bodyPr rtlCol="0" anchor="ctr" lIns="0" rIns="0" tIns="12700" bIns="12700" wrap="none">
             <a:noAutofit/>
           </a:bodyPr>
           <a:lstStyle/>
           <a:p>
             <a:pPr algn="ctr">
               <a:lnSpc>
-                <a:spcPct val="112000"/>
+                <a:spcPts val="1530"/>
               </a:lnSpc>
               <a:spcBef>
                 <a:spcPts val="0"/>
@@ -6383,7 +6515,7 @@
               </a:spcAft>
             </a:pPr>
             <a:r>
-              <a:rPr sz="1560" b="1" lang="en-US">
+              <a:rPr sz="1400" b="1" lang="en-US">
                 <a:solidFill>
                   <a:srgbClr val="FFFFFF"/>
                 </a:solidFill>
@@ -6395,7 +6527,7 @@
           <a:p>
             <a:pPr algn="ctr">
               <a:lnSpc>
-                <a:spcPct val="112000"/>
+                <a:spcPts val="1230"/>
               </a:lnSpc>
               <a:spcBef>
                 <a:spcPts val="0"/>
@@ -6405,7 +6537,29 @@
               </a:spcAft>
             </a:pPr>
             <a:r>
-              <a:rPr sz="1380" b="0" lang="en-US">
+              <a:rPr sz="1100" b="0" lang="en-US">
+                <a:solidFill>
+                  <a:srgbClr val="FFFFFF"/>
+                </a:solidFill>
+                <a:latin typeface="Arial"/>
+              </a:rPr>
+              <a:t>1024 → 512-D</a:t>
+            </a:r>
+          </a:p>
+          <a:p>
+            <a:pPr algn="ctr">
+              <a:lnSpc>
+                <a:spcPts val="1230"/>
+              </a:lnSpc>
+              <a:spcBef>
+                <a:spcPts val="0"/>
+              </a:spcBef>
+              <a:spcAft>
+                <a:spcPts val="0"/>
+              </a:spcAft>
+            </a:pPr>
+            <a:r>
+              <a:rPr sz="1100" b="0" lang="en-US">
                 <a:solidFill>
                   <a:srgbClr val="FFFFFF"/>
                 </a:solidFill>
@@ -6424,8 +6578,8 @@
         </p:nvSpPr>
         <p:spPr>
           <a:xfrm>
-            <a:off x="365760" y="4724400"/>
-            <a:ext cx="12694920" cy="746760"/>
+            <a:off x="365760" y="4834432"/>
+            <a:ext cx="12694920" cy="621792"/>
           </a:xfrm>
           <a:prstGeom prst="roundRect">
             <a:avLst>
@@ -6472,8 +6626,8 @@
         </p:nvSpPr>
         <p:spPr>
           <a:xfrm>
-            <a:off x="411480" y="4777740"/>
-            <a:ext cx="1203960" cy="640080"/>
+            <a:off x="411480" y="4878845"/>
+            <a:ext cx="1203960" cy="532964"/>
           </a:xfrm>
           <a:prstGeom prst="roundRect">
             <a:avLst>
@@ -6503,14 +6657,14 @@
           </a:fontRef>
         </p:style>
         <p:txBody>
-          <a:bodyPr rtlCol="0" anchor="ctr" lIns="0" rIns="0" tIns="0" bIns="0" wrap="none">
+          <a:bodyPr rtlCol="0" anchor="ctr" lIns="0" rIns="0" tIns="12700" bIns="12700" wrap="none">
             <a:noAutofit/>
           </a:bodyPr>
           <a:lstStyle/>
           <a:p>
             <a:pPr algn="ctr">
               <a:lnSpc>
-                <a:spcPct val="108000"/>
+                <a:spcPts val="1530"/>
               </a:lnSpc>
               <a:spcBef>
                 <a:spcPts val="0"/>
@@ -6520,7 +6674,7 @@
               </a:spcAft>
             </a:pPr>
             <a:r>
-              <a:rPr sz="1560" b="1" lang="en-US">
+              <a:rPr sz="1400" b="1" lang="en-US">
                 <a:solidFill>
                   <a:srgbClr val="FFFFFF"/>
                 </a:solidFill>
@@ -6532,7 +6686,7 @@
           <a:p>
             <a:pPr algn="ctr">
               <a:lnSpc>
-                <a:spcPct val="108000"/>
+                <a:spcPts val="1310"/>
               </a:lnSpc>
               <a:spcBef>
                 <a:spcPts val="0"/>
@@ -6542,7 +6696,7 @@
               </a:spcAft>
             </a:pPr>
             <a:r>
-              <a:rPr sz="1320" b="0" lang="en-US">
+              <a:rPr sz="1180" b="0" lang="en-US">
                 <a:solidFill>
                   <a:srgbClr val="FFFFFF"/>
                 </a:solidFill>
@@ -6561,7 +6715,7 @@
         </p:nvCxnSpPr>
         <p:spPr>
           <a:xfrm>
-            <a:off x="1615440" y="5097780"/>
+            <a:off x="1615440" y="5145328"/>
             <a:ext cx="335280" cy="0"/>
           </a:xfrm>
           <a:prstGeom prst="line">
@@ -6598,8 +6752,8 @@
         </p:nvSpPr>
         <p:spPr>
           <a:xfrm>
-            <a:off x="1950720" y="4792980"/>
-            <a:ext cx="1950720" cy="609600"/>
+            <a:off x="1950720" y="4891535"/>
+            <a:ext cx="1950720" cy="507585"/>
           </a:xfrm>
           <a:prstGeom prst="roundRect">
             <a:avLst>
@@ -6631,14 +6785,14 @@
           </a:fontRef>
         </p:style>
         <p:txBody>
-          <a:bodyPr rtlCol="0" anchor="ctr" lIns="0" rIns="0" tIns="0" bIns="0" wrap="none">
+          <a:bodyPr rtlCol="0" anchor="ctr" lIns="0" rIns="0" tIns="12700" bIns="12700" wrap="none">
             <a:noAutofit/>
           </a:bodyPr>
           <a:lstStyle/>
           <a:p>
             <a:pPr algn="ctr">
               <a:lnSpc>
-                <a:spcPct val="108000"/>
+                <a:spcPts val="1530"/>
               </a:lnSpc>
               <a:spcBef>
                 <a:spcPts val="0"/>
@@ -6648,7 +6802,7 @@
               </a:spcAft>
             </a:pPr>
             <a:r>
-              <a:rPr sz="1680" b="1" lang="en-US">
+              <a:rPr sz="1400" b="1" lang="en-US">
                 <a:solidFill>
                   <a:srgbClr val="12284B"/>
                 </a:solidFill>
@@ -6667,7 +6821,7 @@
         </p:nvCxnSpPr>
         <p:spPr>
           <a:xfrm>
-            <a:off x="3901440" y="5097780"/>
+            <a:off x="3901440" y="5145328"/>
             <a:ext cx="4663440" cy="0"/>
           </a:xfrm>
           <a:prstGeom prst="line">
@@ -6704,8 +6858,8 @@
         </p:nvSpPr>
         <p:spPr>
           <a:xfrm>
-            <a:off x="5410200" y="4808220"/>
-            <a:ext cx="1645920" cy="213360"/>
+            <a:off x="5410200" y="4904224"/>
+            <a:ext cx="1645920" cy="177654"/>
           </a:xfrm>
           <a:prstGeom prst="rect">
             <a:avLst/>
@@ -6714,14 +6868,14 @@
           <a:effectLst/>
         </p:spPr>
         <p:txBody>
-          <a:bodyPr wrap="none" lIns="0" rIns="0" tIns="0" bIns="0" anchor="ctr">
+          <a:bodyPr wrap="none" lIns="0" rIns="0" tIns="12700" bIns="12700" anchor="ctr">
             <a:noAutofit/>
           </a:bodyPr>
           <a:lstStyle/>
           <a:p>
             <a:pPr algn="ctr">
               <a:lnSpc>
-                <a:spcPct val="108000"/>
+                <a:spcPts val="1530"/>
               </a:lnSpc>
               <a:spcBef>
                 <a:spcPts val="0"/>
@@ -6731,7 +6885,7 @@
               </a:spcAft>
             </a:pPr>
             <a:r>
-              <a:rPr sz="1320" b="0" lang="en-US">
+              <a:rPr sz="1400" b="0" lang="en-US">
                 <a:solidFill>
                   <a:srgbClr val="405779"/>
                 </a:solidFill>
@@ -6750,8 +6904,8 @@
         </p:nvSpPr>
         <p:spPr>
           <a:xfrm>
-            <a:off x="8564880" y="4792980"/>
-            <a:ext cx="1783080" cy="609600"/>
+            <a:off x="8564880" y="4891535"/>
+            <a:ext cx="1783080" cy="507585"/>
           </a:xfrm>
           <a:prstGeom prst="roundRect">
             <a:avLst>
@@ -6783,14 +6937,14 @@
           </a:fontRef>
         </p:style>
         <p:txBody>
-          <a:bodyPr rtlCol="0" anchor="ctr" lIns="0" rIns="0" tIns="0" bIns="0" wrap="none">
+          <a:bodyPr rtlCol="0" anchor="ctr" lIns="0" rIns="0" tIns="12700" bIns="12700" wrap="none">
             <a:noAutofit/>
           </a:bodyPr>
           <a:lstStyle/>
           <a:p>
             <a:pPr algn="ctr">
               <a:lnSpc>
-                <a:spcPct val="114000"/>
+                <a:spcPts val="1530"/>
               </a:lnSpc>
               <a:spcBef>
                 <a:spcPts val="0"/>
@@ -6800,7 +6954,7 @@
               </a:spcAft>
             </a:pPr>
             <a:r>
-              <a:rPr sz="1560" b="1" lang="en-US">
+              <a:rPr sz="1400" b="1" lang="en-US">
                 <a:solidFill>
                   <a:srgbClr val="414B5A"/>
                 </a:solidFill>
@@ -6812,7 +6966,7 @@
           <a:p>
             <a:pPr algn="ctr">
               <a:lnSpc>
-                <a:spcPct val="114000"/>
+                <a:spcPts val="1210"/>
               </a:lnSpc>
               <a:spcBef>
                 <a:spcPts val="0"/>
@@ -6822,13 +6976,35 @@
               </a:spcAft>
             </a:pPr>
             <a:r>
-              <a:rPr sz="1380" b="0" lang="en-US">
+              <a:rPr sz="1080" b="0" lang="en-US">
                 <a:solidFill>
                   <a:srgbClr val="405779"/>
                 </a:solidFill>
                 <a:latin typeface="Arial"/>
               </a:rPr>
-              <a:t>1024-D</a:t>
+              <a:t>Input ≤512 tokens</a:t>
+            </a:r>
+          </a:p>
+          <a:p>
+            <a:pPr algn="ctr">
+              <a:lnSpc>
+                <a:spcPts val="1210"/>
+              </a:lnSpc>
+              <a:spcBef>
+                <a:spcPts val="0"/>
+              </a:spcBef>
+              <a:spcAft>
+                <a:spcPts val="0"/>
+              </a:spcAft>
+            </a:pPr>
+            <a:r>
+              <a:rPr sz="1080" b="0" lang="en-US">
+                <a:solidFill>
+                  <a:srgbClr val="405779"/>
+                </a:solidFill>
+                <a:latin typeface="Arial"/>
+              </a:rPr>
+              <a:t>Output 1024-D</a:t>
             </a:r>
           </a:p>
         </p:txBody>
@@ -6841,7 +7017,7 @@
         </p:nvCxnSpPr>
         <p:spPr>
           <a:xfrm>
-            <a:off x="10347960" y="5097780"/>
+            <a:off x="10347960" y="5145328"/>
             <a:ext cx="350520" cy="0"/>
           </a:xfrm>
           <a:prstGeom prst="line">
@@ -6878,8 +7054,8 @@
         </p:nvSpPr>
         <p:spPr>
           <a:xfrm>
-            <a:off x="10698480" y="4792980"/>
-            <a:ext cx="2255520" cy="609600"/>
+            <a:off x="10698480" y="4891535"/>
+            <a:ext cx="2255520" cy="507585"/>
           </a:xfrm>
           <a:prstGeom prst="roundRect">
             <a:avLst>
@@ -6909,14 +7085,14 @@
           </a:fontRef>
         </p:style>
         <p:txBody>
-          <a:bodyPr rtlCol="0" anchor="ctr" lIns="0" rIns="0" tIns="0" bIns="0" wrap="none">
+          <a:bodyPr rtlCol="0" anchor="ctr" lIns="0" rIns="0" tIns="12700" bIns="12700" wrap="none">
             <a:noAutofit/>
           </a:bodyPr>
           <a:lstStyle/>
           <a:p>
             <a:pPr algn="ctr">
               <a:lnSpc>
-                <a:spcPct val="112000"/>
+                <a:spcPts val="1530"/>
               </a:lnSpc>
               <a:spcBef>
                 <a:spcPts val="0"/>
@@ -6926,7 +7102,7 @@
               </a:spcAft>
             </a:pPr>
             <a:r>
-              <a:rPr sz="1560" b="1" lang="en-US">
+              <a:rPr sz="1400" b="1" lang="en-US">
                 <a:solidFill>
                   <a:srgbClr val="FFFFFF"/>
                 </a:solidFill>
@@ -6938,7 +7114,7 @@
           <a:p>
             <a:pPr algn="ctr">
               <a:lnSpc>
-                <a:spcPct val="112000"/>
+                <a:spcPts val="1230"/>
               </a:lnSpc>
               <a:spcBef>
                 <a:spcPts val="0"/>
@@ -6948,7 +7124,29 @@
               </a:spcAft>
             </a:pPr>
             <a:r>
-              <a:rPr sz="1380" b="0" lang="en-US">
+              <a:rPr sz="1100" b="0" lang="en-US">
+                <a:solidFill>
+                  <a:srgbClr val="FFFFFF"/>
+                </a:solidFill>
+                <a:latin typeface="Arial"/>
+              </a:rPr>
+              <a:t>1024 → 512-D</a:t>
+            </a:r>
+          </a:p>
+          <a:p>
+            <a:pPr algn="ctr">
+              <a:lnSpc>
+                <a:spcPts val="1230"/>
+              </a:lnSpc>
+              <a:spcBef>
+                <a:spcPts val="0"/>
+              </a:spcBef>
+              <a:spcAft>
+                <a:spcPts val="0"/>
+              </a:spcAft>
+            </a:pPr>
+            <a:r>
+              <a:rPr sz="1100" b="0" lang="en-US">
                 <a:solidFill>
                   <a:srgbClr val="FFFFFF"/>
                 </a:solidFill>
@@ -6968,7 +7166,7 @@
         <p:spPr>
           <a:xfrm>
             <a:off x="13700760" y="1577340"/>
-            <a:ext cx="0" cy="3520440"/>
+            <a:ext cx="0" cy="3567988"/>
           </a:xfrm>
           <a:prstGeom prst="line">
             <a:avLst/>
@@ -7003,7 +7201,7 @@
         </p:nvCxnSpPr>
         <p:spPr>
           <a:xfrm flipH="1">
-            <a:off x="12954000" y="2446020"/>
+            <a:off x="12954000" y="2383840"/>
             <a:ext cx="746760" cy="0"/>
           </a:xfrm>
           <a:prstGeom prst="line">
@@ -7040,7 +7238,7 @@
         </p:nvCxnSpPr>
         <p:spPr>
           <a:xfrm flipH="1">
-            <a:off x="12954000" y="3329940"/>
+            <a:off x="12954000" y="3074212"/>
             <a:ext cx="746760" cy="0"/>
           </a:xfrm>
           <a:prstGeom prst="line">
@@ -7077,7 +7275,7 @@
         </p:nvCxnSpPr>
         <p:spPr>
           <a:xfrm flipH="1">
-            <a:off x="12954000" y="4213860"/>
+            <a:off x="12954000" y="3764584"/>
             <a:ext cx="746760" cy="0"/>
           </a:xfrm>
           <a:prstGeom prst="line">
@@ -7114,7 +7312,7 @@
         </p:nvCxnSpPr>
         <p:spPr>
           <a:xfrm flipH="1">
-            <a:off x="12954000" y="5097780"/>
+            <a:off x="12954000" y="5145328"/>
             <a:ext cx="746760" cy="0"/>
           </a:xfrm>
           <a:prstGeom prst="line">
@@ -7241,8 +7439,8 @@
         </p:nvSpPr>
         <p:spPr>
           <a:xfrm>
-            <a:off x="8382000" y="5524500"/>
-            <a:ext cx="2148840" cy="388620"/>
+            <a:off x="8174736" y="5509260"/>
+            <a:ext cx="2542032" cy="484632"/>
           </a:xfrm>
           <a:prstGeom prst="rect">
             <a:avLst/>
@@ -7251,14 +7449,14 @@
           <a:effectLst/>
         </p:spPr>
         <p:txBody>
-          <a:bodyPr wrap="none" lIns="0" rIns="0" tIns="0" bIns="0" anchor="ctr">
+          <a:bodyPr wrap="none" lIns="0" rIns="0" tIns="12700" bIns="12700" anchor="ctr">
             <a:noAutofit/>
           </a:bodyPr>
           <a:lstStyle/>
           <a:p>
             <a:pPr algn="ctr">
               <a:lnSpc>
-                <a:spcPct val="104000"/>
+                <a:spcPts val="1200"/>
               </a:lnSpc>
               <a:spcBef>
                 <a:spcPts val="0"/>
@@ -7268,7 +7466,7 @@
               </a:spcAft>
             </a:pPr>
             <a:r>
-              <a:rPr sz="1200" b="0" lang="en-US">
+              <a:rPr sz="1070" b="0" lang="en-US">
                 <a:solidFill>
                   <a:srgbClr val="405779"/>
                 </a:solidFill>
@@ -7280,7 +7478,7 @@
           <a:p>
             <a:pPr algn="ctr">
               <a:lnSpc>
-                <a:spcPct val="104000"/>
+                <a:spcPts val="1200"/>
               </a:lnSpc>
               <a:spcBef>
                 <a:spcPts val="0"/>
@@ -7290,13 +7488,35 @@
               </a:spcAft>
             </a:pPr>
             <a:r>
-              <a:rPr sz="1200" b="0" lang="en-US">
+              <a:rPr sz="1070" b="0" lang="en-US">
                 <a:solidFill>
                   <a:srgbClr val="405779"/>
                 </a:solidFill>
                 <a:latin typeface="Arial"/>
               </a:rPr>
               <a:t>Frozen across all arms</a:t>
+            </a:r>
+          </a:p>
+          <a:p>
+            <a:pPr algn="ctr">
+              <a:lnSpc>
+                <a:spcPts val="1050"/>
+              </a:lnSpc>
+              <a:spcBef>
+                <a:spcPts val="0"/>
+              </a:spcBef>
+              <a:spcAft>
+                <a:spcPts val="0"/>
+              </a:spcAft>
+            </a:pPr>
+            <a:r>
+              <a:rPr sz="920" b="0" lang="en-US">
+                <a:solidFill>
+                  <a:srgbClr val="405779"/>
+                </a:solidFill>
+                <a:latin typeface="Arial"/>
+              </a:rPr>
+              <a:t>Input beyond 512 tokens is truncated</a:t>
             </a:r>
           </a:p>
         </p:txBody>
@@ -7435,14 +7655,14 @@
           <a:effectLst/>
         </p:spPr>
         <p:txBody>
-          <a:bodyPr wrap="none" lIns="0" rIns="0" tIns="0" bIns="0" anchor="ctr">
+          <a:bodyPr wrap="none" lIns="0" rIns="0" tIns="12700" bIns="12700" anchor="ctr">
             <a:noAutofit/>
           </a:bodyPr>
           <a:lstStyle/>
           <a:p>
             <a:pPr algn="l">
               <a:lnSpc>
-                <a:spcPct val="108000"/>
+                <a:spcPts val="1810"/>
               </a:lnSpc>
               <a:spcBef>
                 <a:spcPts val="0"/>
@@ -7458,7 +7678,7 @@
                 </a:solidFill>
                 <a:latin typeface="Arial"/>
               </a:rPr>
-              <a:t>SHARED EVALUATION · ALL FOUR ARMS</a:t>
+              <a:t>SHARED EVALUATION · ALL FIVE ARMS</a:t>
             </a:r>
           </a:p>
         </p:txBody>
@@ -8289,14 +8509,14 @@
           <a:effectLst/>
         </p:spPr>
         <p:txBody>
-          <a:bodyPr wrap="none" lIns="0" rIns="0" tIns="0" bIns="0" anchor="ctr">
+          <a:bodyPr wrap="none" lIns="0" rIns="0" tIns="12700" bIns="12700" anchor="ctr">
             <a:noAutofit/>
           </a:bodyPr>
           <a:lstStyle/>
           <a:p>
             <a:pPr algn="l">
               <a:lnSpc>
-                <a:spcPct val="112000"/>
+                <a:spcPts val="1450"/>
               </a:lnSpc>
               <a:spcBef>
                 <a:spcPts val="0"/>
@@ -8306,19 +8526,19 @@
               </a:spcAft>
             </a:pPr>
             <a:r>
-              <a:rPr sz="1439" b="0" lang="en-US">
+              <a:rPr sz="1320" b="0" lang="en-US">
                 <a:solidFill>
                   <a:srgbClr val="405779"/>
                 </a:solidFill>
                 <a:latin typeface="Arial"/>
               </a:rPr>
-              <a:t>7 days × 3 seeds × 4 arms = 84 runs</a:t>
+              <a:t>7 days × 3 seeds × 5 arms = 105 runs</a:t>
             </a:r>
           </a:p>
           <a:p>
             <a:pPr algn="l">
               <a:lnSpc>
-                <a:spcPct val="112000"/>
+                <a:spcPts val="1450"/>
               </a:lnSpc>
               <a:spcBef>
                 <a:spcPts val="0"/>
@@ -8328,7 +8548,7 @@
               </a:spcAft>
             </a:pPr>
             <a:r>
-              <a:rPr sz="1439" b="0" lang="en-US">
+              <a:rPr sz="1320" b="0" lang="en-US">
                 <a:solidFill>
                   <a:srgbClr val="405779"/>
                 </a:solidFill>
@@ -8689,14 +8909,14 @@
           <a:effectLst/>
         </p:spPr>
         <p:txBody>
-          <a:bodyPr wrap="none" lIns="0" rIns="0" tIns="0" bIns="0" anchor="ctr">
+          <a:bodyPr wrap="none" lIns="0" rIns="0" tIns="12700" bIns="12700" anchor="ctr">
             <a:noAutofit/>
           </a:bodyPr>
           <a:lstStyle/>
           <a:p>
             <a:pPr algn="ctr">
               <a:lnSpc>
-                <a:spcPct val="108000"/>
+                <a:spcPts val="1180"/>
               </a:lnSpc>
               <a:spcBef>
                 <a:spcPts val="0"/>
@@ -8706,17 +8926,873 @@
               </a:spcAft>
             </a:pPr>
             <a:r>
-              <a:rPr sz="1200" b="0" lang="en-US">
+              <a:rPr sz="1050" b="0" lang="en-US">
                 <a:solidFill>
                   <a:srgbClr val="405779"/>
                 </a:solidFill>
                 <a:latin typeface="Arial"/>
               </a:rPr>
-              <a:t>Gemini summary missing: Qwen Graph summary fallback · Raw outputs / scene coverage reported separately</a:t>
-            </a:r>
-          </a:p>
-        </p:txBody>
-      </p:sp>
+              <a:t>Missing Gemini-source summary: use the corresponding Qwen-source summary · Raw outputs / scene coverage reported separately</a:t>
+            </a:r>
+          </a:p>
+        </p:txBody>
+      </p:sp>
+      <p:sp>
+        <p:nvSpPr>
+          <p:cNvPr id="96" name="description-gemini-lane"/>
+          <p:cNvSpPr/>
+          <p:nvPr/>
+        </p:nvSpPr>
+        <p:spPr>
+          <a:xfrm>
+            <a:off x="365760" y="4144060"/>
+            <a:ext cx="12694920" cy="621792"/>
+          </a:xfrm>
+          <a:prstGeom prst="roundRect">
+            <a:avLst>
+              <a:gd name="adj" fmla="val 10204"/>
+            </a:avLst>
+          </a:prstGeom>
+          <a:solidFill>
+            <a:srgbClr val="F2F1FF"/>
+          </a:solidFill>
+          <a:ln w="9144">
+            <a:solidFill>
+              <a:srgbClr val="BDB8F6"/>
+            </a:solidFill>
+          </a:ln>
+          <a:effectLst/>
+        </p:spPr>
+        <p:style>
+          <a:lnRef idx="1">
+            <a:schemeClr val="accent1"/>
+          </a:lnRef>
+          <a:fillRef idx="3">
+            <a:schemeClr val="accent1"/>
+          </a:fillRef>
+          <a:effectRef idx="0">
+            <a:schemeClr val="accent1"/>
+          </a:effectRef>
+          <a:fontRef idx="minor">
+            <a:schemeClr val="lt1"/>
+          </a:fontRef>
+        </p:style>
+        <p:txBody>
+          <a:bodyPr rtlCol="0" anchor="ctr"/>
+          <a:lstStyle/>
+          <a:p>
+            <a:pPr algn="ctr"/>
+          </a:p>
+        </p:txBody>
+      </p:sp>
+      <p:sp>
+        <p:nvSpPr>
+          <p:cNvPr id="97" name="description-gemini-arm"/>
+          <p:cNvSpPr/>
+          <p:nvPr/>
+        </p:nvSpPr>
+        <p:spPr>
+          <a:xfrm>
+            <a:off x="411480" y="4188473"/>
+            <a:ext cx="1203960" cy="532964"/>
+          </a:xfrm>
+          <a:prstGeom prst="roundRect">
+            <a:avLst>
+              <a:gd name="adj" fmla="val 9523"/>
+            </a:avLst>
+          </a:prstGeom>
+          <a:solidFill>
+            <a:srgbClr val="4F46E5"/>
+          </a:solidFill>
+          <a:ln>
+            <a:noFill/>
+          </a:ln>
+          <a:effectLst/>
+        </p:spPr>
+        <p:style>
+          <a:lnRef idx="1">
+            <a:schemeClr val="accent1"/>
+          </a:lnRef>
+          <a:fillRef idx="3">
+            <a:schemeClr val="accent1"/>
+          </a:fillRef>
+          <a:effectRef idx="0">
+            <a:schemeClr val="accent1"/>
+          </a:effectRef>
+          <a:fontRef idx="minor">
+            <a:schemeClr val="lt1"/>
+          </a:fontRef>
+        </p:style>
+        <p:txBody>
+          <a:bodyPr rtlCol="0" anchor="ctr" lIns="0" rIns="0" tIns="12700" bIns="12700" wrap="none">
+            <a:noAutofit/>
+          </a:bodyPr>
+          <a:lstStyle/>
+          <a:p>
+            <a:pPr algn="ctr">
+              <a:lnSpc>
+                <a:spcPts val="1530"/>
+              </a:lnSpc>
+              <a:spcBef>
+                <a:spcPts val="0"/>
+              </a:spcBef>
+              <a:spcAft>
+                <a:spcPts val="0"/>
+              </a:spcAft>
+            </a:pPr>
+            <a:r>
+              <a:rPr sz="1400" b="1" lang="en-US">
+                <a:solidFill>
+                  <a:srgbClr val="FFFFFF"/>
+                </a:solidFill>
+                <a:latin typeface="Arial"/>
+              </a:rPr>
+              <a:t>Description</a:t>
+            </a:r>
+          </a:p>
+          <a:p>
+            <a:pPr algn="ctr">
+              <a:lnSpc>
+                <a:spcPts val="1530"/>
+              </a:lnSpc>
+              <a:spcBef>
+                <a:spcPts val="0"/>
+              </a:spcBef>
+              <a:spcAft>
+                <a:spcPts val="0"/>
+              </a:spcAft>
+            </a:pPr>
+            <a:r>
+              <a:rPr sz="1400" b="1" lang="en-US">
+                <a:solidFill>
+                  <a:srgbClr val="FFFFFF"/>
+                </a:solidFill>
+                <a:latin typeface="Arial"/>
+              </a:rPr>
+              <a:t>Gemini</a:t>
+            </a:r>
+          </a:p>
+        </p:txBody>
+      </p:sp>
+      <p:cxnSp>
+        <p:nvCxnSpPr>
+          <p:cNvPr id="98" name="description-gemini-arm-to-input"/>
+          <p:cNvCxnSpPr/>
+          <p:nvPr/>
+        </p:nvCxnSpPr>
+        <p:spPr>
+          <a:xfrm>
+            <a:off x="1615440" y="4454956"/>
+            <a:ext cx="335280" cy="0"/>
+          </a:xfrm>
+          <a:prstGeom prst="line">
+            <a:avLst/>
+          </a:prstGeom>
+          <a:ln w="17526">
+            <a:solidFill>
+              <a:srgbClr val="4F46E5"/>
+            </a:solidFill>
+            <a:tailEnd type="triangle" w="med" len="med"/>
+          </a:ln>
+          <a:effectLst/>
+        </p:spPr>
+        <p:style>
+          <a:lnRef idx="2">
+            <a:schemeClr val="accent1"/>
+          </a:lnRef>
+          <a:fillRef idx="0">
+            <a:schemeClr val="accent1"/>
+          </a:fillRef>
+          <a:effectRef idx="0">
+            <a:schemeClr val="accent1"/>
+          </a:effectRef>
+          <a:fontRef idx="minor">
+            <a:schemeClr val="tx1"/>
+          </a:fontRef>
+        </p:style>
+      </p:cxnSp>
+      <p:sp>
+        <p:nvSpPr>
+          <p:cNvPr id="99" name="description-gemini-keyframes"/>
+          <p:cNvSpPr/>
+          <p:nvPr/>
+        </p:nvSpPr>
+        <p:spPr>
+          <a:xfrm>
+            <a:off x="1950720" y="4201163"/>
+            <a:ext cx="1950720" cy="507585"/>
+          </a:xfrm>
+          <a:prstGeom prst="roundRect">
+            <a:avLst>
+              <a:gd name="adj" fmla="val 12500"/>
+            </a:avLst>
+          </a:prstGeom>
+          <a:solidFill>
+            <a:srgbClr val="FFFFFF"/>
+          </a:solidFill>
+          <a:ln w="11429">
+            <a:solidFill>
+              <a:srgbClr val="BDB8F6"/>
+            </a:solidFill>
+          </a:ln>
+          <a:effectLst/>
+        </p:spPr>
+        <p:style>
+          <a:lnRef idx="1">
+            <a:schemeClr val="accent1"/>
+          </a:lnRef>
+          <a:fillRef idx="3">
+            <a:schemeClr val="accent1"/>
+          </a:fillRef>
+          <a:effectRef idx="0">
+            <a:schemeClr val="accent1"/>
+          </a:effectRef>
+          <a:fontRef idx="minor">
+            <a:schemeClr val="lt1"/>
+          </a:fontRef>
+        </p:style>
+        <p:txBody>
+          <a:bodyPr rtlCol="0" anchor="ctr" lIns="0" rIns="0" tIns="12700" bIns="12700" wrap="none">
+            <a:noAutofit/>
+          </a:bodyPr>
+          <a:lstStyle/>
+          <a:p>
+            <a:pPr algn="ctr">
+              <a:lnSpc>
+                <a:spcPts val="1530"/>
+              </a:lnSpc>
+              <a:spcBef>
+                <a:spcPts val="0"/>
+              </a:spcBef>
+              <a:spcAft>
+                <a:spcPts val="0"/>
+              </a:spcAft>
+            </a:pPr>
+            <a:r>
+              <a:rPr sz="1400" b="1" lang="en-US">
+                <a:solidFill>
+                  <a:srgbClr val="4338CA"/>
+                </a:solidFill>
+                <a:latin typeface="Arial"/>
+              </a:rPr>
+              <a:t>Shared keyframes</a:t>
+            </a:r>
+          </a:p>
+          <a:p>
+            <a:pPr algn="ctr">
+              <a:lnSpc>
+                <a:spcPts val="1310"/>
+              </a:lnSpc>
+              <a:spcBef>
+                <a:spcPts val="0"/>
+              </a:spcBef>
+              <a:spcAft>
+                <a:spcPts val="0"/>
+              </a:spcAft>
+            </a:pPr>
+            <a:r>
+              <a:rPr sz="1180" b="0" lang="en-US">
+                <a:solidFill>
+                  <a:srgbClr val="405779"/>
+                </a:solidFill>
+                <a:latin typeface="Arial"/>
+              </a:rPr>
+              <a:t>Fixed 30s · ≤6 frames</a:t>
+            </a:r>
+          </a:p>
+        </p:txBody>
+      </p:sp>
+      <p:sp>
+        <p:nvSpPr>
+          <p:cNvPr id="100" name="description-gemini-scene-extraction"/>
+          <p:cNvSpPr/>
+          <p:nvPr/>
+        </p:nvSpPr>
+        <p:spPr>
+          <a:xfrm>
+            <a:off x="4236720" y="4201163"/>
+            <a:ext cx="1889760" cy="507585"/>
+          </a:xfrm>
+          <a:prstGeom prst="roundRect">
+            <a:avLst>
+              <a:gd name="adj" fmla="val 12500"/>
+            </a:avLst>
+          </a:prstGeom>
+          <a:solidFill>
+            <a:srgbClr val="FFFFFF"/>
+          </a:solidFill>
+          <a:ln w="11429">
+            <a:solidFill>
+              <a:srgbClr val="BDB8F6"/>
+            </a:solidFill>
+          </a:ln>
+          <a:effectLst/>
+        </p:spPr>
+        <p:style>
+          <a:lnRef idx="1">
+            <a:schemeClr val="accent1"/>
+          </a:lnRef>
+          <a:fillRef idx="3">
+            <a:schemeClr val="accent1"/>
+          </a:fillRef>
+          <a:effectRef idx="0">
+            <a:schemeClr val="accent1"/>
+          </a:effectRef>
+          <a:fontRef idx="minor">
+            <a:schemeClr val="lt1"/>
+          </a:fontRef>
+        </p:style>
+        <p:txBody>
+          <a:bodyPr rtlCol="0" anchor="ctr" lIns="0" rIns="0" tIns="12700" bIns="12700" wrap="none">
+            <a:noAutofit/>
+          </a:bodyPr>
+          <a:lstStyle/>
+          <a:p>
+            <a:pPr algn="ctr">
+              <a:lnSpc>
+                <a:spcPts val="1530"/>
+              </a:lnSpc>
+              <a:spcBef>
+                <a:spcPts val="0"/>
+              </a:spcBef>
+              <a:spcAft>
+                <a:spcPts val="0"/>
+              </a:spcAft>
+            </a:pPr>
+            <a:r>
+              <a:rPr sz="1400" b="1" lang="en-US">
+                <a:solidFill>
+                  <a:srgbClr val="4338CA"/>
+                </a:solidFill>
+                <a:latin typeface="Arial"/>
+              </a:rPr>
+              <a:t>Gemini 3.7 Flash</a:t>
+            </a:r>
+          </a:p>
+          <a:p>
+            <a:pPr algn="ctr">
+              <a:lnSpc>
+                <a:spcPts val="1310"/>
+              </a:lnSpc>
+              <a:spcBef>
+                <a:spcPts val="0"/>
+              </a:spcBef>
+              <a:spcAft>
+                <a:spcPts val="0"/>
+              </a:spcAft>
+            </a:pPr>
+            <a:r>
+              <a:rPr sz="1180" b="0" lang="en-US">
+                <a:solidFill>
+                  <a:srgbClr val="405779"/>
+                </a:solidFill>
+                <a:latin typeface="Arial"/>
+              </a:rPr>
+              <a:t>Scene descriptions</a:t>
+            </a:r>
+          </a:p>
+        </p:txBody>
+      </p:sp>
+      <p:sp>
+        <p:nvSpPr>
+          <p:cNvPr id="101" name="description-gemini-video-text"/>
+          <p:cNvSpPr/>
+          <p:nvPr/>
+        </p:nvSpPr>
+        <p:spPr>
+          <a:xfrm>
+            <a:off x="6461760" y="4201163"/>
+            <a:ext cx="1767840" cy="507585"/>
+          </a:xfrm>
+          <a:prstGeom prst="roundRect">
+            <a:avLst>
+              <a:gd name="adj" fmla="val 12500"/>
+            </a:avLst>
+          </a:prstGeom>
+          <a:solidFill>
+            <a:srgbClr val="FFFFFF"/>
+          </a:solidFill>
+          <a:ln w="11429">
+            <a:solidFill>
+              <a:srgbClr val="BDB8F6"/>
+            </a:solidFill>
+          </a:ln>
+          <a:effectLst/>
+        </p:spPr>
+        <p:style>
+          <a:lnRef idx="1">
+            <a:schemeClr val="accent1"/>
+          </a:lnRef>
+          <a:fillRef idx="3">
+            <a:schemeClr val="accent1"/>
+          </a:fillRef>
+          <a:effectRef idx="0">
+            <a:schemeClr val="accent1"/>
+          </a:effectRef>
+          <a:fontRef idx="minor">
+            <a:schemeClr val="lt1"/>
+          </a:fontRef>
+        </p:style>
+        <p:txBody>
+          <a:bodyPr rtlCol="0" anchor="ctr" lIns="0" rIns="0" tIns="12700" bIns="12700" wrap="none">
+            <a:noAutofit/>
+          </a:bodyPr>
+          <a:lstStyle/>
+          <a:p>
+            <a:pPr algn="ctr">
+              <a:lnSpc>
+                <a:spcPts val="1530"/>
+              </a:lnSpc>
+              <a:spcBef>
+                <a:spcPts val="0"/>
+              </a:spcBef>
+              <a:spcAft>
+                <a:spcPts val="0"/>
+              </a:spcAft>
+            </a:pPr>
+            <a:r>
+              <a:rPr sz="1400" b="1" lang="en-US">
+                <a:solidFill>
+                  <a:srgbClr val="4338CA"/>
+                </a:solidFill>
+                <a:latin typeface="Arial"/>
+              </a:rPr>
+              <a:t>Qwen summary</a:t>
+            </a:r>
+          </a:p>
+          <a:p>
+            <a:pPr algn="ctr">
+              <a:lnSpc>
+                <a:spcPts val="1310"/>
+              </a:lnSpc>
+              <a:spcBef>
+                <a:spcPts val="0"/>
+              </a:spcBef>
+              <a:spcAft>
+                <a:spcPts val="0"/>
+              </a:spcAft>
+            </a:pPr>
+            <a:r>
+              <a:rPr sz="1180" b="0" lang="en-US">
+                <a:solidFill>
+                  <a:srgbClr val="405779"/>
+                </a:solidFill>
+                <a:latin typeface="Arial"/>
+              </a:rPr>
+              <a:t>Description → text</a:t>
+            </a:r>
+          </a:p>
+        </p:txBody>
+      </p:sp>
+      <p:cxnSp>
+        <p:nvCxnSpPr>
+          <p:cNvPr id="102" name="description-gemini-flow-0"/>
+          <p:cNvCxnSpPr/>
+          <p:nvPr/>
+        </p:nvCxnSpPr>
+        <p:spPr>
+          <a:xfrm>
+            <a:off x="3901440" y="4454956"/>
+            <a:ext cx="335280" cy="0"/>
+          </a:xfrm>
+          <a:prstGeom prst="line">
+            <a:avLst/>
+          </a:prstGeom>
+          <a:ln w="17526">
+            <a:solidFill>
+              <a:srgbClr val="4F46E5"/>
+            </a:solidFill>
+            <a:tailEnd type="triangle" w="med" len="med"/>
+          </a:ln>
+          <a:effectLst/>
+        </p:spPr>
+        <p:style>
+          <a:lnRef idx="2">
+            <a:schemeClr val="accent1"/>
+          </a:lnRef>
+          <a:fillRef idx="0">
+            <a:schemeClr val="accent1"/>
+          </a:fillRef>
+          <a:effectRef idx="0">
+            <a:schemeClr val="accent1"/>
+          </a:effectRef>
+          <a:fontRef idx="minor">
+            <a:schemeClr val="tx1"/>
+          </a:fontRef>
+        </p:style>
+      </p:cxnSp>
+      <p:cxnSp>
+        <p:nvCxnSpPr>
+          <p:cNvPr id="103" name="description-gemini-flow-1"/>
+          <p:cNvCxnSpPr/>
+          <p:nvPr/>
+        </p:nvCxnSpPr>
+        <p:spPr>
+          <a:xfrm>
+            <a:off x="6126480" y="4454956"/>
+            <a:ext cx="335280" cy="0"/>
+          </a:xfrm>
+          <a:prstGeom prst="line">
+            <a:avLst/>
+          </a:prstGeom>
+          <a:ln w="17526">
+            <a:solidFill>
+              <a:srgbClr val="4F46E5"/>
+            </a:solidFill>
+            <a:tailEnd type="triangle" w="med" len="med"/>
+          </a:ln>
+          <a:effectLst/>
+        </p:spPr>
+        <p:style>
+          <a:lnRef idx="2">
+            <a:schemeClr val="accent1"/>
+          </a:lnRef>
+          <a:fillRef idx="0">
+            <a:schemeClr val="accent1"/>
+          </a:fillRef>
+          <a:effectRef idx="0">
+            <a:schemeClr val="accent1"/>
+          </a:effectRef>
+          <a:fontRef idx="minor">
+            <a:schemeClr val="tx1"/>
+          </a:fontRef>
+        </p:style>
+      </p:cxnSp>
+      <p:cxnSp>
+        <p:nvCxnSpPr>
+          <p:cNvPr id="104" name="description-gemini-flow-2"/>
+          <p:cNvCxnSpPr/>
+          <p:nvPr/>
+        </p:nvCxnSpPr>
+        <p:spPr>
+          <a:xfrm>
+            <a:off x="8229600" y="4454956"/>
+            <a:ext cx="335280" cy="0"/>
+          </a:xfrm>
+          <a:prstGeom prst="line">
+            <a:avLst/>
+          </a:prstGeom>
+          <a:ln w="17526">
+            <a:solidFill>
+              <a:srgbClr val="4F46E5"/>
+            </a:solidFill>
+            <a:tailEnd type="triangle" w="med" len="med"/>
+          </a:ln>
+          <a:effectLst/>
+        </p:spPr>
+        <p:style>
+          <a:lnRef idx="2">
+            <a:schemeClr val="accent1"/>
+          </a:lnRef>
+          <a:fillRef idx="0">
+            <a:schemeClr val="accent1"/>
+          </a:fillRef>
+          <a:effectRef idx="0">
+            <a:schemeClr val="accent1"/>
+          </a:effectRef>
+          <a:fontRef idx="minor">
+            <a:schemeClr val="tx1"/>
+          </a:fontRef>
+        </p:style>
+      </p:cxnSp>
+      <p:sp>
+        <p:nvSpPr>
+          <p:cNvPr id="105" name="description-gemini-frozen-bge"/>
+          <p:cNvSpPr/>
+          <p:nvPr/>
+        </p:nvSpPr>
+        <p:spPr>
+          <a:xfrm>
+            <a:off x="8564880" y="4201163"/>
+            <a:ext cx="1783080" cy="507585"/>
+          </a:xfrm>
+          <a:prstGeom prst="roundRect">
+            <a:avLst>
+              <a:gd name="adj" fmla="val 12500"/>
+            </a:avLst>
+          </a:prstGeom>
+          <a:solidFill>
+            <a:srgbClr val="FFFFFF"/>
+          </a:solidFill>
+          <a:ln w="11429">
+            <a:solidFill>
+              <a:srgbClr val="BDB8F6"/>
+            </a:solidFill>
+          </a:ln>
+          <a:effectLst/>
+        </p:spPr>
+        <p:style>
+          <a:lnRef idx="1">
+            <a:schemeClr val="accent1"/>
+          </a:lnRef>
+          <a:fillRef idx="3">
+            <a:schemeClr val="accent1"/>
+          </a:fillRef>
+          <a:effectRef idx="0">
+            <a:schemeClr val="accent1"/>
+          </a:effectRef>
+          <a:fontRef idx="minor">
+            <a:schemeClr val="lt1"/>
+          </a:fontRef>
+        </p:style>
+        <p:txBody>
+          <a:bodyPr rtlCol="0" anchor="ctr" lIns="0" rIns="0" tIns="12700" bIns="12700" wrap="none">
+            <a:noAutofit/>
+          </a:bodyPr>
+          <a:lstStyle/>
+          <a:p>
+            <a:pPr algn="ctr">
+              <a:lnSpc>
+                <a:spcPts val="1530"/>
+              </a:lnSpc>
+              <a:spcBef>
+                <a:spcPts val="0"/>
+              </a:spcBef>
+              <a:spcAft>
+                <a:spcPts val="0"/>
+              </a:spcAft>
+            </a:pPr>
+            <a:r>
+              <a:rPr sz="1400" b="1" lang="en-US">
+                <a:solidFill>
+                  <a:srgbClr val="4338CA"/>
+                </a:solidFill>
+                <a:latin typeface="Arial"/>
+              </a:rPr>
+              <a:t>Frozen BGE</a:t>
+            </a:r>
+          </a:p>
+          <a:p>
+            <a:pPr algn="ctr">
+              <a:lnSpc>
+                <a:spcPts val="1210"/>
+              </a:lnSpc>
+              <a:spcBef>
+                <a:spcPts val="0"/>
+              </a:spcBef>
+              <a:spcAft>
+                <a:spcPts val="0"/>
+              </a:spcAft>
+            </a:pPr>
+            <a:r>
+              <a:rPr sz="1080" b="0" lang="en-US">
+                <a:solidFill>
+                  <a:srgbClr val="405779"/>
+                </a:solidFill>
+                <a:latin typeface="Arial"/>
+              </a:rPr>
+              <a:t>Input ≤512 tokens</a:t>
+            </a:r>
+          </a:p>
+          <a:p>
+            <a:pPr algn="ctr">
+              <a:lnSpc>
+                <a:spcPts val="1210"/>
+              </a:lnSpc>
+              <a:spcBef>
+                <a:spcPts val="0"/>
+              </a:spcBef>
+              <a:spcAft>
+                <a:spcPts val="0"/>
+              </a:spcAft>
+            </a:pPr>
+            <a:r>
+              <a:rPr sz="1080" b="0" lang="en-US">
+                <a:solidFill>
+                  <a:srgbClr val="405779"/>
+                </a:solidFill>
+                <a:latin typeface="Arial"/>
+              </a:rPr>
+              <a:t>Output 1024-D</a:t>
+            </a:r>
+          </a:p>
+        </p:txBody>
+      </p:sp>
+      <p:cxnSp>
+        <p:nvCxnSpPr>
+          <p:cNvPr id="106" name="description-gemini-embedding-to-recommender"/>
+          <p:cNvCxnSpPr/>
+          <p:nvPr/>
+        </p:nvCxnSpPr>
+        <p:spPr>
+          <a:xfrm>
+            <a:off x="10347960" y="4454956"/>
+            <a:ext cx="350520" cy="0"/>
+          </a:xfrm>
+          <a:prstGeom prst="line">
+            <a:avLst/>
+          </a:prstGeom>
+          <a:ln w="17526">
+            <a:solidFill>
+              <a:srgbClr val="4F46E5"/>
+            </a:solidFill>
+            <a:tailEnd type="triangle" w="med" len="med"/>
+          </a:ln>
+          <a:effectLst/>
+        </p:spPr>
+        <p:style>
+          <a:lnRef idx="2">
+            <a:schemeClr val="accent1"/>
+          </a:lnRef>
+          <a:fillRef idx="0">
+            <a:schemeClr val="accent1"/>
+          </a:fillRef>
+          <a:effectRef idx="0">
+            <a:schemeClr val="accent1"/>
+          </a:effectRef>
+          <a:fontRef idx="minor">
+            <a:schemeClr val="tx1"/>
+          </a:fontRef>
+        </p:style>
+      </p:cxnSp>
+      <p:sp>
+        <p:nvSpPr>
+          <p:cNvPr id="107" name="description-gemini-recommender"/>
+          <p:cNvSpPr/>
+          <p:nvPr/>
+        </p:nvSpPr>
+        <p:spPr>
+          <a:xfrm>
+            <a:off x="10698480" y="4201163"/>
+            <a:ext cx="2255520" cy="507585"/>
+          </a:xfrm>
+          <a:prstGeom prst="roundRect">
+            <a:avLst>
+              <a:gd name="adj" fmla="val 11250"/>
+            </a:avLst>
+          </a:prstGeom>
+          <a:solidFill>
+            <a:srgbClr val="4F46E5"/>
+          </a:solidFill>
+          <a:ln>
+            <a:noFill/>
+          </a:ln>
+          <a:effectLst/>
+        </p:spPr>
+        <p:style>
+          <a:lnRef idx="1">
+            <a:schemeClr val="accent1"/>
+          </a:lnRef>
+          <a:fillRef idx="3">
+            <a:schemeClr val="accent1"/>
+          </a:fillRef>
+          <a:effectRef idx="0">
+            <a:schemeClr val="accent1"/>
+          </a:effectRef>
+          <a:fontRef idx="minor">
+            <a:schemeClr val="lt1"/>
+          </a:fontRef>
+        </p:style>
+        <p:txBody>
+          <a:bodyPr rtlCol="0" anchor="ctr" lIns="0" rIns="0" tIns="12700" bIns="12700" wrap="none">
+            <a:noAutofit/>
+          </a:bodyPr>
+          <a:lstStyle/>
+          <a:p>
+            <a:pPr algn="ctr">
+              <a:lnSpc>
+                <a:spcPts val="1530"/>
+              </a:lnSpc>
+              <a:spcBef>
+                <a:spcPts val="0"/>
+              </a:spcBef>
+              <a:spcAft>
+                <a:spcPts val="0"/>
+              </a:spcAft>
+            </a:pPr>
+            <a:r>
+              <a:rPr sz="1400" b="1" lang="en-US">
+                <a:solidFill>
+                  <a:srgbClr val="FFFFFF"/>
+                </a:solidFill>
+                <a:latin typeface="Arial"/>
+              </a:rPr>
+              <a:t>Projection + SASRec</a:t>
+            </a:r>
+          </a:p>
+          <a:p>
+            <a:pPr algn="ctr">
+              <a:lnSpc>
+                <a:spcPts val="1230"/>
+              </a:lnSpc>
+              <a:spcBef>
+                <a:spcPts val="0"/>
+              </a:spcBef>
+              <a:spcAft>
+                <a:spcPts val="0"/>
+              </a:spcAft>
+            </a:pPr>
+            <a:r>
+              <a:rPr sz="1100" b="0" lang="en-US">
+                <a:solidFill>
+                  <a:srgbClr val="FFFFFF"/>
+                </a:solidFill>
+                <a:latin typeface="Arial"/>
+              </a:rPr>
+              <a:t>1024 → 512-D</a:t>
+            </a:r>
+          </a:p>
+          <a:p>
+            <a:pPr algn="ctr">
+              <a:lnSpc>
+                <a:spcPts val="1230"/>
+              </a:lnSpc>
+              <a:spcBef>
+                <a:spcPts val="0"/>
+              </a:spcBef>
+              <a:spcAft>
+                <a:spcPts val="0"/>
+              </a:spcAft>
+            </a:pPr>
+            <a:r>
+              <a:rPr sz="1100" b="0" lang="en-US">
+                <a:solidFill>
+                  <a:srgbClr val="FFFFFF"/>
+                </a:solidFill>
+                <a:latin typeface="Arial"/>
+              </a:rPr>
+              <a:t>Trainable</a:t>
+            </a:r>
+          </a:p>
+        </p:txBody>
+      </p:sp>
+      <p:cxnSp>
+        <p:nvCxnSpPr>
+          <p:cNvPr id="108" name="description-gemini-history-input"/>
+          <p:cNvCxnSpPr/>
+          <p:nvPr/>
+        </p:nvCxnSpPr>
+        <p:spPr>
+          <a:xfrm flipH="1">
+            <a:off x="12954000" y="4454956"/>
+            <a:ext cx="746760" cy="0"/>
+          </a:xfrm>
+          <a:prstGeom prst="line">
+            <a:avLst/>
+          </a:prstGeom>
+          <a:ln w="24384">
+            <a:solidFill>
+              <a:srgbClr val="12284B"/>
+            </a:solidFill>
+            <a:tailEnd type="triangle" w="med" len="med"/>
+          </a:ln>
+          <a:effectLst/>
+        </p:spPr>
+        <p:style>
+          <a:lnRef idx="2">
+            <a:schemeClr val="accent1"/>
+          </a:lnRef>
+          <a:fillRef idx="0">
+            <a:schemeClr val="accent1"/>
+          </a:fillRef>
+          <a:effectRef idx="0">
+            <a:schemeClr val="accent1"/>
+          </a:effectRef>
+          <a:fontRef idx="minor">
+            <a:schemeClr val="tx1"/>
+          </a:fontRef>
+        </p:style>
+      </p:cxnSp>
     </p:spTree>
   </p:cSld>
   <p:clrMapOvr>

--- a/docs/design/Diagram.pptx
+++ b/docs/design/Diagram.pptx
@@ -3454,7 +3454,7 @@
               </a:defRPr>
             </a:pPr>
             <a:r>
-              <a:t>01   SHARED GENERATION · 3 SOURCES</a:t>
+              <a:t>01   SHARED GENERATION · 4 SOURCES</a:t>
             </a:r>
           </a:p>
         </p:txBody>
@@ -3808,7 +3808,7 @@
         <p:spPr>
           <a:xfrm>
             <a:off x="777240" y="3703320"/>
-            <a:ext cx="3429000" cy="1005840"/>
+            <a:ext cx="3429000" cy="868680"/>
           </a:xfrm>
           <a:prstGeom prst="roundRect">
             <a:avLst>
@@ -3854,7 +3854,7 @@
         </p:nvSpPr>
         <p:spPr>
           <a:xfrm>
-            <a:off x="932688" y="3813048"/>
+            <a:off x="932688" y="3794759"/>
             <a:ext cx="3154680" cy="329184"/>
           </a:xfrm>
           <a:prstGeom prst="rect">
@@ -3893,7 +3893,7 @@
         </p:nvSpPr>
         <p:spPr>
           <a:xfrm>
-            <a:off x="932688" y="4251959"/>
+            <a:off x="932688" y="4178808"/>
             <a:ext cx="3154680" cy="310896"/>
           </a:xfrm>
           <a:prstGeom prst="rect">
@@ -3932,7 +3932,7 @@
         </p:nvCxnSpPr>
         <p:spPr>
           <a:xfrm>
-            <a:off x="4206240" y="4206240"/>
+            <a:off x="4206240" y="4137659"/>
             <a:ext cx="393192" cy="0"/>
           </a:xfrm>
           <a:prstGeom prst="line">
@@ -3969,7 +3969,7 @@
         <p:spPr>
           <a:xfrm>
             <a:off x="4617720" y="3703320"/>
-            <a:ext cx="2788920" cy="1005840"/>
+            <a:ext cx="2788920" cy="868680"/>
           </a:xfrm>
           <a:prstGeom prst="roundRect">
             <a:avLst>
@@ -4015,7 +4015,7 @@
         </p:nvSpPr>
         <p:spPr>
           <a:xfrm>
-            <a:off x="4773168" y="3813048"/>
+            <a:off x="4773168" y="3794759"/>
             <a:ext cx="2496312" cy="329184"/>
           </a:xfrm>
           <a:prstGeom prst="rect">
@@ -4054,7 +4054,7 @@
         </p:nvSpPr>
         <p:spPr>
           <a:xfrm>
-            <a:off x="4773168" y="4251959"/>
+            <a:off x="4773168" y="4178808"/>
             <a:ext cx="2496312" cy="310896"/>
           </a:xfrm>
           <a:prstGeom prst="rect">
@@ -4080,7 +4080,7 @@
               </a:defRPr>
             </a:pPr>
             <a:r>
-              <a:t>Title-free · shared</a:t>
+              <a:t>Title-free</a:t>
             </a:r>
           </a:p>
         </p:txBody>
@@ -4094,14 +4094,14 @@
         <p:spPr>
           <a:xfrm>
             <a:off x="640080" y="3236976"/>
-            <a:ext cx="0" cy="969264"/>
+            <a:ext cx="0" cy="900683"/>
           </a:xfrm>
           <a:prstGeom prst="line">
             <a:avLst/>
           </a:prstGeom>
           <a:ln w="12700">
             <a:solidFill>
-              <a:srgbClr val="087E66"/>
+              <a:srgbClr val="516985"/>
             </a:solidFill>
           </a:ln>
         </p:spPr>
@@ -4128,7 +4128,7 @@
         </p:nvCxnSpPr>
         <p:spPr>
           <a:xfrm>
-            <a:off x="640080" y="4206240"/>
+            <a:off x="640080" y="4137659"/>
             <a:ext cx="137160" cy="0"/>
           </a:xfrm>
           <a:prstGeom prst="line">
@@ -4164,7 +4164,7 @@
         </p:nvCxnSpPr>
         <p:spPr>
           <a:xfrm>
-            <a:off x="7406640" y="4206240"/>
+            <a:off x="7406640" y="4137659"/>
             <a:ext cx="704087" cy="0"/>
           </a:xfrm>
           <a:prstGeom prst="line">
@@ -4199,8 +4199,8 @@
         </p:nvCxnSpPr>
         <p:spPr>
           <a:xfrm>
-            <a:off x="8110727" y="3360420"/>
-            <a:ext cx="0" cy="845820"/>
+            <a:off x="8110727" y="4137659"/>
+            <a:ext cx="0" cy="777241"/>
           </a:xfrm>
           <a:prstGeom prst="line">
             <a:avLst/>
@@ -4234,7 +4234,7 @@
         </p:nvCxnSpPr>
         <p:spPr>
           <a:xfrm>
-            <a:off x="8110727" y="3360420"/>
+            <a:off x="8110727" y="4137660"/>
             <a:ext cx="502921" cy="0"/>
           </a:xfrm>
           <a:prstGeom prst="line">
@@ -4270,7 +4270,7 @@
         </p:nvCxnSpPr>
         <p:spPr>
           <a:xfrm>
-            <a:off x="8110727" y="4137660"/>
+            <a:off x="8110727" y="4914900"/>
             <a:ext cx="502921" cy="0"/>
           </a:xfrm>
           <a:prstGeom prst="line">
@@ -4306,8 +4306,471 @@
         </p:nvSpPr>
         <p:spPr>
           <a:xfrm>
-            <a:off x="777240" y="5166360"/>
-            <a:ext cx="3429000" cy="1005840"/>
+            <a:off x="777240" y="4754880"/>
+            <a:ext cx="3429000" cy="868680"/>
+          </a:xfrm>
+          <a:prstGeom prst="roundRect">
+            <a:avLst>
+              <a:gd name="adj" fmla="val 10000"/>
+            </a:avLst>
+          </a:prstGeom>
+          <a:solidFill>
+            <a:srgbClr val="FFFFFF"/>
+          </a:solidFill>
+          <a:ln w="12700">
+            <a:solidFill>
+              <a:srgbClr val="00848C"/>
+            </a:solidFill>
+          </a:ln>
+        </p:spPr>
+        <p:style>
+          <a:lnRef idx="1">
+            <a:schemeClr val="accent1"/>
+          </a:lnRef>
+          <a:fillRef idx="3">
+            <a:schemeClr val="accent1"/>
+          </a:fillRef>
+          <a:effectRef idx="0">
+            <a:schemeClr val="accent1"/>
+          </a:effectRef>
+          <a:fontRef idx="minor">
+            <a:schemeClr val="lt1"/>
+          </a:fontRef>
+        </p:style>
+        <p:txBody>
+          <a:bodyPr rtlCol="0" anchor="ctr"/>
+          <a:lstStyle/>
+          <a:p>
+            <a:pPr algn="ctr"/>
+          </a:p>
+        </p:txBody>
+      </p:sp>
+      <p:sp>
+        <p:nvSpPr>
+          <p:cNvPr id="33" name="TextBox 32"/>
+          <p:cNvSpPr txBox="1"/>
+          <p:nvPr/>
+        </p:nvSpPr>
+        <p:spPr>
+          <a:xfrm>
+            <a:off x="932688" y="4846320"/>
+            <a:ext cx="3154680" cy="329184"/>
+          </a:xfrm>
+          <a:prstGeom prst="rect">
+            <a:avLst/>
+          </a:prstGeom>
+          <a:noFill/>
+        </p:spPr>
+        <p:txBody>
+          <a:bodyPr wrap="square" lIns="18288" rIns="18288" tIns="13716" bIns="0">
+            <a:spAutoFit/>
+          </a:bodyPr>
+          <a:lstStyle/>
+          <a:p>
+            <a:pPr>
+              <a:spcAft>
+                <a:spcPts val="300"/>
+              </a:spcAft>
+              <a:defRPr sz="2000" b="1">
+                <a:solidFill>
+                  <a:srgbClr val="00848C"/>
+                </a:solidFill>
+                <a:latin typeface="Liberation Sans"/>
+              </a:defRPr>
+            </a:pPr>
+            <a:r>
+              <a:t>gemini-3.8-flash</a:t>
+            </a:r>
+          </a:p>
+        </p:txBody>
+      </p:sp>
+      <p:sp>
+        <p:nvSpPr>
+          <p:cNvPr id="34" name="TextBox 33"/>
+          <p:cNvSpPr txBox="1"/>
+          <p:nvPr/>
+        </p:nvSpPr>
+        <p:spPr>
+          <a:xfrm>
+            <a:off x="932688" y="5230368"/>
+            <a:ext cx="3154680" cy="310896"/>
+          </a:xfrm>
+          <a:prstGeom prst="rect">
+            <a:avLst/>
+          </a:prstGeom>
+          <a:noFill/>
+        </p:spPr>
+        <p:txBody>
+          <a:bodyPr wrap="square" lIns="18288" rIns="18288" tIns="13716" bIns="0">
+            <a:spAutoFit/>
+          </a:bodyPr>
+          <a:lstStyle/>
+          <a:p>
+            <a:pPr>
+              <a:spcAft>
+                <a:spcPts val="300"/>
+              </a:spcAft>
+              <a:defRPr sz="1700" b="0">
+                <a:solidFill>
+                  <a:srgbClr val="516985"/>
+                </a:solidFill>
+                <a:latin typeface="Liberation Sans"/>
+              </a:defRPr>
+            </a:pPr>
+            <a:r>
+              <a:t>Scene graphs</a:t>
+            </a:r>
+          </a:p>
+        </p:txBody>
+      </p:sp>
+      <p:cxnSp>
+        <p:nvCxnSpPr>
+          <p:cNvPr id="35" name="Connector 34"/>
+          <p:cNvCxnSpPr/>
+          <p:nvPr/>
+        </p:nvCxnSpPr>
+        <p:spPr>
+          <a:xfrm>
+            <a:off x="4206240" y="5189220"/>
+            <a:ext cx="393192" cy="0"/>
+          </a:xfrm>
+          <a:prstGeom prst="line">
+            <a:avLst/>
+          </a:prstGeom>
+          <a:ln w="20320">
+            <a:solidFill>
+              <a:srgbClr val="00848C"/>
+            </a:solidFill>
+            <a:tailEnd type="triangle" w="sm" len="sm"/>
+          </a:ln>
+        </p:spPr>
+        <p:style>
+          <a:lnRef idx="2">
+            <a:schemeClr val="accent1"/>
+          </a:lnRef>
+          <a:fillRef idx="0">
+            <a:schemeClr val="accent1"/>
+          </a:fillRef>
+          <a:effectRef idx="1">
+            <a:schemeClr val="accent1"/>
+          </a:effectRef>
+          <a:fontRef idx="minor">
+            <a:schemeClr val="tx1"/>
+          </a:fontRef>
+        </p:style>
+      </p:cxnSp>
+      <p:sp>
+        <p:nvSpPr>
+          <p:cNvPr id="36" name="Rounded Rectangle 35"/>
+          <p:cNvSpPr/>
+          <p:nvPr/>
+        </p:nvSpPr>
+        <p:spPr>
+          <a:xfrm>
+            <a:off x="4617720" y="4754880"/>
+            <a:ext cx="2788920" cy="868680"/>
+          </a:xfrm>
+          <a:prstGeom prst="roundRect">
+            <a:avLst>
+              <a:gd name="adj" fmla="val 10000"/>
+            </a:avLst>
+          </a:prstGeom>
+          <a:solidFill>
+            <a:srgbClr val="FFFFFF"/>
+          </a:solidFill>
+          <a:ln w="12700">
+            <a:solidFill>
+              <a:srgbClr val="00848C"/>
+            </a:solidFill>
+          </a:ln>
+        </p:spPr>
+        <p:style>
+          <a:lnRef idx="1">
+            <a:schemeClr val="accent1"/>
+          </a:lnRef>
+          <a:fillRef idx="3">
+            <a:schemeClr val="accent1"/>
+          </a:fillRef>
+          <a:effectRef idx="0">
+            <a:schemeClr val="accent1"/>
+          </a:effectRef>
+          <a:fontRef idx="minor">
+            <a:schemeClr val="lt1"/>
+          </a:fontRef>
+        </p:style>
+        <p:txBody>
+          <a:bodyPr rtlCol="0" anchor="ctr"/>
+          <a:lstStyle/>
+          <a:p>
+            <a:pPr algn="ctr"/>
+          </a:p>
+        </p:txBody>
+      </p:sp>
+      <p:sp>
+        <p:nvSpPr>
+          <p:cNvPr id="37" name="TextBox 36"/>
+          <p:cNvSpPr txBox="1"/>
+          <p:nvPr/>
+        </p:nvSpPr>
+        <p:spPr>
+          <a:xfrm>
+            <a:off x="4773168" y="4846320"/>
+            <a:ext cx="2496312" cy="329184"/>
+          </a:xfrm>
+          <a:prstGeom prst="rect">
+            <a:avLst/>
+          </a:prstGeom>
+          <a:noFill/>
+        </p:spPr>
+        <p:txBody>
+          <a:bodyPr wrap="square" lIns="18288" rIns="18288" tIns="13716" bIns="0">
+            <a:spAutoFit/>
+          </a:bodyPr>
+          <a:lstStyle/>
+          <a:p>
+            <a:pPr>
+              <a:spcAft>
+                <a:spcPts val="300"/>
+              </a:spcAft>
+              <a:defRPr sz="2000" b="1">
+                <a:solidFill>
+                  <a:srgbClr val="00848C"/>
+                </a:solidFill>
+                <a:latin typeface="Liberation Sans"/>
+              </a:defRPr>
+            </a:pPr>
+            <a:r>
+              <a:t>GG  Summary</a:t>
+            </a:r>
+          </a:p>
+        </p:txBody>
+      </p:sp>
+      <p:sp>
+        <p:nvSpPr>
+          <p:cNvPr id="38" name="TextBox 37"/>
+          <p:cNvSpPr txBox="1"/>
+          <p:nvPr/>
+        </p:nvSpPr>
+        <p:spPr>
+          <a:xfrm>
+            <a:off x="4773168" y="5230368"/>
+            <a:ext cx="2496312" cy="310896"/>
+          </a:xfrm>
+          <a:prstGeom prst="rect">
+            <a:avLst/>
+          </a:prstGeom>
+          <a:noFill/>
+        </p:spPr>
+        <p:txBody>
+          <a:bodyPr wrap="square" lIns="18288" rIns="18288" tIns="13716" bIns="0">
+            <a:spAutoFit/>
+          </a:bodyPr>
+          <a:lstStyle/>
+          <a:p>
+            <a:pPr>
+              <a:spcAft>
+                <a:spcPts val="300"/>
+              </a:spcAft>
+              <a:defRPr sz="1600" b="0">
+                <a:solidFill>
+                  <a:srgbClr val="516985"/>
+                </a:solidFill>
+                <a:latin typeface="Liberation Sans"/>
+              </a:defRPr>
+            </a:pPr>
+            <a:r>
+              <a:t>Title-free</a:t>
+            </a:r>
+          </a:p>
+        </p:txBody>
+      </p:sp>
+      <p:cxnSp>
+        <p:nvCxnSpPr>
+          <p:cNvPr id="39" name="Connector 38"/>
+          <p:cNvCxnSpPr/>
+          <p:nvPr/>
+        </p:nvCxnSpPr>
+        <p:spPr>
+          <a:xfrm>
+            <a:off x="640080" y="3236976"/>
+            <a:ext cx="0" cy="1952244"/>
+          </a:xfrm>
+          <a:prstGeom prst="line">
+            <a:avLst/>
+          </a:prstGeom>
+          <a:ln w="12700">
+            <a:solidFill>
+              <a:srgbClr val="516985"/>
+            </a:solidFill>
+          </a:ln>
+        </p:spPr>
+        <p:style>
+          <a:lnRef idx="2">
+            <a:schemeClr val="accent1"/>
+          </a:lnRef>
+          <a:fillRef idx="0">
+            <a:schemeClr val="accent1"/>
+          </a:fillRef>
+          <a:effectRef idx="1">
+            <a:schemeClr val="accent1"/>
+          </a:effectRef>
+          <a:fontRef idx="minor">
+            <a:schemeClr val="tx1"/>
+          </a:fontRef>
+        </p:style>
+      </p:cxnSp>
+      <p:cxnSp>
+        <p:nvCxnSpPr>
+          <p:cNvPr id="40" name="Connector 39"/>
+          <p:cNvCxnSpPr/>
+          <p:nvPr/>
+        </p:nvCxnSpPr>
+        <p:spPr>
+          <a:xfrm>
+            <a:off x="640080" y="5189220"/>
+            <a:ext cx="137160" cy="0"/>
+          </a:xfrm>
+          <a:prstGeom prst="line">
+            <a:avLst/>
+          </a:prstGeom>
+          <a:ln w="12700">
+            <a:solidFill>
+              <a:srgbClr val="00848C"/>
+            </a:solidFill>
+            <a:tailEnd type="triangle" w="sm" len="sm"/>
+          </a:ln>
+        </p:spPr>
+        <p:style>
+          <a:lnRef idx="2">
+            <a:schemeClr val="accent1"/>
+          </a:lnRef>
+          <a:fillRef idx="0">
+            <a:schemeClr val="accent1"/>
+          </a:fillRef>
+          <a:effectRef idx="1">
+            <a:schemeClr val="accent1"/>
+          </a:effectRef>
+          <a:fontRef idx="minor">
+            <a:schemeClr val="tx1"/>
+          </a:fontRef>
+        </p:style>
+      </p:cxnSp>
+      <p:cxnSp>
+        <p:nvCxnSpPr>
+          <p:cNvPr id="41" name="Connector 40"/>
+          <p:cNvCxnSpPr/>
+          <p:nvPr/>
+        </p:nvCxnSpPr>
+        <p:spPr>
+          <a:xfrm>
+            <a:off x="7406640" y="5189220"/>
+            <a:ext cx="704087" cy="0"/>
+          </a:xfrm>
+          <a:prstGeom prst="line">
+            <a:avLst/>
+          </a:prstGeom>
+          <a:ln w="20320">
+            <a:solidFill>
+              <a:srgbClr val="00848C"/>
+            </a:solidFill>
+          </a:ln>
+        </p:spPr>
+        <p:style>
+          <a:lnRef idx="2">
+            <a:schemeClr val="accent1"/>
+          </a:lnRef>
+          <a:fillRef idx="0">
+            <a:schemeClr val="accent1"/>
+          </a:fillRef>
+          <a:effectRef idx="1">
+            <a:schemeClr val="accent1"/>
+          </a:effectRef>
+          <a:fontRef idx="minor">
+            <a:schemeClr val="tx1"/>
+          </a:fontRef>
+        </p:style>
+      </p:cxnSp>
+      <p:cxnSp>
+        <p:nvCxnSpPr>
+          <p:cNvPr id="42" name="Connector 41"/>
+          <p:cNvCxnSpPr/>
+          <p:nvPr/>
+        </p:nvCxnSpPr>
+        <p:spPr>
+          <a:xfrm>
+            <a:off x="8110727" y="5189220"/>
+            <a:ext cx="0" cy="502920"/>
+          </a:xfrm>
+          <a:prstGeom prst="line">
+            <a:avLst/>
+          </a:prstGeom>
+          <a:ln w="20320">
+            <a:solidFill>
+              <a:srgbClr val="00848C"/>
+            </a:solidFill>
+          </a:ln>
+        </p:spPr>
+        <p:style>
+          <a:lnRef idx="2">
+            <a:schemeClr val="accent1"/>
+          </a:lnRef>
+          <a:fillRef idx="0">
+            <a:schemeClr val="accent1"/>
+          </a:fillRef>
+          <a:effectRef idx="1">
+            <a:schemeClr val="accent1"/>
+          </a:effectRef>
+          <a:fontRef idx="minor">
+            <a:schemeClr val="tx1"/>
+          </a:fontRef>
+        </p:style>
+      </p:cxnSp>
+      <p:cxnSp>
+        <p:nvCxnSpPr>
+          <p:cNvPr id="43" name="Connector 42"/>
+          <p:cNvCxnSpPr/>
+          <p:nvPr/>
+        </p:nvCxnSpPr>
+        <p:spPr>
+          <a:xfrm>
+            <a:off x="8110727" y="5692140"/>
+            <a:ext cx="502921" cy="0"/>
+          </a:xfrm>
+          <a:prstGeom prst="line">
+            <a:avLst/>
+          </a:prstGeom>
+          <a:ln w="20320">
+            <a:solidFill>
+              <a:srgbClr val="00848C"/>
+            </a:solidFill>
+            <a:tailEnd type="triangle" w="sm" len="sm"/>
+          </a:ln>
+        </p:spPr>
+        <p:style>
+          <a:lnRef idx="2">
+            <a:schemeClr val="accent1"/>
+          </a:lnRef>
+          <a:fillRef idx="0">
+            <a:schemeClr val="accent1"/>
+          </a:fillRef>
+          <a:effectRef idx="1">
+            <a:schemeClr val="accent1"/>
+          </a:effectRef>
+          <a:fontRef idx="minor">
+            <a:schemeClr val="tx1"/>
+          </a:fontRef>
+        </p:style>
+      </p:cxnSp>
+      <p:sp>
+        <p:nvSpPr>
+          <p:cNvPr id="44" name="Rounded Rectangle 43"/>
+          <p:cNvSpPr/>
+          <p:nvPr/>
+        </p:nvSpPr>
+        <p:spPr>
+          <a:xfrm>
+            <a:off x="777240" y="5806440"/>
+            <a:ext cx="3429000" cy="868680"/>
           </a:xfrm>
           <a:prstGeom prst="roundRect">
             <a:avLst>
@@ -4347,13 +4810,13 @@
       </p:sp>
       <p:sp>
         <p:nvSpPr>
-          <p:cNvPr id="33" name="TextBox 32"/>
+          <p:cNvPr id="45" name="TextBox 44"/>
           <p:cNvSpPr txBox="1"/>
           <p:nvPr/>
         </p:nvSpPr>
         <p:spPr>
           <a:xfrm>
-            <a:off x="932688" y="5276088"/>
+            <a:off x="932688" y="5897879"/>
             <a:ext cx="3154680" cy="329184"/>
           </a:xfrm>
           <a:prstGeom prst="rect">
@@ -4386,13 +4849,13 @@
       </p:sp>
       <p:sp>
         <p:nvSpPr>
-          <p:cNvPr id="34" name="TextBox 33"/>
+          <p:cNvPr id="46" name="TextBox 45"/>
           <p:cNvSpPr txBox="1"/>
           <p:nvPr/>
         </p:nvSpPr>
         <p:spPr>
           <a:xfrm>
-            <a:off x="932688" y="5715000"/>
+            <a:off x="932688" y="6281927"/>
             <a:ext cx="3154680" cy="310896"/>
           </a:xfrm>
           <a:prstGeom prst="rect">
@@ -4425,13 +4888,13 @@
       </p:sp>
       <p:cxnSp>
         <p:nvCxnSpPr>
-          <p:cNvPr id="35" name="Connector 34"/>
+          <p:cNvPr id="47" name="Connector 46"/>
           <p:cNvCxnSpPr/>
           <p:nvPr/>
         </p:nvCxnSpPr>
         <p:spPr>
           <a:xfrm>
-            <a:off x="4206240" y="5669280"/>
+            <a:off x="4206240" y="6240779"/>
             <a:ext cx="393192" cy="0"/>
           </a:xfrm>
           <a:prstGeom prst="line">
@@ -4461,14 +4924,14 @@
       </p:cxnSp>
       <p:sp>
         <p:nvSpPr>
-          <p:cNvPr id="36" name="Rounded Rectangle 35"/>
+          <p:cNvPr id="48" name="Rounded Rectangle 47"/>
           <p:cNvSpPr/>
           <p:nvPr/>
         </p:nvSpPr>
         <p:spPr>
           <a:xfrm>
-            <a:off x="4617720" y="5166360"/>
-            <a:ext cx="2788920" cy="1005840"/>
+            <a:off x="4617720" y="5806440"/>
+            <a:ext cx="2788920" cy="868680"/>
           </a:xfrm>
           <a:prstGeom prst="roundRect">
             <a:avLst>
@@ -4508,13 +4971,13 @@
       </p:sp>
       <p:sp>
         <p:nvSpPr>
-          <p:cNvPr id="37" name="TextBox 36"/>
+          <p:cNvPr id="49" name="TextBox 48"/>
           <p:cNvSpPr txBox="1"/>
           <p:nvPr/>
         </p:nvSpPr>
         <p:spPr>
           <a:xfrm>
-            <a:off x="4773168" y="5276088"/>
+            <a:off x="4773168" y="5897879"/>
             <a:ext cx="2496312" cy="329184"/>
           </a:xfrm>
           <a:prstGeom prst="rect">
@@ -4547,13 +5010,13 @@
       </p:sp>
       <p:sp>
         <p:nvSpPr>
-          <p:cNvPr id="38" name="TextBox 37"/>
+          <p:cNvPr id="50" name="TextBox 49"/>
           <p:cNvSpPr txBox="1"/>
           <p:nvPr/>
         </p:nvSpPr>
         <p:spPr>
           <a:xfrm>
-            <a:off x="4773168" y="5715000"/>
+            <a:off x="4773168" y="6281927"/>
             <a:ext cx="2496312" cy="310896"/>
           </a:xfrm>
           <a:prstGeom prst="rect">
@@ -4579,28 +5042,28 @@
               </a:defRPr>
             </a:pPr>
             <a:r>
-              <a:t>Title-free · shared</a:t>
+              <a:t>Title-free</a:t>
             </a:r>
           </a:p>
         </p:txBody>
       </p:sp>
       <p:cxnSp>
         <p:nvCxnSpPr>
-          <p:cNvPr id="39" name="Connector 38"/>
+          <p:cNvPr id="51" name="Connector 50"/>
           <p:cNvCxnSpPr/>
           <p:nvPr/>
         </p:nvCxnSpPr>
         <p:spPr>
           <a:xfrm>
             <a:off x="640080" y="3236976"/>
-            <a:ext cx="0" cy="2432304"/>
+            <a:ext cx="0" cy="3003803"/>
           </a:xfrm>
           <a:prstGeom prst="line">
             <a:avLst/>
           </a:prstGeom>
           <a:ln w="12700">
             <a:solidFill>
-              <a:srgbClr val="285CE5"/>
+              <a:srgbClr val="516985"/>
             </a:solidFill>
           </a:ln>
         </p:spPr>
@@ -4621,13 +5084,13 @@
       </p:cxnSp>
       <p:cxnSp>
         <p:nvCxnSpPr>
-          <p:cNvPr id="40" name="Connector 39"/>
+          <p:cNvPr id="52" name="Connector 51"/>
           <p:cNvCxnSpPr/>
           <p:nvPr/>
         </p:nvCxnSpPr>
         <p:spPr>
           <a:xfrm>
-            <a:off x="640080" y="5669280"/>
+            <a:off x="640080" y="6240779"/>
             <a:ext cx="137160" cy="0"/>
           </a:xfrm>
           <a:prstGeom prst="line">
@@ -4657,13 +5120,13 @@
       </p:cxnSp>
       <p:cxnSp>
         <p:nvCxnSpPr>
-          <p:cNvPr id="41" name="Connector 40"/>
+          <p:cNvPr id="53" name="Connector 52"/>
           <p:cNvCxnSpPr/>
           <p:nvPr/>
         </p:nvCxnSpPr>
         <p:spPr>
           <a:xfrm>
-            <a:off x="7406640" y="5669280"/>
+            <a:off x="7406640" y="6240779"/>
             <a:ext cx="704087" cy="0"/>
           </a:xfrm>
           <a:prstGeom prst="line">
@@ -4692,14 +5155,14 @@
       </p:cxnSp>
       <p:cxnSp>
         <p:nvCxnSpPr>
-          <p:cNvPr id="42" name="Connector 41"/>
+          <p:cNvPr id="54" name="Connector 53"/>
           <p:cNvCxnSpPr/>
           <p:nvPr/>
         </p:nvCxnSpPr>
         <p:spPr>
           <a:xfrm>
-            <a:off x="8110727" y="4914900"/>
-            <a:ext cx="0" cy="777240"/>
+            <a:off x="8110727" y="6240779"/>
+            <a:ext cx="0" cy="228601"/>
           </a:xfrm>
           <a:prstGeom prst="line">
             <a:avLst/>
@@ -4727,13 +5190,13 @@
       </p:cxnSp>
       <p:cxnSp>
         <p:nvCxnSpPr>
-          <p:cNvPr id="43" name="Connector 42"/>
+          <p:cNvPr id="55" name="Connector 54"/>
           <p:cNvCxnSpPr/>
           <p:nvPr/>
         </p:nvCxnSpPr>
         <p:spPr>
           <a:xfrm>
-            <a:off x="8110727" y="4914900"/>
+            <a:off x="8110727" y="6469380"/>
             <a:ext cx="502921" cy="0"/>
           </a:xfrm>
           <a:prstGeom prst="line">
@@ -4761,52 +5224,16 @@
           </a:fontRef>
         </p:style>
       </p:cxnSp>
-      <p:cxnSp>
-        <p:nvCxnSpPr>
-          <p:cNvPr id="44" name="Connector 43"/>
-          <p:cNvCxnSpPr/>
-          <p:nvPr/>
-        </p:nvCxnSpPr>
-        <p:spPr>
-          <a:xfrm>
-            <a:off x="8110727" y="5692140"/>
-            <a:ext cx="502921" cy="0"/>
-          </a:xfrm>
-          <a:prstGeom prst="line">
-            <a:avLst/>
-          </a:prstGeom>
-          <a:ln w="20320">
-            <a:solidFill>
-              <a:srgbClr val="285CE5"/>
-            </a:solidFill>
-            <a:tailEnd type="triangle" w="sm" len="sm"/>
-          </a:ln>
-        </p:spPr>
-        <p:style>
-          <a:lnRef idx="2">
-            <a:schemeClr val="accent1"/>
-          </a:lnRef>
-          <a:fillRef idx="0">
-            <a:schemeClr val="accent1"/>
-          </a:fillRef>
-          <a:effectRef idx="1">
-            <a:schemeClr val="accent1"/>
-          </a:effectRef>
-          <a:fontRef idx="minor">
-            <a:schemeClr val="tx1"/>
-          </a:fontRef>
-        </p:style>
-      </p:cxnSp>
-      <p:sp>
-        <p:nvSpPr>
-          <p:cNvPr id="45" name="Rounded Rectangle 44"/>
+      <p:sp>
+        <p:nvSpPr>
+          <p:cNvPr id="56" name="Rounded Rectangle 55"/>
           <p:cNvSpPr/>
           <p:nvPr/>
         </p:nvSpPr>
         <p:spPr>
           <a:xfrm>
-            <a:off x="777240" y="6629400"/>
-            <a:ext cx="3429000" cy="1005840"/>
+            <a:off x="777240" y="6858000"/>
+            <a:ext cx="3429000" cy="868680"/>
           </a:xfrm>
           <a:prstGeom prst="roundRect">
             <a:avLst>
@@ -4818,7 +5245,7 @@
           </a:solidFill>
           <a:ln w="12700">
             <a:solidFill>
-              <a:srgbClr val="00848C"/>
+              <a:srgbClr val="5742A1"/>
             </a:solidFill>
           </a:ln>
         </p:spPr>
@@ -4846,13 +5273,13 @@
       </p:sp>
       <p:sp>
         <p:nvSpPr>
-          <p:cNvPr id="46" name="TextBox 45"/>
+          <p:cNvPr id="57" name="TextBox 56"/>
           <p:cNvSpPr txBox="1"/>
           <p:nvPr/>
         </p:nvSpPr>
         <p:spPr>
           <a:xfrm>
-            <a:off x="932688" y="6739128"/>
+            <a:off x="932688" y="6949440"/>
             <a:ext cx="3154680" cy="329184"/>
           </a:xfrm>
           <a:prstGeom prst="rect">
@@ -4872,7 +5299,7 @@
               </a:spcAft>
               <a:defRPr sz="2000" b="1">
                 <a:solidFill>
-                  <a:srgbClr val="00848C"/>
+                  <a:srgbClr val="5742A1"/>
                 </a:solidFill>
                 <a:latin typeface="Liberation Sans"/>
               </a:defRPr>
@@ -4885,13 +5312,13 @@
       </p:sp>
       <p:sp>
         <p:nvSpPr>
-          <p:cNvPr id="47" name="TextBox 46"/>
+          <p:cNvPr id="58" name="TextBox 57"/>
           <p:cNvSpPr txBox="1"/>
           <p:nvPr/>
         </p:nvSpPr>
         <p:spPr>
           <a:xfrm>
-            <a:off x="932688" y="7178040"/>
+            <a:off x="932688" y="7333488"/>
             <a:ext cx="3154680" cy="310896"/>
           </a:xfrm>
           <a:prstGeom prst="rect">
@@ -4917,20 +5344,20 @@
               </a:defRPr>
             </a:pPr>
             <a:r>
-              <a:t>Scene graphs</a:t>
+              <a:t>Scene descriptions</a:t>
             </a:r>
           </a:p>
         </p:txBody>
       </p:sp>
       <p:cxnSp>
         <p:nvCxnSpPr>
-          <p:cNvPr id="48" name="Connector 47"/>
+          <p:cNvPr id="59" name="Connector 58"/>
           <p:cNvCxnSpPr/>
           <p:nvPr/>
         </p:nvCxnSpPr>
         <p:spPr>
           <a:xfrm>
-            <a:off x="4206240" y="7132320"/>
+            <a:off x="4206240" y="7292340"/>
             <a:ext cx="393192" cy="0"/>
           </a:xfrm>
           <a:prstGeom prst="line">
@@ -4938,7 +5365,7 @@
           </a:prstGeom>
           <a:ln w="20320">
             <a:solidFill>
-              <a:srgbClr val="00848C"/>
+              <a:srgbClr val="5742A1"/>
             </a:solidFill>
             <a:tailEnd type="triangle" w="sm" len="sm"/>
           </a:ln>
@@ -4960,14 +5387,14 @@
       </p:cxnSp>
       <p:sp>
         <p:nvSpPr>
-          <p:cNvPr id="49" name="Rounded Rectangle 48"/>
+          <p:cNvPr id="60" name="Rounded Rectangle 59"/>
           <p:cNvSpPr/>
           <p:nvPr/>
         </p:nvSpPr>
         <p:spPr>
           <a:xfrm>
-            <a:off x="4617720" y="6629400"/>
-            <a:ext cx="2788920" cy="1005840"/>
+            <a:off x="4617720" y="6858000"/>
+            <a:ext cx="2788920" cy="868680"/>
           </a:xfrm>
           <a:prstGeom prst="roundRect">
             <a:avLst>
@@ -4979,7 +5406,7 @@
           </a:solidFill>
           <a:ln w="12700">
             <a:solidFill>
-              <a:srgbClr val="00848C"/>
+              <a:srgbClr val="5742A1"/>
             </a:solidFill>
           </a:ln>
         </p:spPr>
@@ -5007,13 +5434,13 @@
       </p:sp>
       <p:sp>
         <p:nvSpPr>
-          <p:cNvPr id="50" name="TextBox 49"/>
+          <p:cNvPr id="61" name="TextBox 60"/>
           <p:cNvSpPr txBox="1"/>
           <p:nvPr/>
         </p:nvSpPr>
         <p:spPr>
           <a:xfrm>
-            <a:off x="4773168" y="6739128"/>
+            <a:off x="4773168" y="6949440"/>
             <a:ext cx="2496312" cy="329184"/>
           </a:xfrm>
           <a:prstGeom prst="rect">
@@ -5033,26 +5460,26 @@
               </a:spcAft>
               <a:defRPr sz="2000" b="1">
                 <a:solidFill>
-                  <a:srgbClr val="00848C"/>
+                  <a:srgbClr val="5742A1"/>
                 </a:solidFill>
                 <a:latin typeface="Liberation Sans"/>
               </a:defRPr>
             </a:pPr>
             <a:r>
-              <a:t>GG  Summary</a:t>
-            </a:r>
-          </a:p>
-        </p:txBody>
-      </p:sp>
-      <p:sp>
-        <p:nvSpPr>
-          <p:cNvPr id="51" name="TextBox 50"/>
+              <a:t>DG  Summary</a:t>
+            </a:r>
+          </a:p>
+        </p:txBody>
+      </p:sp>
+      <p:sp>
+        <p:nvSpPr>
+          <p:cNvPr id="62" name="TextBox 61"/>
           <p:cNvSpPr txBox="1"/>
           <p:nvPr/>
         </p:nvSpPr>
         <p:spPr>
           <a:xfrm>
-            <a:off x="4773168" y="7178040"/>
+            <a:off x="4773168" y="7333488"/>
             <a:ext cx="2496312" cy="310896"/>
           </a:xfrm>
           <a:prstGeom prst="rect">
@@ -5078,28 +5505,28 @@
               </a:defRPr>
             </a:pPr>
             <a:r>
-              <a:t>Title-free · shared</a:t>
+              <a:t>Title-free</a:t>
             </a:r>
           </a:p>
         </p:txBody>
       </p:sp>
       <p:cxnSp>
         <p:nvCxnSpPr>
-          <p:cNvPr id="52" name="Connector 51"/>
+          <p:cNvPr id="63" name="Connector 62"/>
           <p:cNvCxnSpPr/>
           <p:nvPr/>
         </p:nvCxnSpPr>
         <p:spPr>
           <a:xfrm>
             <a:off x="640080" y="3236976"/>
-            <a:ext cx="0" cy="3895344"/>
+            <a:ext cx="0" cy="4055364"/>
           </a:xfrm>
           <a:prstGeom prst="line">
             <a:avLst/>
           </a:prstGeom>
           <a:ln w="12700">
             <a:solidFill>
-              <a:srgbClr val="00848C"/>
+              <a:srgbClr val="516985"/>
             </a:solidFill>
           </a:ln>
         </p:spPr>
@@ -5120,13 +5547,13 @@
       </p:cxnSp>
       <p:cxnSp>
         <p:nvCxnSpPr>
-          <p:cNvPr id="53" name="Connector 52"/>
+          <p:cNvPr id="64" name="Connector 63"/>
           <p:cNvCxnSpPr/>
           <p:nvPr/>
         </p:nvCxnSpPr>
         <p:spPr>
           <a:xfrm>
-            <a:off x="640080" y="7132320"/>
+            <a:off x="640080" y="7292340"/>
             <a:ext cx="137160" cy="0"/>
           </a:xfrm>
           <a:prstGeom prst="line">
@@ -5134,7 +5561,7 @@
           </a:prstGeom>
           <a:ln w="12700">
             <a:solidFill>
-              <a:srgbClr val="00848C"/>
+              <a:srgbClr val="5742A1"/>
             </a:solidFill>
             <a:tailEnd type="triangle" w="sm" len="sm"/>
           </a:ln>
@@ -5156,13 +5583,13 @@
       </p:cxnSp>
       <p:cxnSp>
         <p:nvCxnSpPr>
-          <p:cNvPr id="54" name="Connector 53"/>
+          <p:cNvPr id="65" name="Connector 64"/>
           <p:cNvCxnSpPr/>
           <p:nvPr/>
         </p:nvCxnSpPr>
         <p:spPr>
           <a:xfrm>
-            <a:off x="7406640" y="7132320"/>
+            <a:off x="7406640" y="7292340"/>
             <a:ext cx="704087" cy="0"/>
           </a:xfrm>
           <a:prstGeom prst="line">
@@ -5170,7 +5597,7 @@
           </a:prstGeom>
           <a:ln w="20320">
             <a:solidFill>
-              <a:srgbClr val="00848C"/>
+              <a:srgbClr val="5742A1"/>
             </a:solidFill>
           </a:ln>
         </p:spPr>
@@ -5191,21 +5618,21 @@
       </p:cxnSp>
       <p:cxnSp>
         <p:nvCxnSpPr>
-          <p:cNvPr id="55" name="Connector 54"/>
+          <p:cNvPr id="66" name="Connector 65"/>
           <p:cNvCxnSpPr/>
           <p:nvPr/>
         </p:nvCxnSpPr>
         <p:spPr>
           <a:xfrm>
-            <a:off x="8110727" y="6469380"/>
-            <a:ext cx="0" cy="662940"/>
+            <a:off x="8110727" y="7246620"/>
+            <a:ext cx="0" cy="45720"/>
           </a:xfrm>
           <a:prstGeom prst="line">
             <a:avLst/>
           </a:prstGeom>
           <a:ln w="20320">
             <a:solidFill>
-              <a:srgbClr val="00848C"/>
+              <a:srgbClr val="5742A1"/>
             </a:solidFill>
           </a:ln>
         </p:spPr>
@@ -5226,13 +5653,13 @@
       </p:cxnSp>
       <p:cxnSp>
         <p:nvCxnSpPr>
-          <p:cNvPr id="56" name="Connector 55"/>
+          <p:cNvPr id="67" name="Connector 66"/>
           <p:cNvCxnSpPr/>
           <p:nvPr/>
         </p:nvCxnSpPr>
         <p:spPr>
           <a:xfrm>
-            <a:off x="8110727" y="6469380"/>
+            <a:off x="8110727" y="7246620"/>
             <a:ext cx="502921" cy="0"/>
           </a:xfrm>
           <a:prstGeom prst="line">
@@ -5240,7 +5667,7 @@
           </a:prstGeom>
           <a:ln w="20320">
             <a:solidFill>
-              <a:srgbClr val="00848C"/>
+              <a:srgbClr val="5742A1"/>
             </a:solidFill>
             <a:tailEnd type="triangle" w="sm" len="sm"/>
           </a:ln>
@@ -5262,7 +5689,7 @@
       </p:cxnSp>
       <p:sp>
         <p:nvSpPr>
-          <p:cNvPr id="57" name="TextBox 56"/>
+          <p:cNvPr id="68" name="TextBox 67"/>
           <p:cNvSpPr txBox="1"/>
           <p:nvPr/>
         </p:nvSpPr>
@@ -5310,20 +5737,188 @@
               </a:defRPr>
             </a:pPr>
             <a:r>
-              <a:t>One Summary per source feeds its standalone / combined arms.</a:t>
-            </a:r>
-          </a:p>
-        </p:txBody>
-      </p:sp>
-      <p:sp>
-        <p:nvSpPr>
-          <p:cNvPr id="58" name="Rounded Rectangle 57"/>
+              <a:t>GQ Summary is shared by graph_qwen and graph_qwen_meta.</a:t>
+            </a:r>
+          </a:p>
+        </p:txBody>
+      </p:sp>
+      <p:sp>
+        <p:nvSpPr>
+          <p:cNvPr id="69" name="Rounded Rectangle 68"/>
           <p:cNvSpPr/>
           <p:nvPr/>
         </p:nvSpPr>
         <p:spPr>
           <a:xfrm>
             <a:off x="8613648" y="3035808"/>
+            <a:ext cx="5486400" cy="649224"/>
+          </a:xfrm>
+          <a:prstGeom prst="roundRect">
+            <a:avLst>
+              <a:gd name="adj" fmla="val 10000"/>
+            </a:avLst>
+          </a:prstGeom>
+          <a:solidFill>
+            <a:srgbClr val="FFFFFF"/>
+          </a:solidFill>
+          <a:ln w="22860">
+            <a:solidFill>
+              <a:srgbClr val="636F80"/>
+            </a:solidFill>
+          </a:ln>
+        </p:spPr>
+        <p:style>
+          <a:lnRef idx="1">
+            <a:schemeClr val="accent1"/>
+          </a:lnRef>
+          <a:fillRef idx="3">
+            <a:schemeClr val="accent1"/>
+          </a:fillRef>
+          <a:effectRef idx="0">
+            <a:schemeClr val="accent1"/>
+          </a:effectRef>
+          <a:fontRef idx="minor">
+            <a:schemeClr val="lt1"/>
+          </a:fontRef>
+        </p:style>
+        <p:txBody>
+          <a:bodyPr rtlCol="0" anchor="ctr"/>
+          <a:lstStyle/>
+          <a:p>
+            <a:pPr algn="ctr"/>
+          </a:p>
+        </p:txBody>
+      </p:sp>
+      <p:sp>
+        <p:nvSpPr>
+          <p:cNvPr id="70" name="Rectangle 69"/>
+          <p:cNvSpPr/>
+          <p:nvPr/>
+        </p:nvSpPr>
+        <p:spPr>
+          <a:xfrm>
+            <a:off x="8622792" y="3063239"/>
+            <a:ext cx="59436" cy="594360"/>
+          </a:xfrm>
+          <a:prstGeom prst="rect">
+            <a:avLst/>
+          </a:prstGeom>
+          <a:solidFill>
+            <a:srgbClr val="636F80"/>
+          </a:solidFill>
+          <a:ln>
+            <a:noFill/>
+          </a:ln>
+        </p:spPr>
+        <p:style>
+          <a:lnRef idx="1">
+            <a:schemeClr val="accent1"/>
+          </a:lnRef>
+          <a:fillRef idx="3">
+            <a:schemeClr val="accent1"/>
+          </a:fillRef>
+          <a:effectRef idx="0">
+            <a:schemeClr val="accent1"/>
+          </a:effectRef>
+          <a:fontRef idx="minor">
+            <a:schemeClr val="lt1"/>
+          </a:fontRef>
+        </p:style>
+        <p:txBody>
+          <a:bodyPr rtlCol="0" anchor="ctr"/>
+          <a:lstStyle/>
+          <a:p>
+            <a:pPr algn="ctr"/>
+          </a:p>
+        </p:txBody>
+      </p:sp>
+      <p:sp>
+        <p:nvSpPr>
+          <p:cNvPr id="71" name="TextBox 70"/>
+          <p:cNvSpPr txBox="1"/>
+          <p:nvPr/>
+        </p:nvSpPr>
+        <p:spPr>
+          <a:xfrm>
+            <a:off x="8787384" y="3172968"/>
+            <a:ext cx="3593592" cy="393192"/>
+          </a:xfrm>
+          <a:prstGeom prst="rect">
+            <a:avLst/>
+          </a:prstGeom>
+          <a:noFill/>
+        </p:spPr>
+        <p:txBody>
+          <a:bodyPr wrap="square" lIns="18288" rIns="18288" tIns="13716" bIns="0">
+            <a:spAutoFit/>
+          </a:bodyPr>
+          <a:lstStyle/>
+          <a:p>
+            <a:pPr>
+              <a:spcAft>
+                <a:spcPts val="300"/>
+              </a:spcAft>
+              <a:defRPr sz="1900" b="1">
+                <a:solidFill>
+                  <a:srgbClr val="636F80"/>
+                </a:solidFill>
+                <a:latin typeface="Liberation Sans"/>
+              </a:defRPr>
+            </a:pPr>
+            <a:r>
+              <a:t>meta</a:t>
+            </a:r>
+          </a:p>
+        </p:txBody>
+      </p:sp>
+      <p:sp>
+        <p:nvSpPr>
+          <p:cNvPr id="72" name="TextBox 71"/>
+          <p:cNvSpPr txBox="1"/>
+          <p:nvPr/>
+        </p:nvSpPr>
+        <p:spPr>
+          <a:xfrm>
+            <a:off x="12408408" y="3182112"/>
+            <a:ext cx="1554480" cy="393192"/>
+          </a:xfrm>
+          <a:prstGeom prst="rect">
+            <a:avLst/>
+          </a:prstGeom>
+          <a:noFill/>
+        </p:spPr>
+        <p:txBody>
+          <a:bodyPr wrap="square" lIns="18288" rIns="18288" tIns="13716" bIns="0">
+            <a:spAutoFit/>
+          </a:bodyPr>
+          <a:lstStyle/>
+          <a:p>
+            <a:pPr>
+              <a:spcAft>
+                <a:spcPts val="300"/>
+              </a:spcAft>
+              <a:defRPr sz="1800" b="1">
+                <a:solidFill>
+                  <a:srgbClr val="636F80"/>
+                </a:solidFill>
+                <a:latin typeface="Liberation Sans"/>
+              </a:defRPr>
+            </a:pPr>
+            <a:r>
+              <a:t>T</a:t>
+            </a:r>
+          </a:p>
+        </p:txBody>
+      </p:sp>
+      <p:sp>
+        <p:nvSpPr>
+          <p:cNvPr id="73" name="Rounded Rectangle 72"/>
+          <p:cNvSpPr/>
+          <p:nvPr/>
+        </p:nvSpPr>
+        <p:spPr>
+          <a:xfrm>
+            <a:off x="8613648" y="3813048"/>
             <a:ext cx="5486400" cy="649224"/>
           </a:xfrm>
           <a:prstGeom prst="roundRect">
@@ -5364,13 +5959,13 @@
       </p:sp>
       <p:sp>
         <p:nvSpPr>
-          <p:cNvPr id="59" name="Rectangle 58"/>
+          <p:cNvPr id="74" name="Rectangle 73"/>
           <p:cNvSpPr/>
           <p:nvPr/>
         </p:nvSpPr>
         <p:spPr>
           <a:xfrm>
-            <a:off x="8622792" y="3063239"/>
+            <a:off x="8622792" y="3840480"/>
             <a:ext cx="59436" cy="594360"/>
           </a:xfrm>
           <a:prstGeom prst="rect">
@@ -5407,13 +6002,13 @@
       </p:sp>
       <p:sp>
         <p:nvSpPr>
-          <p:cNvPr id="60" name="TextBox 59"/>
+          <p:cNvPr id="75" name="TextBox 74"/>
           <p:cNvSpPr txBox="1"/>
           <p:nvPr/>
         </p:nvSpPr>
         <p:spPr>
           <a:xfrm>
-            <a:off x="8787384" y="3172968"/>
+            <a:off x="8787384" y="3950208"/>
             <a:ext cx="3593592" cy="393192"/>
           </a:xfrm>
           <a:prstGeom prst="rect">
@@ -5446,13 +6041,13 @@
       </p:sp>
       <p:sp>
         <p:nvSpPr>
-          <p:cNvPr id="61" name="TextBox 60"/>
+          <p:cNvPr id="76" name="TextBox 75"/>
           <p:cNvSpPr txBox="1"/>
           <p:nvPr/>
         </p:nvSpPr>
         <p:spPr>
           <a:xfrm>
-            <a:off x="12408408" y="3182112"/>
+            <a:off x="12408408" y="3959352"/>
             <a:ext cx="1554480" cy="393192"/>
           </a:xfrm>
           <a:prstGeom prst="rect">
@@ -5485,13 +6080,13 @@
       </p:sp>
       <p:sp>
         <p:nvSpPr>
-          <p:cNvPr id="62" name="Rounded Rectangle 61"/>
+          <p:cNvPr id="77" name="Rounded Rectangle 76"/>
           <p:cNvSpPr/>
           <p:nvPr/>
         </p:nvSpPr>
         <p:spPr>
           <a:xfrm>
-            <a:off x="8613648" y="3813048"/>
+            <a:off x="8613648" y="4590288"/>
             <a:ext cx="5486400" cy="649224"/>
           </a:xfrm>
           <a:prstGeom prst="roundRect">
@@ -5532,13 +6127,13 @@
       </p:sp>
       <p:sp>
         <p:nvSpPr>
-          <p:cNvPr id="63" name="Rectangle 62"/>
+          <p:cNvPr id="78" name="Rectangle 77"/>
           <p:cNvSpPr/>
           <p:nvPr/>
         </p:nvSpPr>
         <p:spPr>
           <a:xfrm>
-            <a:off x="8622792" y="3840480"/>
+            <a:off x="8622792" y="4617720"/>
             <a:ext cx="59436" cy="594360"/>
           </a:xfrm>
           <a:prstGeom prst="rect">
@@ -5575,13 +6170,13 @@
       </p:sp>
       <p:sp>
         <p:nvSpPr>
-          <p:cNvPr id="64" name="TextBox 63"/>
+          <p:cNvPr id="79" name="TextBox 78"/>
           <p:cNvSpPr txBox="1"/>
           <p:nvPr/>
         </p:nvSpPr>
         <p:spPr>
           <a:xfrm>
-            <a:off x="8787384" y="3950208"/>
+            <a:off x="8787384" y="4727448"/>
             <a:ext cx="3593592" cy="393192"/>
           </a:xfrm>
           <a:prstGeom prst="rect">
@@ -5614,13 +6209,13 @@
       </p:sp>
       <p:sp>
         <p:nvSpPr>
-          <p:cNvPr id="65" name="TextBox 64"/>
+          <p:cNvPr id="80" name="TextBox 79"/>
           <p:cNvSpPr txBox="1"/>
           <p:nvPr/>
         </p:nvSpPr>
         <p:spPr>
           <a:xfrm>
-            <a:off x="12408408" y="3959352"/>
+            <a:off x="12408408" y="4736592"/>
             <a:ext cx="1554480" cy="393192"/>
           </a:xfrm>
           <a:prstGeom prst="rect">
@@ -5653,13 +6248,181 @@
       </p:sp>
       <p:sp>
         <p:nvSpPr>
-          <p:cNvPr id="66" name="Rounded Rectangle 65"/>
+          <p:cNvPr id="81" name="Rounded Rectangle 80"/>
           <p:cNvSpPr/>
           <p:nvPr/>
         </p:nvSpPr>
         <p:spPr>
           <a:xfrm>
-            <a:off x="8613648" y="4590288"/>
+            <a:off x="8613648" y="5367527"/>
+            <a:ext cx="5486400" cy="649224"/>
+          </a:xfrm>
+          <a:prstGeom prst="roundRect">
+            <a:avLst>
+              <a:gd name="adj" fmla="val 10000"/>
+            </a:avLst>
+          </a:prstGeom>
+          <a:solidFill>
+            <a:srgbClr val="FFFFFF"/>
+          </a:solidFill>
+          <a:ln w="12700">
+            <a:solidFill>
+              <a:srgbClr val="00848C"/>
+            </a:solidFill>
+          </a:ln>
+        </p:spPr>
+        <p:style>
+          <a:lnRef idx="1">
+            <a:schemeClr val="accent1"/>
+          </a:lnRef>
+          <a:fillRef idx="3">
+            <a:schemeClr val="accent1"/>
+          </a:fillRef>
+          <a:effectRef idx="0">
+            <a:schemeClr val="accent1"/>
+          </a:effectRef>
+          <a:fontRef idx="minor">
+            <a:schemeClr val="lt1"/>
+          </a:fontRef>
+        </p:style>
+        <p:txBody>
+          <a:bodyPr rtlCol="0" anchor="ctr"/>
+          <a:lstStyle/>
+          <a:p>
+            <a:pPr algn="ctr"/>
+          </a:p>
+        </p:txBody>
+      </p:sp>
+      <p:sp>
+        <p:nvSpPr>
+          <p:cNvPr id="82" name="Rectangle 81"/>
+          <p:cNvSpPr/>
+          <p:nvPr/>
+        </p:nvSpPr>
+        <p:spPr>
+          <a:xfrm>
+            <a:off x="8622792" y="5394959"/>
+            <a:ext cx="59436" cy="594360"/>
+          </a:xfrm>
+          <a:prstGeom prst="rect">
+            <a:avLst/>
+          </a:prstGeom>
+          <a:solidFill>
+            <a:srgbClr val="00848C"/>
+          </a:solidFill>
+          <a:ln>
+            <a:noFill/>
+          </a:ln>
+        </p:spPr>
+        <p:style>
+          <a:lnRef idx="1">
+            <a:schemeClr val="accent1"/>
+          </a:lnRef>
+          <a:fillRef idx="3">
+            <a:schemeClr val="accent1"/>
+          </a:fillRef>
+          <a:effectRef idx="0">
+            <a:schemeClr val="accent1"/>
+          </a:effectRef>
+          <a:fontRef idx="minor">
+            <a:schemeClr val="lt1"/>
+          </a:fontRef>
+        </p:style>
+        <p:txBody>
+          <a:bodyPr rtlCol="0" anchor="ctr"/>
+          <a:lstStyle/>
+          <a:p>
+            <a:pPr algn="ctr"/>
+          </a:p>
+        </p:txBody>
+      </p:sp>
+      <p:sp>
+        <p:nvSpPr>
+          <p:cNvPr id="83" name="TextBox 82"/>
+          <p:cNvSpPr txBox="1"/>
+          <p:nvPr/>
+        </p:nvSpPr>
+        <p:spPr>
+          <a:xfrm>
+            <a:off x="8787384" y="5504688"/>
+            <a:ext cx="3593592" cy="393192"/>
+          </a:xfrm>
+          <a:prstGeom prst="rect">
+            <a:avLst/>
+          </a:prstGeom>
+          <a:noFill/>
+        </p:spPr>
+        <p:txBody>
+          <a:bodyPr wrap="square" lIns="18288" rIns="18288" tIns="13716" bIns="0">
+            <a:spAutoFit/>
+          </a:bodyPr>
+          <a:lstStyle/>
+          <a:p>
+            <a:pPr>
+              <a:spcAft>
+                <a:spcPts val="300"/>
+              </a:spcAft>
+              <a:defRPr sz="1900" b="1">
+                <a:solidFill>
+                  <a:srgbClr val="00848C"/>
+                </a:solidFill>
+                <a:latin typeface="Liberation Sans"/>
+              </a:defRPr>
+            </a:pPr>
+            <a:r>
+              <a:t>graph_gemini_meta</a:t>
+            </a:r>
+          </a:p>
+        </p:txBody>
+      </p:sp>
+      <p:sp>
+        <p:nvSpPr>
+          <p:cNvPr id="84" name="TextBox 83"/>
+          <p:cNvSpPr txBox="1"/>
+          <p:nvPr/>
+        </p:nvSpPr>
+        <p:spPr>
+          <a:xfrm>
+            <a:off x="12408408" y="5513831"/>
+            <a:ext cx="1554480" cy="393192"/>
+          </a:xfrm>
+          <a:prstGeom prst="rect">
+            <a:avLst/>
+          </a:prstGeom>
+          <a:noFill/>
+        </p:spPr>
+        <p:txBody>
+          <a:bodyPr wrap="square" lIns="18288" rIns="18288" tIns="13716" bIns="0">
+            <a:spAutoFit/>
+          </a:bodyPr>
+          <a:lstStyle/>
+          <a:p>
+            <a:pPr>
+              <a:spcAft>
+                <a:spcPts val="300"/>
+              </a:spcAft>
+              <a:defRPr sz="1800" b="1">
+                <a:solidFill>
+                  <a:srgbClr val="00848C"/>
+                </a:solidFill>
+                <a:latin typeface="Liberation Sans"/>
+              </a:defRPr>
+            </a:pPr>
+            <a:r>
+              <a:t>T + GG</a:t>
+            </a:r>
+          </a:p>
+        </p:txBody>
+      </p:sp>
+      <p:sp>
+        <p:nvSpPr>
+          <p:cNvPr id="85" name="Rounded Rectangle 84"/>
+          <p:cNvSpPr/>
+          <p:nvPr/>
+        </p:nvSpPr>
+        <p:spPr>
+          <a:xfrm>
+            <a:off x="8613648" y="6144768"/>
             <a:ext cx="5486400" cy="649224"/>
           </a:xfrm>
           <a:prstGeom prst="roundRect">
@@ -5700,13 +6463,13 @@
       </p:sp>
       <p:sp>
         <p:nvSpPr>
-          <p:cNvPr id="67" name="Rectangle 66"/>
+          <p:cNvPr id="86" name="Rectangle 85"/>
           <p:cNvSpPr/>
           <p:nvPr/>
         </p:nvSpPr>
         <p:spPr>
           <a:xfrm>
-            <a:off x="8622792" y="4617720"/>
+            <a:off x="8622792" y="6172200"/>
             <a:ext cx="59436" cy="594360"/>
           </a:xfrm>
           <a:prstGeom prst="rect">
@@ -5743,13 +6506,13 @@
       </p:sp>
       <p:sp>
         <p:nvSpPr>
-          <p:cNvPr id="68" name="TextBox 67"/>
+          <p:cNvPr id="87" name="TextBox 86"/>
           <p:cNvSpPr txBox="1"/>
           <p:nvPr/>
         </p:nvSpPr>
         <p:spPr>
           <a:xfrm>
-            <a:off x="8787384" y="4727448"/>
+            <a:off x="8787384" y="6281928"/>
             <a:ext cx="3593592" cy="393192"/>
           </a:xfrm>
           <a:prstGeom prst="rect">
@@ -5775,20 +6538,20 @@
               </a:defRPr>
             </a:pPr>
             <a:r>
-              <a:t>desc_qwen</a:t>
-            </a:r>
-          </a:p>
-        </p:txBody>
-      </p:sp>
-      <p:sp>
-        <p:nvSpPr>
-          <p:cNvPr id="69" name="TextBox 68"/>
+              <a:t>desc_qwen_meta</a:t>
+            </a:r>
+          </a:p>
+        </p:txBody>
+      </p:sp>
+      <p:sp>
+        <p:nvSpPr>
+          <p:cNvPr id="88" name="TextBox 87"/>
           <p:cNvSpPr txBox="1"/>
           <p:nvPr/>
         </p:nvSpPr>
         <p:spPr>
           <a:xfrm>
-            <a:off x="12408408" y="4736592"/>
+            <a:off x="12408408" y="6291072"/>
             <a:ext cx="1554480" cy="393192"/>
           </a:xfrm>
           <a:prstGeom prst="rect">
@@ -5814,20 +6577,20 @@
               </a:defRPr>
             </a:pPr>
             <a:r>
-              <a:t>DQ</a:t>
-            </a:r>
-          </a:p>
-        </p:txBody>
-      </p:sp>
-      <p:sp>
-        <p:nvSpPr>
-          <p:cNvPr id="70" name="Rounded Rectangle 69"/>
+              <a:t>T + DQ</a:t>
+            </a:r>
+          </a:p>
+        </p:txBody>
+      </p:sp>
+      <p:sp>
+        <p:nvSpPr>
+          <p:cNvPr id="89" name="Rounded Rectangle 88"/>
           <p:cNvSpPr/>
           <p:nvPr/>
         </p:nvSpPr>
         <p:spPr>
           <a:xfrm>
-            <a:off x="8613648" y="5367527"/>
+            <a:off x="8613648" y="6922008"/>
             <a:ext cx="5486400" cy="649224"/>
           </a:xfrm>
           <a:prstGeom prst="roundRect">
@@ -5840,7 +6603,7 @@
           </a:solidFill>
           <a:ln w="12700">
             <a:solidFill>
-              <a:srgbClr val="285CE5"/>
+              <a:srgbClr val="5742A1"/>
             </a:solidFill>
           </a:ln>
         </p:spPr>
@@ -5868,20 +6631,20 @@
       </p:sp>
       <p:sp>
         <p:nvSpPr>
-          <p:cNvPr id="71" name="Rectangle 70"/>
+          <p:cNvPr id="90" name="Rectangle 89"/>
           <p:cNvSpPr/>
           <p:nvPr/>
         </p:nvSpPr>
         <p:spPr>
           <a:xfrm>
-            <a:off x="8622792" y="5394959"/>
+            <a:off x="8622792" y="6949440"/>
             <a:ext cx="59436" cy="594360"/>
           </a:xfrm>
           <a:prstGeom prst="rect">
             <a:avLst/>
           </a:prstGeom>
           <a:solidFill>
-            <a:srgbClr val="285CE5"/>
+            <a:srgbClr val="5742A1"/>
           </a:solidFill>
           <a:ln>
             <a:noFill/>
@@ -5911,13 +6674,13 @@
       </p:sp>
       <p:sp>
         <p:nvSpPr>
-          <p:cNvPr id="72" name="TextBox 71"/>
+          <p:cNvPr id="91" name="TextBox 90"/>
           <p:cNvSpPr txBox="1"/>
           <p:nvPr/>
         </p:nvSpPr>
         <p:spPr>
           <a:xfrm>
-            <a:off x="8787384" y="5504688"/>
+            <a:off x="8787384" y="7059168"/>
             <a:ext cx="3593592" cy="393192"/>
           </a:xfrm>
           <a:prstGeom prst="rect">
@@ -5937,26 +6700,26 @@
               </a:spcAft>
               <a:defRPr sz="1900" b="1">
                 <a:solidFill>
-                  <a:srgbClr val="285CE5"/>
+                  <a:srgbClr val="5742A1"/>
                 </a:solidFill>
                 <a:latin typeface="Liberation Sans"/>
               </a:defRPr>
             </a:pPr>
             <a:r>
-              <a:t>desc_qwen_meta</a:t>
-            </a:r>
-          </a:p>
-        </p:txBody>
-      </p:sp>
-      <p:sp>
-        <p:nvSpPr>
-          <p:cNvPr id="73" name="TextBox 72"/>
+              <a:t>desc_gemini_meta</a:t>
+            </a:r>
+          </a:p>
+        </p:txBody>
+      </p:sp>
+      <p:sp>
+        <p:nvSpPr>
+          <p:cNvPr id="92" name="TextBox 91"/>
           <p:cNvSpPr txBox="1"/>
           <p:nvPr/>
         </p:nvSpPr>
         <p:spPr>
           <a:xfrm>
-            <a:off x="12408408" y="5513831"/>
+            <a:off x="12408408" y="7068312"/>
             <a:ext cx="1554480" cy="393192"/>
           </a:xfrm>
           <a:prstGeom prst="rect">
@@ -5976,356 +6739,20 @@
               </a:spcAft>
               <a:defRPr sz="1800" b="1">
                 <a:solidFill>
-                  <a:srgbClr val="285CE5"/>
+                  <a:srgbClr val="5742A1"/>
                 </a:solidFill>
                 <a:latin typeface="Liberation Sans"/>
               </a:defRPr>
             </a:pPr>
             <a:r>
-              <a:t>T + DQ</a:t>
-            </a:r>
-          </a:p>
-        </p:txBody>
-      </p:sp>
-      <p:sp>
-        <p:nvSpPr>
-          <p:cNvPr id="74" name="Rounded Rectangle 73"/>
-          <p:cNvSpPr/>
-          <p:nvPr/>
-        </p:nvSpPr>
-        <p:spPr>
-          <a:xfrm>
-            <a:off x="8613648" y="6144768"/>
-            <a:ext cx="5486400" cy="649224"/>
-          </a:xfrm>
-          <a:prstGeom prst="roundRect">
-            <a:avLst>
-              <a:gd name="adj" fmla="val 10000"/>
-            </a:avLst>
-          </a:prstGeom>
-          <a:solidFill>
-            <a:srgbClr val="FFFFFF"/>
-          </a:solidFill>
-          <a:ln w="12700">
-            <a:solidFill>
-              <a:srgbClr val="00848C"/>
-            </a:solidFill>
-          </a:ln>
-        </p:spPr>
-        <p:style>
-          <a:lnRef idx="1">
-            <a:schemeClr val="accent1"/>
-          </a:lnRef>
-          <a:fillRef idx="3">
-            <a:schemeClr val="accent1"/>
-          </a:fillRef>
-          <a:effectRef idx="0">
-            <a:schemeClr val="accent1"/>
-          </a:effectRef>
-          <a:fontRef idx="minor">
-            <a:schemeClr val="lt1"/>
-          </a:fontRef>
-        </p:style>
-        <p:txBody>
-          <a:bodyPr rtlCol="0" anchor="ctr"/>
-          <a:lstStyle/>
-          <a:p>
-            <a:pPr algn="ctr"/>
-          </a:p>
-        </p:txBody>
-      </p:sp>
-      <p:sp>
-        <p:nvSpPr>
-          <p:cNvPr id="75" name="Rectangle 74"/>
-          <p:cNvSpPr/>
-          <p:nvPr/>
-        </p:nvSpPr>
-        <p:spPr>
-          <a:xfrm>
-            <a:off x="8622792" y="6172200"/>
-            <a:ext cx="59436" cy="594360"/>
-          </a:xfrm>
-          <a:prstGeom prst="rect">
-            <a:avLst/>
-          </a:prstGeom>
-          <a:solidFill>
-            <a:srgbClr val="00848C"/>
-          </a:solidFill>
-          <a:ln>
-            <a:noFill/>
-          </a:ln>
-        </p:spPr>
-        <p:style>
-          <a:lnRef idx="1">
-            <a:schemeClr val="accent1"/>
-          </a:lnRef>
-          <a:fillRef idx="3">
-            <a:schemeClr val="accent1"/>
-          </a:fillRef>
-          <a:effectRef idx="0">
-            <a:schemeClr val="accent1"/>
-          </a:effectRef>
-          <a:fontRef idx="minor">
-            <a:schemeClr val="lt1"/>
-          </a:fontRef>
-        </p:style>
-        <p:txBody>
-          <a:bodyPr rtlCol="0" anchor="ctr"/>
-          <a:lstStyle/>
-          <a:p>
-            <a:pPr algn="ctr"/>
-          </a:p>
-        </p:txBody>
-      </p:sp>
-      <p:sp>
-        <p:nvSpPr>
-          <p:cNvPr id="76" name="TextBox 75"/>
-          <p:cNvSpPr txBox="1"/>
-          <p:nvPr/>
-        </p:nvSpPr>
-        <p:spPr>
-          <a:xfrm>
-            <a:off x="8787384" y="6281928"/>
-            <a:ext cx="3593592" cy="393192"/>
-          </a:xfrm>
-          <a:prstGeom prst="rect">
-            <a:avLst/>
-          </a:prstGeom>
-          <a:noFill/>
-        </p:spPr>
-        <p:txBody>
-          <a:bodyPr wrap="square" lIns="18288" rIns="18288" tIns="13716" bIns="0">
-            <a:spAutoFit/>
-          </a:bodyPr>
-          <a:lstStyle/>
-          <a:p>
-            <a:pPr>
-              <a:spcAft>
-                <a:spcPts val="300"/>
-              </a:spcAft>
-              <a:defRPr sz="1900" b="1">
-                <a:solidFill>
-                  <a:srgbClr val="00848C"/>
-                </a:solidFill>
-                <a:latin typeface="Liberation Sans"/>
-              </a:defRPr>
-            </a:pPr>
-            <a:r>
-              <a:t>graph_gemini_meta</a:t>
-            </a:r>
-          </a:p>
-        </p:txBody>
-      </p:sp>
-      <p:sp>
-        <p:nvSpPr>
-          <p:cNvPr id="77" name="TextBox 76"/>
-          <p:cNvSpPr txBox="1"/>
-          <p:nvPr/>
-        </p:nvSpPr>
-        <p:spPr>
-          <a:xfrm>
-            <a:off x="12408408" y="6291072"/>
-            <a:ext cx="1554480" cy="393192"/>
-          </a:xfrm>
-          <a:prstGeom prst="rect">
-            <a:avLst/>
-          </a:prstGeom>
-          <a:noFill/>
-        </p:spPr>
-        <p:txBody>
-          <a:bodyPr wrap="square" lIns="18288" rIns="18288" tIns="13716" bIns="0">
-            <a:spAutoFit/>
-          </a:bodyPr>
-          <a:lstStyle/>
-          <a:p>
-            <a:pPr>
-              <a:spcAft>
-                <a:spcPts val="300"/>
-              </a:spcAft>
-              <a:defRPr sz="1800" b="1">
-                <a:solidFill>
-                  <a:srgbClr val="00848C"/>
-                </a:solidFill>
-                <a:latin typeface="Liberation Sans"/>
-              </a:defRPr>
-            </a:pPr>
-            <a:r>
-              <a:t>T + GG</a:t>
-            </a:r>
-          </a:p>
-        </p:txBody>
-      </p:sp>
-      <p:sp>
-        <p:nvSpPr>
-          <p:cNvPr id="78" name="Rounded Rectangle 77"/>
-          <p:cNvSpPr/>
-          <p:nvPr/>
-        </p:nvSpPr>
-        <p:spPr>
-          <a:xfrm>
-            <a:off x="8613648" y="6922008"/>
-            <a:ext cx="5486400" cy="649224"/>
-          </a:xfrm>
-          <a:prstGeom prst="roundRect">
-            <a:avLst>
-              <a:gd name="adj" fmla="val 10000"/>
-            </a:avLst>
-          </a:prstGeom>
-          <a:solidFill>
-            <a:srgbClr val="FFFFFF"/>
-          </a:solidFill>
-          <a:ln w="22860">
-            <a:solidFill>
-              <a:srgbClr val="636F80"/>
-            </a:solidFill>
-          </a:ln>
-        </p:spPr>
-        <p:style>
-          <a:lnRef idx="1">
-            <a:schemeClr val="accent1"/>
-          </a:lnRef>
-          <a:fillRef idx="3">
-            <a:schemeClr val="accent1"/>
-          </a:fillRef>
-          <a:effectRef idx="0">
-            <a:schemeClr val="accent1"/>
-          </a:effectRef>
-          <a:fontRef idx="minor">
-            <a:schemeClr val="lt1"/>
-          </a:fontRef>
-        </p:style>
-        <p:txBody>
-          <a:bodyPr rtlCol="0" anchor="ctr"/>
-          <a:lstStyle/>
-          <a:p>
-            <a:pPr algn="ctr"/>
-          </a:p>
-        </p:txBody>
-      </p:sp>
-      <p:sp>
-        <p:nvSpPr>
-          <p:cNvPr id="79" name="Rectangle 78"/>
-          <p:cNvSpPr/>
-          <p:nvPr/>
-        </p:nvSpPr>
-        <p:spPr>
-          <a:xfrm>
-            <a:off x="8622792" y="6949440"/>
-            <a:ext cx="59436" cy="594360"/>
-          </a:xfrm>
-          <a:prstGeom prst="rect">
-            <a:avLst/>
-          </a:prstGeom>
-          <a:solidFill>
-            <a:srgbClr val="636F80"/>
-          </a:solidFill>
-          <a:ln>
-            <a:noFill/>
-          </a:ln>
-        </p:spPr>
-        <p:style>
-          <a:lnRef idx="1">
-            <a:schemeClr val="accent1"/>
-          </a:lnRef>
-          <a:fillRef idx="3">
-            <a:schemeClr val="accent1"/>
-          </a:fillRef>
-          <a:effectRef idx="0">
-            <a:schemeClr val="accent1"/>
-          </a:effectRef>
-          <a:fontRef idx="minor">
-            <a:schemeClr val="lt1"/>
-          </a:fontRef>
-        </p:style>
-        <p:txBody>
-          <a:bodyPr rtlCol="0" anchor="ctr"/>
-          <a:lstStyle/>
-          <a:p>
-            <a:pPr algn="ctr"/>
-          </a:p>
-        </p:txBody>
-      </p:sp>
-      <p:sp>
-        <p:nvSpPr>
-          <p:cNvPr id="80" name="TextBox 79"/>
-          <p:cNvSpPr txBox="1"/>
-          <p:nvPr/>
-        </p:nvSpPr>
-        <p:spPr>
-          <a:xfrm>
-            <a:off x="8787384" y="7059168"/>
-            <a:ext cx="3593592" cy="393192"/>
-          </a:xfrm>
-          <a:prstGeom prst="rect">
-            <a:avLst/>
-          </a:prstGeom>
-          <a:noFill/>
-        </p:spPr>
-        <p:txBody>
-          <a:bodyPr wrap="square" lIns="18288" rIns="18288" tIns="13716" bIns="0">
-            <a:spAutoFit/>
-          </a:bodyPr>
-          <a:lstStyle/>
-          <a:p>
-            <a:pPr>
-              <a:spcAft>
-                <a:spcPts val="300"/>
-              </a:spcAft>
-              <a:defRPr sz="1900" b="1">
-                <a:solidFill>
-                  <a:srgbClr val="636F80"/>
-                </a:solidFill>
-                <a:latin typeface="Liberation Sans"/>
-              </a:defRPr>
-            </a:pPr>
-            <a:r>
-              <a:t>meta</a:t>
-            </a:r>
-          </a:p>
-        </p:txBody>
-      </p:sp>
-      <p:sp>
-        <p:nvSpPr>
-          <p:cNvPr id="81" name="TextBox 80"/>
-          <p:cNvSpPr txBox="1"/>
-          <p:nvPr/>
-        </p:nvSpPr>
-        <p:spPr>
-          <a:xfrm>
-            <a:off x="12408408" y="7068312"/>
-            <a:ext cx="1554480" cy="393192"/>
-          </a:xfrm>
-          <a:prstGeom prst="rect">
-            <a:avLst/>
-          </a:prstGeom>
-          <a:noFill/>
-        </p:spPr>
-        <p:txBody>
-          <a:bodyPr wrap="square" lIns="18288" rIns="18288" tIns="13716" bIns="0">
-            <a:spAutoFit/>
-          </a:bodyPr>
-          <a:lstStyle/>
-          <a:p>
-            <a:pPr>
-              <a:spcAft>
-                <a:spcPts val="300"/>
-              </a:spcAft>
-              <a:defRPr sz="1800" b="1">
-                <a:solidFill>
-                  <a:srgbClr val="636F80"/>
-                </a:solidFill>
-                <a:latin typeface="Liberation Sans"/>
-              </a:defRPr>
-            </a:pPr>
-            <a:r>
-              <a:t>T</a:t>
-            </a:r>
-          </a:p>
-        </p:txBody>
-      </p:sp>
-      <p:sp>
-        <p:nvSpPr>
-          <p:cNvPr id="82" name="Rounded Rectangle 81"/>
+              <a:t>T + DG</a:t>
+            </a:r>
+          </a:p>
+        </p:txBody>
+      </p:sp>
+      <p:sp>
+        <p:nvSpPr>
+          <p:cNvPr id="93" name="Rounded Rectangle 92"/>
           <p:cNvSpPr/>
           <p:nvPr/>
         </p:nvSpPr>
@@ -6372,7 +6799,7 @@
       </p:sp>
       <p:sp>
         <p:nvSpPr>
-          <p:cNvPr id="83" name="TextBox 82"/>
+          <p:cNvPr id="94" name="TextBox 93"/>
           <p:cNvSpPr txBox="1"/>
           <p:nvPr/>
         </p:nvSpPr>
@@ -6411,7 +6838,7 @@
       </p:sp>
       <p:cxnSp>
         <p:nvCxnSpPr>
-          <p:cNvPr id="84" name="Connector 83"/>
+          <p:cNvPr id="95" name="Connector 94"/>
           <p:cNvCxnSpPr/>
           <p:nvPr/>
         </p:nvCxnSpPr>
@@ -6446,14 +6873,14 @@
       </p:cxnSp>
       <p:cxnSp>
         <p:nvCxnSpPr>
-          <p:cNvPr id="85" name="Connector 84"/>
+          <p:cNvPr id="96" name="Connector 95"/>
           <p:cNvCxnSpPr/>
           <p:nvPr/>
         </p:nvCxnSpPr>
         <p:spPr>
           <a:xfrm>
-            <a:off x="14502384" y="4137660"/>
-            <a:ext cx="0" cy="3963923"/>
+            <a:off x="14502384" y="3360420"/>
+            <a:ext cx="0" cy="4741163"/>
           </a:xfrm>
           <a:prstGeom prst="line">
             <a:avLst/>
@@ -6481,13 +6908,13 @@
       </p:cxnSp>
       <p:cxnSp>
         <p:nvCxnSpPr>
-          <p:cNvPr id="86" name="Connector 85"/>
+          <p:cNvPr id="97" name="Connector 96"/>
           <p:cNvCxnSpPr/>
           <p:nvPr/>
         </p:nvCxnSpPr>
         <p:spPr>
           <a:xfrm flipH="1">
-            <a:off x="14100048" y="4137660"/>
+            <a:off x="14100048" y="3360420"/>
             <a:ext cx="402336" cy="0"/>
           </a:xfrm>
           <a:prstGeom prst="line">
@@ -6517,13 +6944,13 @@
       </p:cxnSp>
       <p:cxnSp>
         <p:nvCxnSpPr>
-          <p:cNvPr id="87" name="Connector 86"/>
+          <p:cNvPr id="98" name="Connector 97"/>
           <p:cNvCxnSpPr/>
           <p:nvPr/>
         </p:nvCxnSpPr>
         <p:spPr>
           <a:xfrm flipH="1">
-            <a:off x="14100048" y="5692140"/>
+            <a:off x="14100048" y="4914900"/>
             <a:ext cx="402336" cy="0"/>
           </a:xfrm>
           <a:prstGeom prst="line">
@@ -6553,13 +6980,13 @@
       </p:cxnSp>
       <p:cxnSp>
         <p:nvCxnSpPr>
-          <p:cNvPr id="88" name="Connector 87"/>
+          <p:cNvPr id="99" name="Connector 98"/>
           <p:cNvCxnSpPr/>
           <p:nvPr/>
         </p:nvCxnSpPr>
         <p:spPr>
           <a:xfrm flipH="1">
-            <a:off x="14100048" y="6469380"/>
+            <a:off x="14100048" y="5692140"/>
             <a:ext cx="402336" cy="0"/>
           </a:xfrm>
           <a:prstGeom prst="line">
@@ -6589,13 +7016,13 @@
       </p:cxnSp>
       <p:cxnSp>
         <p:nvCxnSpPr>
-          <p:cNvPr id="89" name="Connector 88"/>
+          <p:cNvPr id="100" name="Connector 99"/>
           <p:cNvCxnSpPr/>
           <p:nvPr/>
         </p:nvCxnSpPr>
         <p:spPr>
           <a:xfrm flipH="1">
-            <a:off x="14100048" y="7246620"/>
+            <a:off x="14100048" y="6469380"/>
             <a:ext cx="402336" cy="0"/>
           </a:xfrm>
           <a:prstGeom prst="line">
@@ -6623,9 +7050,45 @@
           </a:fontRef>
         </p:style>
       </p:cxnSp>
-      <p:sp>
-        <p:nvSpPr>
-          <p:cNvPr id="90" name="TextBox 89"/>
+      <p:cxnSp>
+        <p:nvCxnSpPr>
+          <p:cNvPr id="101" name="Connector 100"/>
+          <p:cNvCxnSpPr/>
+          <p:nvPr/>
+        </p:nvCxnSpPr>
+        <p:spPr>
+          <a:xfrm flipH="1">
+            <a:off x="14100048" y="7246620"/>
+            <a:ext cx="402336" cy="0"/>
+          </a:xfrm>
+          <a:prstGeom prst="line">
+            <a:avLst/>
+          </a:prstGeom>
+          <a:ln w="20320">
+            <a:solidFill>
+              <a:srgbClr val="636F80"/>
+            </a:solidFill>
+            <a:tailEnd type="triangle" w="sm" len="sm"/>
+          </a:ln>
+        </p:spPr>
+        <p:style>
+          <a:lnRef idx="2">
+            <a:schemeClr val="accent1"/>
+          </a:lnRef>
+          <a:fillRef idx="0">
+            <a:schemeClr val="accent1"/>
+          </a:fillRef>
+          <a:effectRef idx="1">
+            <a:schemeClr val="accent1"/>
+          </a:effectRef>
+          <a:fontRef idx="minor">
+            <a:schemeClr val="tx1"/>
+          </a:fontRef>
+        </p:style>
+      </p:cxnSp>
+      <p:sp>
+        <p:nvSpPr>
+          <p:cNvPr id="102" name="TextBox 101"/>
           <p:cNvSpPr txBox="1"/>
           <p:nvPr/>
         </p:nvSpPr>
@@ -6664,7 +7127,7 @@
       </p:sp>
       <p:cxnSp>
         <p:nvCxnSpPr>
-          <p:cNvPr id="91" name="Connector 90"/>
+          <p:cNvPr id="103" name="Connector 102"/>
           <p:cNvCxnSpPr/>
           <p:nvPr/>
         </p:nvCxnSpPr>
@@ -6700,7 +7163,7 @@
       </p:cxnSp>
       <p:sp>
         <p:nvSpPr>
-          <p:cNvPr id="92" name="Rounded Rectangle 91"/>
+          <p:cNvPr id="104" name="Rounded Rectangle 103"/>
           <p:cNvSpPr/>
           <p:nvPr/>
         </p:nvSpPr>
@@ -6747,7 +7210,7 @@
       </p:sp>
       <p:sp>
         <p:nvSpPr>
-          <p:cNvPr id="93" name="TextBox 92"/>
+          <p:cNvPr id="105" name="TextBox 104"/>
           <p:cNvSpPr txBox="1"/>
           <p:nvPr/>
         </p:nvSpPr>
@@ -6786,7 +7249,7 @@
       </p:sp>
       <p:sp>
         <p:nvSpPr>
-          <p:cNvPr id="94" name="TextBox 93"/>
+          <p:cNvPr id="106" name="TextBox 105"/>
           <p:cNvSpPr txBox="1"/>
           <p:nvPr/>
         </p:nvSpPr>
@@ -6841,7 +7304,7 @@
       </p:sp>
       <p:cxnSp>
         <p:nvCxnSpPr>
-          <p:cNvPr id="95" name="Connector 94"/>
+          <p:cNvPr id="107" name="Connector 106"/>
           <p:cNvCxnSpPr/>
           <p:nvPr/>
         </p:nvCxnSpPr>
@@ -6877,7 +7340,7 @@
       </p:cxnSp>
       <p:sp>
         <p:nvSpPr>
-          <p:cNvPr id="96" name="Rounded Rectangle 95"/>
+          <p:cNvPr id="108" name="Rounded Rectangle 107"/>
           <p:cNvSpPr/>
           <p:nvPr/>
         </p:nvSpPr>
@@ -6922,7 +7385,7 @@
       </p:sp>
       <p:sp>
         <p:nvSpPr>
-          <p:cNvPr id="97" name="TextBox 96"/>
+          <p:cNvPr id="109" name="TextBox 108"/>
           <p:cNvSpPr txBox="1"/>
           <p:nvPr/>
         </p:nvSpPr>
@@ -6977,7 +7440,7 @@
       </p:sp>
       <p:sp>
         <p:nvSpPr>
-          <p:cNvPr id="98" name="TextBox 97"/>
+          <p:cNvPr id="110" name="TextBox 109"/>
           <p:cNvSpPr txBox="1"/>
           <p:nvPr/>
         </p:nvSpPr>
@@ -7016,7 +7479,7 @@
       </p:sp>
       <p:sp>
         <p:nvSpPr>
-          <p:cNvPr id="99" name="Rounded Rectangle 98"/>
+          <p:cNvPr id="111" name="Rounded Rectangle 110"/>
           <p:cNvSpPr/>
           <p:nvPr/>
         </p:nvSpPr>
@@ -7063,7 +7526,7 @@
       </p:sp>
       <p:sp>
         <p:nvSpPr>
-          <p:cNvPr id="100" name="TextBox 99"/>
+          <p:cNvPr id="112" name="TextBox 111"/>
           <p:cNvSpPr txBox="1"/>
           <p:nvPr/>
         </p:nvSpPr>
@@ -7102,7 +7565,7 @@
       </p:sp>
       <p:sp>
         <p:nvSpPr>
-          <p:cNvPr id="101" name="TextBox 100"/>
+          <p:cNvPr id="113" name="TextBox 112"/>
           <p:cNvSpPr txBox="1"/>
           <p:nvPr/>
         </p:nvSpPr>
@@ -7141,7 +7604,7 @@
       </p:sp>
       <p:cxnSp>
         <p:nvCxnSpPr>
-          <p:cNvPr id="102" name="Connector 101"/>
+          <p:cNvPr id="114" name="Connector 113"/>
           <p:cNvCxnSpPr/>
           <p:nvPr/>
         </p:nvCxnSpPr>
@@ -7177,7 +7640,7 @@
       </p:cxnSp>
       <p:sp>
         <p:nvSpPr>
-          <p:cNvPr id="103" name="TextBox 102"/>
+          <p:cNvPr id="115" name="TextBox 114"/>
           <p:cNvSpPr txBox="1"/>
           <p:nvPr/>
         </p:nvSpPr>
@@ -7216,7 +7679,7 @@
       </p:sp>
       <p:sp>
         <p:nvSpPr>
-          <p:cNvPr id="104" name="Rounded Rectangle 103"/>
+          <p:cNvPr id="116" name="Rounded Rectangle 115"/>
           <p:cNvSpPr/>
           <p:nvPr/>
         </p:nvSpPr>
@@ -7263,7 +7726,7 @@
       </p:sp>
       <p:sp>
         <p:nvSpPr>
-          <p:cNvPr id="105" name="TextBox 104"/>
+          <p:cNvPr id="117" name="TextBox 116"/>
           <p:cNvSpPr txBox="1"/>
           <p:nvPr/>
         </p:nvSpPr>
@@ -7302,7 +7765,7 @@
       </p:sp>
       <p:sp>
         <p:nvSpPr>
-          <p:cNvPr id="106" name="Rounded Rectangle 105"/>
+          <p:cNvPr id="118" name="Rounded Rectangle 117"/>
           <p:cNvSpPr/>
           <p:nvPr/>
         </p:nvSpPr>
@@ -7349,7 +7812,7 @@
       </p:sp>
       <p:sp>
         <p:nvSpPr>
-          <p:cNvPr id="107" name="Rounded Rectangle 106"/>
+          <p:cNvPr id="119" name="Rounded Rectangle 118"/>
           <p:cNvSpPr/>
           <p:nvPr/>
         </p:nvSpPr>
@@ -7396,7 +7859,7 @@
       </p:sp>
       <p:sp>
         <p:nvSpPr>
-          <p:cNvPr id="108" name="Rounded Rectangle 107"/>
+          <p:cNvPr id="120" name="Rounded Rectangle 119"/>
           <p:cNvSpPr/>
           <p:nvPr/>
         </p:nvSpPr>
@@ -7443,7 +7906,7 @@
       </p:sp>
       <p:sp>
         <p:nvSpPr>
-          <p:cNvPr id="109" name="TextBox 108"/>
+          <p:cNvPr id="121" name="TextBox 120"/>
           <p:cNvSpPr txBox="1"/>
           <p:nvPr/>
         </p:nvSpPr>
@@ -7482,7 +7945,7 @@
       </p:sp>
       <p:sp>
         <p:nvSpPr>
-          <p:cNvPr id="110" name="TextBox 109"/>
+          <p:cNvPr id="122" name="TextBox 121"/>
           <p:cNvSpPr txBox="1"/>
           <p:nvPr/>
         </p:nvSpPr>
@@ -7553,7 +8016,7 @@
       </p:sp>
       <p:sp>
         <p:nvSpPr>
-          <p:cNvPr id="111" name="TextBox 110"/>
+          <p:cNvPr id="123" name="TextBox 122"/>
           <p:cNvSpPr txBox="1"/>
           <p:nvPr/>
         </p:nvSpPr>
@@ -7592,7 +8055,7 @@
       </p:sp>
       <p:sp>
         <p:nvSpPr>
-          <p:cNvPr id="112" name="TextBox 111"/>
+          <p:cNvPr id="124" name="TextBox 123"/>
           <p:cNvSpPr txBox="1"/>
           <p:nvPr/>
         </p:nvSpPr>
@@ -7663,7 +8126,7 @@
       </p:sp>
       <p:sp>
         <p:nvSpPr>
-          <p:cNvPr id="113" name="TextBox 112"/>
+          <p:cNvPr id="125" name="TextBox 124"/>
           <p:cNvSpPr txBox="1"/>
           <p:nvPr/>
         </p:nvSpPr>
@@ -7702,7 +8165,7 @@
       </p:sp>
       <p:sp>
         <p:nvSpPr>
-          <p:cNvPr id="114" name="TextBox 113"/>
+          <p:cNvPr id="126" name="TextBox 125"/>
           <p:cNvSpPr txBox="1"/>
           <p:nvPr/>
         </p:nvSpPr>
@@ -7734,7 +8197,7 @@
               </a:defRPr>
             </a:pPr>
             <a:r>
-              <a:t>Two-sided Bonferroni CIs: vs Meta (5) · representation (2) · title (2)</a:t>
+              <a:t>Two-sided Bonferroni CIs: vs Meta (5) · representation (2) · title (1)</a:t>
             </a:r>
           </a:p>
           <a:p>
@@ -7773,7 +8236,7 @@
       </p:sp>
       <p:sp>
         <p:nvSpPr>
-          <p:cNvPr id="115" name="TextBox 114"/>
+          <p:cNvPr id="127" name="TextBox 126"/>
           <p:cNvSpPr txBox="1"/>
           <p:nvPr/>
         </p:nvSpPr>
@@ -7812,7 +8275,7 @@
       </p:sp>
       <p:sp>
         <p:nvSpPr>
-          <p:cNvPr id="116" name="TextBox 115"/>
+          <p:cNvPr id="128" name="TextBox 127"/>
           <p:cNvSpPr txBox="1"/>
           <p:nvPr/>
         </p:nvSpPr>

--- a/docs/design/Diagram.pptx
+++ b/docs/design/Diagram.pptx
@@ -3135,8 +3135,8 @@
         </p:nvSpPr>
         <p:spPr>
           <a:xfrm>
-            <a:off x="18562320" y="347472"/>
-            <a:ext cx="2834640" cy="530352"/>
+            <a:off x="17922240" y="347472"/>
+            <a:ext cx="3474720" cy="530352"/>
           </a:xfrm>
           <a:prstGeom prst="roundRect">
             <a:avLst>
@@ -3182,8 +3182,8 @@
         </p:nvSpPr>
         <p:spPr>
           <a:xfrm>
-            <a:off x="18726912" y="429768"/>
-            <a:ext cx="2560320" cy="365760"/>
+            <a:off x="18086832" y="429768"/>
+            <a:ext cx="3200400" cy="365760"/>
           </a:xfrm>
           <a:prstGeom prst="rect">
             <a:avLst/>
@@ -3208,7 +3208,7 @@
               </a:defRPr>
             </a:pPr>
             <a:r>
-              <a:t>v4 · FULL ROLLING</a:t>
+              <a:t>TEXT + DIRECT GRAPH</a:t>
             </a:r>
           </a:p>
         </p:txBody>
@@ -3493,7 +3493,7 @@
               </a:defRPr>
             </a:pPr>
             <a:r>
-              <a:t>02   BGE INPUTS · 6 ARMS</a:t>
+              <a:t>02   TEXT INPUTS · 6 ARMS</a:t>
             </a:r>
           </a:p>
         </p:txBody>
@@ -3532,7 +3532,7 @@
               </a:defRPr>
             </a:pPr>
             <a:r>
-              <a:t>03   ENCODE + RECOMMEND</a:t>
+              <a:t>03   TEXT ENCODING + SASRec</a:t>
             </a:r>
           </a:p>
         </p:txBody>
@@ -3751,7 +3751,7 @@
               <a:spcAft>
                 <a:spcPts val="300"/>
               </a:spcAft>
-              <a:defRPr sz="1800" b="1">
+              <a:defRPr sz="1600" b="1">
                 <a:solidFill>
                   <a:srgbClr val="142D50"/>
                 </a:solidFill>
@@ -3759,7 +3759,7 @@
               </a:defRPr>
             </a:pPr>
             <a:r>
-              <a:t>Shared keyframes · fixed 30s windows · ≤6 frames</a:t>
+              <a:t>Shared keyframes · 30s windows · ≤6 frames · config resolution</a:t>
             </a:r>
           </a:p>
         </p:txBody>
@@ -3791,7 +3791,7 @@
           <a:fillRef idx="0">
             <a:schemeClr val="accent1"/>
           </a:fillRef>
-          <a:effectRef idx="1">
+          <a:effectRef idx="0">
             <a:schemeClr val="accent1"/>
           </a:effectRef>
           <a:fontRef idx="minor">
@@ -3952,7 +3952,7 @@
           <a:fillRef idx="0">
             <a:schemeClr val="accent1"/>
           </a:fillRef>
-          <a:effectRef idx="1">
+          <a:effectRef idx="0">
             <a:schemeClr val="accent1"/>
           </a:effectRef>
           <a:fontRef idx="minor">
@@ -4112,7 +4112,7 @@
           <a:fillRef idx="0">
             <a:schemeClr val="accent1"/>
           </a:fillRef>
-          <a:effectRef idx="1">
+          <a:effectRef idx="0">
             <a:schemeClr val="accent1"/>
           </a:effectRef>
           <a:fontRef idx="minor">
@@ -4148,7 +4148,7 @@
           <a:fillRef idx="0">
             <a:schemeClr val="accent1"/>
           </a:fillRef>
-          <a:effectRef idx="1">
+          <a:effectRef idx="0">
             <a:schemeClr val="accent1"/>
           </a:effectRef>
           <a:fontRef idx="minor">
@@ -4183,7 +4183,7 @@
           <a:fillRef idx="0">
             <a:schemeClr val="accent1"/>
           </a:fillRef>
-          <a:effectRef idx="1">
+          <a:effectRef idx="0">
             <a:schemeClr val="accent1"/>
           </a:effectRef>
           <a:fontRef idx="minor">
@@ -4218,7 +4218,7 @@
           <a:fillRef idx="0">
             <a:schemeClr val="accent1"/>
           </a:fillRef>
-          <a:effectRef idx="1">
+          <a:effectRef idx="0">
             <a:schemeClr val="accent1"/>
           </a:effectRef>
           <a:fontRef idx="minor">
@@ -4254,7 +4254,7 @@
           <a:fillRef idx="0">
             <a:schemeClr val="accent1"/>
           </a:fillRef>
-          <a:effectRef idx="1">
+          <a:effectRef idx="0">
             <a:schemeClr val="accent1"/>
           </a:effectRef>
           <a:fontRef idx="minor">
@@ -4290,7 +4290,7 @@
           <a:fillRef idx="0">
             <a:schemeClr val="accent1"/>
           </a:fillRef>
-          <a:effectRef idx="1">
+          <a:effectRef idx="0">
             <a:schemeClr val="accent1"/>
           </a:effectRef>
           <a:fontRef idx="minor">
@@ -4451,7 +4451,7 @@
           <a:fillRef idx="0">
             <a:schemeClr val="accent1"/>
           </a:fillRef>
-          <a:effectRef idx="1">
+          <a:effectRef idx="0">
             <a:schemeClr val="accent1"/>
           </a:effectRef>
           <a:fontRef idx="minor">
@@ -4611,7 +4611,7 @@
           <a:fillRef idx="0">
             <a:schemeClr val="accent1"/>
           </a:fillRef>
-          <a:effectRef idx="1">
+          <a:effectRef idx="0">
             <a:schemeClr val="accent1"/>
           </a:effectRef>
           <a:fontRef idx="minor">
@@ -4647,7 +4647,7 @@
           <a:fillRef idx="0">
             <a:schemeClr val="accent1"/>
           </a:fillRef>
-          <a:effectRef idx="1">
+          <a:effectRef idx="0">
             <a:schemeClr val="accent1"/>
           </a:effectRef>
           <a:fontRef idx="minor">
@@ -4682,7 +4682,7 @@
           <a:fillRef idx="0">
             <a:schemeClr val="accent1"/>
           </a:fillRef>
-          <a:effectRef idx="1">
+          <a:effectRef idx="0">
             <a:schemeClr val="accent1"/>
           </a:effectRef>
           <a:fontRef idx="minor">
@@ -4717,7 +4717,7 @@
           <a:fillRef idx="0">
             <a:schemeClr val="accent1"/>
           </a:fillRef>
-          <a:effectRef idx="1">
+          <a:effectRef idx="0">
             <a:schemeClr val="accent1"/>
           </a:effectRef>
           <a:fontRef idx="minor">
@@ -4753,7 +4753,7 @@
           <a:fillRef idx="0">
             <a:schemeClr val="accent1"/>
           </a:fillRef>
-          <a:effectRef idx="1">
+          <a:effectRef idx="0">
             <a:schemeClr val="accent1"/>
           </a:effectRef>
           <a:fontRef idx="minor">
@@ -4914,7 +4914,7 @@
           <a:fillRef idx="0">
             <a:schemeClr val="accent1"/>
           </a:fillRef>
-          <a:effectRef idx="1">
+          <a:effectRef idx="0">
             <a:schemeClr val="accent1"/>
           </a:effectRef>
           <a:fontRef idx="minor">
@@ -5074,7 +5074,7 @@
           <a:fillRef idx="0">
             <a:schemeClr val="accent1"/>
           </a:fillRef>
-          <a:effectRef idx="1">
+          <a:effectRef idx="0">
             <a:schemeClr val="accent1"/>
           </a:effectRef>
           <a:fontRef idx="minor">
@@ -5110,7 +5110,7 @@
           <a:fillRef idx="0">
             <a:schemeClr val="accent1"/>
           </a:fillRef>
-          <a:effectRef idx="1">
+          <a:effectRef idx="0">
             <a:schemeClr val="accent1"/>
           </a:effectRef>
           <a:fontRef idx="minor">
@@ -5145,7 +5145,7 @@
           <a:fillRef idx="0">
             <a:schemeClr val="accent1"/>
           </a:fillRef>
-          <a:effectRef idx="1">
+          <a:effectRef idx="0">
             <a:schemeClr val="accent1"/>
           </a:effectRef>
           <a:fontRef idx="minor">
@@ -5180,7 +5180,7 @@
           <a:fillRef idx="0">
             <a:schemeClr val="accent1"/>
           </a:fillRef>
-          <a:effectRef idx="1">
+          <a:effectRef idx="0">
             <a:schemeClr val="accent1"/>
           </a:effectRef>
           <a:fontRef idx="minor">
@@ -5216,7 +5216,7 @@
           <a:fillRef idx="0">
             <a:schemeClr val="accent1"/>
           </a:fillRef>
-          <a:effectRef idx="1">
+          <a:effectRef idx="0">
             <a:schemeClr val="accent1"/>
           </a:effectRef>
           <a:fontRef idx="minor">
@@ -5377,7 +5377,7 @@
           <a:fillRef idx="0">
             <a:schemeClr val="accent1"/>
           </a:fillRef>
-          <a:effectRef idx="1">
+          <a:effectRef idx="0">
             <a:schemeClr val="accent1"/>
           </a:effectRef>
           <a:fontRef idx="minor">
@@ -5537,7 +5537,7 @@
           <a:fillRef idx="0">
             <a:schemeClr val="accent1"/>
           </a:fillRef>
-          <a:effectRef idx="1">
+          <a:effectRef idx="0">
             <a:schemeClr val="accent1"/>
           </a:effectRef>
           <a:fontRef idx="minor">
@@ -5573,7 +5573,7 @@
           <a:fillRef idx="0">
             <a:schemeClr val="accent1"/>
           </a:fillRef>
-          <a:effectRef idx="1">
+          <a:effectRef idx="0">
             <a:schemeClr val="accent1"/>
           </a:effectRef>
           <a:fontRef idx="minor">
@@ -5608,7 +5608,7 @@
           <a:fillRef idx="0">
             <a:schemeClr val="accent1"/>
           </a:fillRef>
-          <a:effectRef idx="1">
+          <a:effectRef idx="0">
             <a:schemeClr val="accent1"/>
           </a:effectRef>
           <a:fontRef idx="minor">
@@ -5643,7 +5643,7 @@
           <a:fillRef idx="0">
             <a:schemeClr val="accent1"/>
           </a:fillRef>
-          <a:effectRef idx="1">
+          <a:effectRef idx="0">
             <a:schemeClr val="accent1"/>
           </a:effectRef>
           <a:fontRef idx="minor">
@@ -5679,7 +5679,7 @@
           <a:fillRef idx="0">
             <a:schemeClr val="accent1"/>
           </a:fillRef>
-          <a:effectRef idx="1">
+          <a:effectRef idx="0">
             <a:schemeClr val="accent1"/>
           </a:effectRef>
           <a:fontRef idx="minor">
@@ -5721,7 +5721,7 @@
               </a:defRPr>
             </a:pPr>
             <a:r>
-              <a:t>Summary model: Qwen in README example; selectable via CLI.</a:t>
+              <a:t>Summary model is selected separately; README uses Gemini.</a:t>
             </a:r>
           </a:p>
           <a:p>
@@ -5737,7 +5737,7 @@
               </a:defRPr>
             </a:pPr>
             <a:r>
-              <a:t>GQ Summary is shared by graph_qwen and graph_qwen_meta.</a:t>
+              <a:t>Frames: resized_keyframes/&lt;width&gt;_&lt;height&gt;/</a:t>
             </a:r>
           </a:p>
         </p:txBody>
@@ -6863,7 +6863,7 @@
           <a:fillRef idx="0">
             <a:schemeClr val="accent1"/>
           </a:fillRef>
-          <a:effectRef idx="1">
+          <a:effectRef idx="0">
             <a:schemeClr val="accent1"/>
           </a:effectRef>
           <a:fontRef idx="minor">
@@ -6898,7 +6898,7 @@
           <a:fillRef idx="0">
             <a:schemeClr val="accent1"/>
           </a:fillRef>
-          <a:effectRef idx="1">
+          <a:effectRef idx="0">
             <a:schemeClr val="accent1"/>
           </a:effectRef>
           <a:fontRef idx="minor">
@@ -6934,7 +6934,7 @@
           <a:fillRef idx="0">
             <a:schemeClr val="accent1"/>
           </a:fillRef>
-          <a:effectRef idx="1">
+          <a:effectRef idx="0">
             <a:schemeClr val="accent1"/>
           </a:effectRef>
           <a:fontRef idx="minor">
@@ -6970,7 +6970,7 @@
           <a:fillRef idx="0">
             <a:schemeClr val="accent1"/>
           </a:fillRef>
-          <a:effectRef idx="1">
+          <a:effectRef idx="0">
             <a:schemeClr val="accent1"/>
           </a:effectRef>
           <a:fontRef idx="minor">
@@ -7006,7 +7006,7 @@
           <a:fillRef idx="0">
             <a:schemeClr val="accent1"/>
           </a:fillRef>
-          <a:effectRef idx="1">
+          <a:effectRef idx="0">
             <a:schemeClr val="accent1"/>
           </a:effectRef>
           <a:fontRef idx="minor">
@@ -7042,7 +7042,7 @@
           <a:fillRef idx="0">
             <a:schemeClr val="accent1"/>
           </a:fillRef>
-          <a:effectRef idx="1">
+          <a:effectRef idx="0">
             <a:schemeClr val="accent1"/>
           </a:effectRef>
           <a:fontRef idx="minor">
@@ -7078,7 +7078,7 @@
           <a:fillRef idx="0">
             <a:schemeClr val="accent1"/>
           </a:fillRef>
-          <a:effectRef idx="1">
+          <a:effectRef idx="0">
             <a:schemeClr val="accent1"/>
           </a:effectRef>
           <a:fontRef idx="minor">
@@ -7153,7 +7153,7 @@
           <a:fillRef idx="0">
             <a:schemeClr val="accent1"/>
           </a:fillRef>
-          <a:effectRef idx="1">
+          <a:effectRef idx="0">
             <a:schemeClr val="accent1"/>
           </a:effectRef>
           <a:fontRef idx="minor">
@@ -7273,7 +7273,7 @@
               <a:spcAft>
                 <a:spcPts val="300"/>
               </a:spcAft>
-              <a:defRPr sz="1600" b="0">
+              <a:defRPr sz="1800" b="0">
                 <a:solidFill>
                   <a:srgbClr val="516985"/>
                 </a:solidFill>
@@ -7281,9 +7281,309 @@
               </a:defRPr>
             </a:pPr>
             <a:r>
-              <a:t>≤512 tokens per input → 1024-D</a:t>
-            </a:r>
-          </a:p>
+              <a:t>Title + Summary → 1024-D</a:t>
+            </a:r>
+          </a:p>
+          <a:p>
+            <a:pPr>
+              <a:spcAft>
+                <a:spcPts val="300"/>
+              </a:spcAft>
+              <a:defRPr sz="1800" b="0">
+                <a:solidFill>
+                  <a:srgbClr val="516985"/>
+                </a:solidFill>
+                <a:latin typeface="Liberation Sans"/>
+              </a:defRPr>
+            </a:pPr>
+            <a:r>
+              <a:t>Text concatenation before encoding</a:t>
+            </a:r>
+          </a:p>
+        </p:txBody>
+      </p:sp>
+      <p:cxnSp>
+        <p:nvCxnSpPr>
+          <p:cNvPr id="107" name="Connector 106"/>
+          <p:cNvCxnSpPr/>
+          <p:nvPr/>
+        </p:nvCxnSpPr>
+        <p:spPr>
+          <a:xfrm>
+            <a:off x="18470880" y="4700016"/>
+            <a:ext cx="0" cy="356616"/>
+          </a:xfrm>
+          <a:prstGeom prst="line">
+            <a:avLst/>
+          </a:prstGeom>
+          <a:ln w="25400">
+            <a:solidFill>
+              <a:srgbClr val="142D50"/>
+            </a:solidFill>
+            <a:tailEnd type="triangle" w="sm" len="sm"/>
+          </a:ln>
+        </p:spPr>
+        <p:style>
+          <a:lnRef idx="2">
+            <a:schemeClr val="accent1"/>
+          </a:lnRef>
+          <a:fillRef idx="0">
+            <a:schemeClr val="accent1"/>
+          </a:fillRef>
+          <a:effectRef idx="0">
+            <a:schemeClr val="accent1"/>
+          </a:effectRef>
+          <a:fontRef idx="minor">
+            <a:schemeClr val="tx1"/>
+          </a:fontRef>
+        </p:style>
+      </p:cxnSp>
+      <p:sp>
+        <p:nvSpPr>
+          <p:cNvPr id="108" name="Rounded Rectangle 107"/>
+          <p:cNvSpPr/>
+          <p:nvPr/>
+        </p:nvSpPr>
+        <p:spPr>
+          <a:xfrm>
+            <a:off x="15828263" y="5074920"/>
+            <a:ext cx="5276088" cy="1353312"/>
+          </a:xfrm>
+          <a:prstGeom prst="roundRect">
+            <a:avLst>
+              <a:gd name="adj" fmla="val 10000"/>
+            </a:avLst>
+          </a:prstGeom>
+          <a:solidFill>
+            <a:srgbClr val="142D50"/>
+          </a:solidFill>
+          <a:ln>
+            <a:noFill/>
+          </a:ln>
+        </p:spPr>
+        <p:style>
+          <a:lnRef idx="1">
+            <a:schemeClr val="accent1"/>
+          </a:lnRef>
+          <a:fillRef idx="3">
+            <a:schemeClr val="accent1"/>
+          </a:fillRef>
+          <a:effectRef idx="0">
+            <a:schemeClr val="accent1"/>
+          </a:effectRef>
+          <a:fontRef idx="minor">
+            <a:schemeClr val="lt1"/>
+          </a:fontRef>
+        </p:style>
+        <p:txBody>
+          <a:bodyPr rtlCol="0" anchor="ctr"/>
+          <a:lstStyle/>
+          <a:p>
+            <a:pPr algn="ctr"/>
+          </a:p>
+        </p:txBody>
+      </p:sp>
+      <p:sp>
+        <p:nvSpPr>
+          <p:cNvPr id="109" name="TextBox 108"/>
+          <p:cNvSpPr txBox="1"/>
+          <p:nvPr/>
+        </p:nvSpPr>
+        <p:spPr>
+          <a:xfrm>
+            <a:off x="16056863" y="5239512"/>
+            <a:ext cx="4818888" cy="676656"/>
+          </a:xfrm>
+          <a:prstGeom prst="rect">
+            <a:avLst/>
+          </a:prstGeom>
+          <a:noFill/>
+        </p:spPr>
+        <p:txBody>
+          <a:bodyPr wrap="square" lIns="18288" rIns="18288" tIns="13716" bIns="0">
+            <a:spAutoFit/>
+          </a:bodyPr>
+          <a:lstStyle/>
+          <a:p>
+            <a:pPr>
+              <a:spcAft>
+                <a:spcPts val="300"/>
+              </a:spcAft>
+              <a:defRPr sz="2200" b="1">
+                <a:solidFill>
+                  <a:srgbClr val="FFFFFF"/>
+                </a:solidFill>
+                <a:latin typeface="Liberation Sans"/>
+              </a:defRPr>
+            </a:pPr>
+            <a:r>
+              <a:t>Projection + Residual MLPs</a:t>
+            </a:r>
+          </a:p>
+          <a:p>
+            <a:pPr>
+              <a:spcAft>
+                <a:spcPts val="300"/>
+              </a:spcAft>
+              <a:defRPr sz="2200" b="1">
+                <a:solidFill>
+                  <a:srgbClr val="FFFFFF"/>
+                </a:solidFill>
+                <a:latin typeface="Liberation Sans"/>
+              </a:defRPr>
+            </a:pPr>
+            <a:r>
+              <a:t>+ SASRec</a:t>
+            </a:r>
+          </a:p>
+        </p:txBody>
+      </p:sp>
+      <p:sp>
+        <p:nvSpPr>
+          <p:cNvPr id="110" name="TextBox 109"/>
+          <p:cNvSpPr txBox="1"/>
+          <p:nvPr/>
+        </p:nvSpPr>
+        <p:spPr>
+          <a:xfrm>
+            <a:off x="16056863" y="6007608"/>
+            <a:ext cx="4818888" cy="320040"/>
+          </a:xfrm>
+          <a:prstGeom prst="rect">
+            <a:avLst/>
+          </a:prstGeom>
+          <a:noFill/>
+        </p:spPr>
+        <p:txBody>
+          <a:bodyPr wrap="square" lIns="18288" rIns="18288" tIns="13716" bIns="0">
+            <a:spAutoFit/>
+          </a:bodyPr>
+          <a:lstStyle/>
+          <a:p>
+            <a:pPr>
+              <a:spcAft>
+                <a:spcPts val="300"/>
+              </a:spcAft>
+              <a:defRPr sz="1600" b="0">
+                <a:solidFill>
+                  <a:srgbClr val="FFFFFF"/>
+                </a:solidFill>
+                <a:latin typeface="Liberation Sans"/>
+              </a:defRPr>
+            </a:pPr>
+            <a:r>
+              <a:t>1024 → 512-D · trainable per arm</a:t>
+            </a:r>
+          </a:p>
+        </p:txBody>
+      </p:sp>
+      <p:sp>
+        <p:nvSpPr>
+          <p:cNvPr id="111" name="Rounded Rectangle 110"/>
+          <p:cNvSpPr/>
+          <p:nvPr/>
+        </p:nvSpPr>
+        <p:spPr>
+          <a:xfrm>
+            <a:off x="15828263" y="6995160"/>
+            <a:ext cx="5276088" cy="813816"/>
+          </a:xfrm>
+          <a:prstGeom prst="roundRect">
+            <a:avLst>
+              <a:gd name="adj" fmla="val 10000"/>
+            </a:avLst>
+          </a:prstGeom>
+          <a:solidFill>
+            <a:srgbClr val="ECF2FC"/>
+          </a:solidFill>
+          <a:ln w="12700">
+            <a:solidFill>
+              <a:srgbClr val="91ACCD"/>
+            </a:solidFill>
+          </a:ln>
+        </p:spPr>
+        <p:style>
+          <a:lnRef idx="1">
+            <a:schemeClr val="accent1"/>
+          </a:lnRef>
+          <a:fillRef idx="3">
+            <a:schemeClr val="accent1"/>
+          </a:fillRef>
+          <a:effectRef idx="0">
+            <a:schemeClr val="accent1"/>
+          </a:effectRef>
+          <a:fontRef idx="minor">
+            <a:schemeClr val="lt1"/>
+          </a:fontRef>
+        </p:style>
+        <p:txBody>
+          <a:bodyPr rtlCol="0" anchor="ctr"/>
+          <a:lstStyle/>
+          <a:p>
+            <a:pPr algn="ctr"/>
+          </a:p>
+        </p:txBody>
+      </p:sp>
+      <p:sp>
+        <p:nvSpPr>
+          <p:cNvPr id="112" name="TextBox 111"/>
+          <p:cNvSpPr txBox="1"/>
+          <p:nvPr/>
+        </p:nvSpPr>
+        <p:spPr>
+          <a:xfrm>
+            <a:off x="16056863" y="7095744"/>
+            <a:ext cx="4818888" cy="329184"/>
+          </a:xfrm>
+          <a:prstGeom prst="rect">
+            <a:avLst/>
+          </a:prstGeom>
+          <a:noFill/>
+        </p:spPr>
+        <p:txBody>
+          <a:bodyPr wrap="square" lIns="18288" rIns="18288" tIns="13716" bIns="0">
+            <a:spAutoFit/>
+          </a:bodyPr>
+          <a:lstStyle/>
+          <a:p>
+            <a:pPr>
+              <a:spcAft>
+                <a:spcPts val="300"/>
+              </a:spcAft>
+              <a:defRPr sz="2000" b="1">
+                <a:solidFill>
+                  <a:srgbClr val="142D50"/>
+                </a:solidFill>
+                <a:latin typeface="Liberation Sans"/>
+              </a:defRPr>
+            </a:pPr>
+            <a:r>
+              <a:t>Common user histories</a:t>
+            </a:r>
+          </a:p>
+        </p:txBody>
+      </p:sp>
+      <p:sp>
+        <p:nvSpPr>
+          <p:cNvPr id="113" name="TextBox 112"/>
+          <p:cNvSpPr txBox="1"/>
+          <p:nvPr/>
+        </p:nvSpPr>
+        <p:spPr>
+          <a:xfrm>
+            <a:off x="16056863" y="7461504"/>
+            <a:ext cx="4818888" cy="274320"/>
+          </a:xfrm>
+          <a:prstGeom prst="rect">
+            <a:avLst/>
+          </a:prstGeom>
+          <a:noFill/>
+        </p:spPr>
+        <p:txBody>
+          <a:bodyPr wrap="square" lIns="18288" rIns="18288" tIns="13716" bIns="0">
+            <a:spAutoFit/>
+          </a:bodyPr>
+          <a:lstStyle/>
           <a:p>
             <a:pPr>
               <a:spcAft>
@@ -7297,21 +7597,21 @@
               </a:defRPr>
             </a:pPr>
             <a:r>
-              <a:t>Truncate after title + Summary composition</a:t>
+              <a:t>Strictly earlier events · last 10 items</a:t>
             </a:r>
           </a:p>
         </p:txBody>
       </p:sp>
       <p:cxnSp>
         <p:nvCxnSpPr>
-          <p:cNvPr id="107" name="Connector 106"/>
+          <p:cNvPr id="114" name="Connector 113"/>
           <p:cNvCxnSpPr/>
           <p:nvPr/>
         </p:nvCxnSpPr>
         <p:spPr>
-          <a:xfrm>
-            <a:off x="18470880" y="4700016"/>
-            <a:ext cx="0" cy="356616"/>
+          <a:xfrm flipV="1">
+            <a:off x="18470880" y="6428232"/>
+            <a:ext cx="0" cy="566928"/>
           </a:xfrm>
           <a:prstGeom prst="line">
             <a:avLst/>
@@ -7330,7 +7630,7 @@
           <a:fillRef idx="0">
             <a:schemeClr val="accent1"/>
           </a:fillRef>
-          <a:effectRef idx="1">
+          <a:effectRef idx="0">
             <a:schemeClr val="accent1"/>
           </a:effectRef>
           <a:fontRef idx="minor">
@@ -7340,18 +7640,534 @@
       </p:cxnSp>
       <p:sp>
         <p:nvSpPr>
-          <p:cNvPr id="108" name="Rounded Rectangle 107"/>
+          <p:cNvPr id="115" name="TextBox 114"/>
+          <p:cNvSpPr txBox="1"/>
+          <p:nvPr/>
+        </p:nvSpPr>
+        <p:spPr>
+          <a:xfrm>
+            <a:off x="15937992" y="8037575"/>
+            <a:ext cx="5129784" cy="320040"/>
+          </a:xfrm>
+          <a:prstGeom prst="rect">
+            <a:avLst/>
+          </a:prstGeom>
+          <a:noFill/>
+        </p:spPr>
+        <p:txBody>
+          <a:bodyPr wrap="square" lIns="18288" rIns="18288" tIns="13716" bIns="0">
+            <a:spAutoFit/>
+          </a:bodyPr>
+          <a:lstStyle/>
+          <a:p>
+            <a:pPr>
+              <a:spcAft>
+                <a:spcPts val="300"/>
+              </a:spcAft>
+              <a:defRPr sz="1500" b="0">
+                <a:solidFill>
+                  <a:srgbClr val="516985"/>
+                </a:solidFill>
+                <a:latin typeface="Liberation Sans"/>
+              </a:defRPr>
+            </a:pPr>
+            <a:r>
+              <a:t>Same architecture · independent weights per arm</a:t>
+            </a:r>
+          </a:p>
+        </p:txBody>
+      </p:sp>
+      <p:sp>
+        <p:nvSpPr>
+          <p:cNvPr id="116" name="Rounded Rectangle 115"/>
           <p:cNvSpPr/>
           <p:nvPr/>
         </p:nvSpPr>
         <p:spPr>
           <a:xfrm>
-            <a:off x="15828263" y="5074920"/>
-            <a:ext cx="5276088" cy="1353312"/>
+            <a:off x="502920" y="8924544"/>
+            <a:ext cx="20894040" cy="1938528"/>
           </a:xfrm>
           <a:prstGeom prst="roundRect">
             <a:avLst>
-              <a:gd name="adj" fmla="val 10000"/>
+              <a:gd name="adj" fmla="val 6000"/>
+            </a:avLst>
+          </a:prstGeom>
+          <a:solidFill>
+            <a:srgbClr val="F7F5FF"/>
+          </a:solidFill>
+          <a:ln w="12700">
+            <a:solidFill>
+              <a:srgbClr val="B9A7EA"/>
+            </a:solidFill>
+          </a:ln>
+        </p:spPr>
+        <p:style>
+          <a:lnRef idx="1">
+            <a:schemeClr val="accent1"/>
+          </a:lnRef>
+          <a:fillRef idx="3">
+            <a:schemeClr val="accent1"/>
+          </a:fillRef>
+          <a:effectRef idx="0">
+            <a:schemeClr val="accent1"/>
+          </a:effectRef>
+          <a:fontRef idx="minor">
+            <a:schemeClr val="lt1"/>
+          </a:fontRef>
+        </p:style>
+        <p:txBody>
+          <a:bodyPr rtlCol="0" anchor="ctr"/>
+          <a:lstStyle/>
+          <a:p>
+            <a:pPr algn="ctr"/>
+          </a:p>
+        </p:txBody>
+      </p:sp>
+      <p:sp>
+        <p:nvSpPr>
+          <p:cNvPr id="117" name="TextBox 116"/>
+          <p:cNvSpPr txBox="1"/>
+          <p:nvPr/>
+        </p:nvSpPr>
+        <p:spPr>
+          <a:xfrm>
+            <a:off x="768096" y="9262872"/>
+            <a:ext cx="2926080" cy="713232"/>
+          </a:xfrm>
+          <a:prstGeom prst="rect">
+            <a:avLst/>
+          </a:prstGeom>
+          <a:noFill/>
+        </p:spPr>
+        <p:txBody>
+          <a:bodyPr wrap="square" lIns="0" rIns="0" tIns="0" bIns="0">
+            <a:spAutoFit/>
+          </a:bodyPr>
+          <a:lstStyle/>
+          <a:p>
+            <a:pPr>
+              <a:spcAft>
+                <a:spcPts val="300"/>
+              </a:spcAft>
+              <a:defRPr sz="2100" b="1">
+                <a:solidFill>
+                  <a:srgbClr val="5742A1"/>
+                </a:solidFill>
+                <a:latin typeface="Liberation Sans"/>
+              </a:defRPr>
+            </a:pPr>
+            <a:r>
+              <a:t>DIRECT GRAPH</a:t>
+            </a:r>
+          </a:p>
+          <a:p>
+            <a:pPr>
+              <a:spcAft>
+                <a:spcPts val="300"/>
+              </a:spcAft>
+              <a:defRPr sz="2100" b="1">
+                <a:solidFill>
+                  <a:srgbClr val="5742A1"/>
+                </a:solidFill>
+                <a:latin typeface="Liberation Sans"/>
+              </a:defRPr>
+            </a:pPr>
+            <a:r>
+              <a:t>4 ARMS</a:t>
+            </a:r>
+          </a:p>
+        </p:txBody>
+      </p:sp>
+      <p:sp>
+        <p:nvSpPr>
+          <p:cNvPr id="118" name="Rounded Rectangle 117"/>
+          <p:cNvSpPr/>
+          <p:nvPr/>
+        </p:nvSpPr>
+        <p:spPr>
+          <a:xfrm>
+            <a:off x="3675887" y="9262872"/>
+            <a:ext cx="3246120" cy="1005840"/>
+          </a:xfrm>
+          <a:prstGeom prst="roundRect">
+            <a:avLst>
+              <a:gd name="adj" fmla="val 6000"/>
+            </a:avLst>
+          </a:prstGeom>
+          <a:solidFill>
+            <a:srgbClr val="FFFFFF"/>
+          </a:solidFill>
+          <a:ln w="12700">
+            <a:solidFill>
+              <a:srgbClr val="C9BDEE"/>
+            </a:solidFill>
+          </a:ln>
+        </p:spPr>
+        <p:style>
+          <a:lnRef idx="1">
+            <a:schemeClr val="accent1"/>
+          </a:lnRef>
+          <a:fillRef idx="3">
+            <a:schemeClr val="accent1"/>
+          </a:fillRef>
+          <a:effectRef idx="0">
+            <a:schemeClr val="accent1"/>
+          </a:effectRef>
+          <a:fontRef idx="minor">
+            <a:schemeClr val="lt1"/>
+          </a:fontRef>
+        </p:style>
+        <p:txBody>
+          <a:bodyPr rtlCol="0" anchor="ctr"/>
+          <a:lstStyle/>
+          <a:p>
+            <a:pPr algn="ctr"/>
+          </a:p>
+        </p:txBody>
+      </p:sp>
+      <p:sp>
+        <p:nvSpPr>
+          <p:cNvPr id="119" name="TextBox 118"/>
+          <p:cNvSpPr txBox="1"/>
+          <p:nvPr/>
+        </p:nvSpPr>
+        <p:spPr>
+          <a:xfrm>
+            <a:off x="3858768" y="9418320"/>
+            <a:ext cx="2880360" cy="329184"/>
+          </a:xfrm>
+          <a:prstGeom prst="rect">
+            <a:avLst/>
+          </a:prstGeom>
+          <a:noFill/>
+        </p:spPr>
+        <p:txBody>
+          <a:bodyPr wrap="square" lIns="0" rIns="0" tIns="0" bIns="0">
+            <a:spAutoFit/>
+          </a:bodyPr>
+          <a:lstStyle/>
+          <a:p>
+            <a:pPr>
+              <a:spcAft>
+                <a:spcPts val="300"/>
+              </a:spcAft>
+              <a:defRPr sz="2000" b="1">
+                <a:solidFill>
+                  <a:srgbClr val="5742A1"/>
+                </a:solidFill>
+                <a:latin typeface="Liberation Sans"/>
+              </a:defRPr>
+            </a:pPr>
+            <a:r>
+              <a:t>Scene Graphs</a:t>
+            </a:r>
+          </a:p>
+        </p:txBody>
+      </p:sp>
+      <p:sp>
+        <p:nvSpPr>
+          <p:cNvPr id="120" name="TextBox 119"/>
+          <p:cNvSpPr txBox="1"/>
+          <p:nvPr/>
+        </p:nvSpPr>
+        <p:spPr>
+          <a:xfrm>
+            <a:off x="3858768" y="9875520"/>
+            <a:ext cx="2880360" cy="274320"/>
+          </a:xfrm>
+          <a:prstGeom prst="rect">
+            <a:avLst/>
+          </a:prstGeom>
+          <a:noFill/>
+        </p:spPr>
+        <p:txBody>
+          <a:bodyPr wrap="square" lIns="0" rIns="0" tIns="0" bIns="0">
+            <a:spAutoFit/>
+          </a:bodyPr>
+          <a:lstStyle/>
+          <a:p>
+            <a:pPr>
+              <a:spcAft>
+                <a:spcPts val="300"/>
+              </a:spcAft>
+              <a:defRPr sz="1600" b="0">
+                <a:solidFill>
+                  <a:srgbClr val="516985"/>
+                </a:solidFill>
+                <a:latin typeface="Liberation Sans"/>
+              </a:defRPr>
+            </a:pPr>
+            <a:r>
+              <a:t>Qwen / Gemini · no Summary</a:t>
+            </a:r>
+          </a:p>
+        </p:txBody>
+      </p:sp>
+      <p:sp>
+        <p:nvSpPr>
+          <p:cNvPr id="121" name="Rounded Rectangle 120"/>
+          <p:cNvSpPr/>
+          <p:nvPr/>
+        </p:nvSpPr>
+        <p:spPr>
+          <a:xfrm>
+            <a:off x="7351775" y="9262872"/>
+            <a:ext cx="4572000" cy="1005840"/>
+          </a:xfrm>
+          <a:prstGeom prst="roundRect">
+            <a:avLst>
+              <a:gd name="adj" fmla="val 6000"/>
+            </a:avLst>
+          </a:prstGeom>
+          <a:solidFill>
+            <a:srgbClr val="FFFFFF"/>
+          </a:solidFill>
+          <a:ln w="12700">
+            <a:solidFill>
+              <a:srgbClr val="C9BDEE"/>
+            </a:solidFill>
+          </a:ln>
+        </p:spPr>
+        <p:style>
+          <a:lnRef idx="1">
+            <a:schemeClr val="accent1"/>
+          </a:lnRef>
+          <a:fillRef idx="3">
+            <a:schemeClr val="accent1"/>
+          </a:fillRef>
+          <a:effectRef idx="0">
+            <a:schemeClr val="accent1"/>
+          </a:effectRef>
+          <a:fontRef idx="minor">
+            <a:schemeClr val="lt1"/>
+          </a:fontRef>
+        </p:style>
+        <p:txBody>
+          <a:bodyPr rtlCol="0" anchor="ctr"/>
+          <a:lstStyle/>
+          <a:p>
+            <a:pPr algn="ctr"/>
+          </a:p>
+        </p:txBody>
+      </p:sp>
+      <p:sp>
+        <p:nvSpPr>
+          <p:cNvPr id="122" name="TextBox 121"/>
+          <p:cNvSpPr txBox="1"/>
+          <p:nvPr/>
+        </p:nvSpPr>
+        <p:spPr>
+          <a:xfrm>
+            <a:off x="7534655" y="9418320"/>
+            <a:ext cx="4206240" cy="329184"/>
+          </a:xfrm>
+          <a:prstGeom prst="rect">
+            <a:avLst/>
+          </a:prstGeom>
+          <a:noFill/>
+        </p:spPr>
+        <p:txBody>
+          <a:bodyPr wrap="square" lIns="0" rIns="0" tIns="0" bIns="0">
+            <a:spAutoFit/>
+          </a:bodyPr>
+          <a:lstStyle/>
+          <a:p>
+            <a:pPr>
+              <a:spcAft>
+                <a:spcPts val="300"/>
+              </a:spcAft>
+              <a:defRPr sz="2000" b="1">
+                <a:solidFill>
+                  <a:srgbClr val="5742A1"/>
+                </a:solidFill>
+                <a:latin typeface="Liberation Sans"/>
+              </a:defRPr>
+            </a:pPr>
+            <a:r>
+              <a:t>BGE → Graph encoder</a:t>
+            </a:r>
+          </a:p>
+        </p:txBody>
+      </p:sp>
+      <p:sp>
+        <p:nvSpPr>
+          <p:cNvPr id="123" name="TextBox 122"/>
+          <p:cNvSpPr txBox="1"/>
+          <p:nvPr/>
+        </p:nvSpPr>
+        <p:spPr>
+          <a:xfrm>
+            <a:off x="7534655" y="9875520"/>
+            <a:ext cx="4206240" cy="274320"/>
+          </a:xfrm>
+          <a:prstGeom prst="rect">
+            <a:avLst/>
+          </a:prstGeom>
+          <a:noFill/>
+        </p:spPr>
+        <p:txBody>
+          <a:bodyPr wrap="square" lIns="0" rIns="0" tIns="0" bIns="0">
+            <a:spAutoFit/>
+          </a:bodyPr>
+          <a:lstStyle/>
+          <a:p>
+            <a:pPr>
+              <a:spcAft>
+                <a:spcPts val="300"/>
+              </a:spcAft>
+              <a:defRPr sz="1600" b="0">
+                <a:solidFill>
+                  <a:srgbClr val="516985"/>
+                </a:solidFill>
+                <a:latin typeface="Liberation Sans"/>
+              </a:defRPr>
+            </a:pPr>
+            <a:r>
+              <a:t>Frozen features · trainable encoder</a:t>
+            </a:r>
+          </a:p>
+        </p:txBody>
+      </p:sp>
+      <p:sp>
+        <p:nvSpPr>
+          <p:cNvPr id="124" name="Rounded Rectangle 123"/>
+          <p:cNvSpPr/>
+          <p:nvPr/>
+        </p:nvSpPr>
+        <p:spPr>
+          <a:xfrm>
+            <a:off x="12353544" y="9262872"/>
+            <a:ext cx="3474720" cy="1005840"/>
+          </a:xfrm>
+          <a:prstGeom prst="roundRect">
+            <a:avLst>
+              <a:gd name="adj" fmla="val 6000"/>
+            </a:avLst>
+          </a:prstGeom>
+          <a:solidFill>
+            <a:srgbClr val="FFFFFF"/>
+          </a:solidFill>
+          <a:ln w="12700">
+            <a:solidFill>
+              <a:srgbClr val="C9BDEE"/>
+            </a:solidFill>
+          </a:ln>
+        </p:spPr>
+        <p:style>
+          <a:lnRef idx="1">
+            <a:schemeClr val="accent1"/>
+          </a:lnRef>
+          <a:fillRef idx="3">
+            <a:schemeClr val="accent1"/>
+          </a:fillRef>
+          <a:effectRef idx="0">
+            <a:schemeClr val="accent1"/>
+          </a:effectRef>
+          <a:fontRef idx="minor">
+            <a:schemeClr val="lt1"/>
+          </a:fontRef>
+        </p:style>
+        <p:txBody>
+          <a:bodyPr rtlCol="0" anchor="ctr"/>
+          <a:lstStyle/>
+          <a:p>
+            <a:pPr algn="ctr"/>
+          </a:p>
+        </p:txBody>
+      </p:sp>
+      <p:sp>
+        <p:nvSpPr>
+          <p:cNvPr id="125" name="TextBox 124"/>
+          <p:cNvSpPr txBox="1"/>
+          <p:nvPr/>
+        </p:nvSpPr>
+        <p:spPr>
+          <a:xfrm>
+            <a:off x="12536424" y="9418320"/>
+            <a:ext cx="3108960" cy="329184"/>
+          </a:xfrm>
+          <a:prstGeom prst="rect">
+            <a:avLst/>
+          </a:prstGeom>
+          <a:noFill/>
+        </p:spPr>
+        <p:txBody>
+          <a:bodyPr wrap="square" lIns="0" rIns="0" tIns="0" bIns="0">
+            <a:spAutoFit/>
+          </a:bodyPr>
+          <a:lstStyle/>
+          <a:p>
+            <a:pPr>
+              <a:spcAft>
+                <a:spcPts val="300"/>
+              </a:spcAft>
+              <a:defRPr sz="2000" b="1">
+                <a:solidFill>
+                  <a:srgbClr val="5742A1"/>
+                </a:solidFill>
+                <a:latin typeface="Liberation Sans"/>
+              </a:defRPr>
+            </a:pPr>
+            <a:r>
+              <a:t>Scene pooling</a:t>
+            </a:r>
+          </a:p>
+        </p:txBody>
+      </p:sp>
+      <p:sp>
+        <p:nvSpPr>
+          <p:cNvPr id="126" name="TextBox 125"/>
+          <p:cNvSpPr txBox="1"/>
+          <p:nvPr/>
+        </p:nvSpPr>
+        <p:spPr>
+          <a:xfrm>
+            <a:off x="12536424" y="9875520"/>
+            <a:ext cx="3108960" cy="274320"/>
+          </a:xfrm>
+          <a:prstGeom prst="rect">
+            <a:avLst/>
+          </a:prstGeom>
+          <a:noFill/>
+        </p:spPr>
+        <p:txBody>
+          <a:bodyPr wrap="square" lIns="0" rIns="0" tIns="0" bIns="0">
+            <a:spAutoFit/>
+          </a:bodyPr>
+          <a:lstStyle/>
+          <a:p>
+            <a:pPr>
+              <a:spcAft>
+                <a:spcPts val="300"/>
+              </a:spcAft>
+              <a:defRPr sz="1600" b="0">
+                <a:solidFill>
+                  <a:srgbClr val="516985"/>
+                </a:solidFill>
+                <a:latin typeface="Liberation Sans"/>
+              </a:defRPr>
+            </a:pPr>
+            <a:r>
+              <a:t>mean / attention</a:t>
+            </a:r>
+          </a:p>
+        </p:txBody>
+      </p:sp>
+      <p:sp>
+        <p:nvSpPr>
+          <p:cNvPr id="127" name="Rounded Rectangle 126"/>
+          <p:cNvSpPr/>
+          <p:nvPr/>
+        </p:nvSpPr>
+        <p:spPr>
+          <a:xfrm>
+            <a:off x="16258032" y="9262872"/>
+            <a:ext cx="4828032" cy="1005840"/>
+          </a:xfrm>
+          <a:prstGeom prst="roundRect">
+            <a:avLst>
+              <a:gd name="adj" fmla="val 6000"/>
             </a:avLst>
           </a:prstGeom>
           <a:solidFill>
@@ -7385,14 +8201,14 @@
       </p:sp>
       <p:sp>
         <p:nvSpPr>
-          <p:cNvPr id="109" name="TextBox 108"/>
+          <p:cNvPr id="128" name="TextBox 127"/>
           <p:cNvSpPr txBox="1"/>
           <p:nvPr/>
         </p:nvSpPr>
         <p:spPr>
           <a:xfrm>
-            <a:off x="16056863" y="5239512"/>
-            <a:ext cx="4818888" cy="676656"/>
+            <a:off x="16440912" y="9418320"/>
+            <a:ext cx="4462272" cy="329184"/>
           </a:xfrm>
           <a:prstGeom prst="rect">
             <a:avLst/>
@@ -7400,7 +8216,7 @@
           <a:noFill/>
         </p:spPr>
         <p:txBody>
-          <a:bodyPr wrap="square" lIns="18288" rIns="18288" tIns="13716" bIns="0">
+          <a:bodyPr wrap="square" lIns="0" rIns="0" tIns="0" bIns="0">
             <a:spAutoFit/>
           </a:bodyPr>
           <a:lstStyle/>
@@ -7409,7 +8225,7 @@
               <a:spcAft>
                 <a:spcPts val="300"/>
               </a:spcAft>
-              <a:defRPr sz="2200" b="1">
+              <a:defRPr sz="2000" b="1">
                 <a:solidFill>
                   <a:srgbClr val="FFFFFF"/>
                 </a:solidFill>
@@ -7417,37 +8233,21 @@
               </a:defRPr>
             </a:pPr>
             <a:r>
-              <a:t>Projection + Residual MLPs</a:t>
-            </a:r>
-          </a:p>
-          <a:p>
-            <a:pPr>
-              <a:spcAft>
-                <a:spcPts val="300"/>
-              </a:spcAft>
-              <a:defRPr sz="2200" b="1">
-                <a:solidFill>
-                  <a:srgbClr val="FFFFFF"/>
-                </a:solidFill>
-                <a:latin typeface="Liberation Sans"/>
-              </a:defRPr>
-            </a:pPr>
-            <a:r>
-              <a:t>+ SASRec</a:t>
-            </a:r>
-          </a:p>
-        </p:txBody>
-      </p:sp>
-      <p:sp>
-        <p:nvSpPr>
-          <p:cNvPr id="110" name="TextBox 109"/>
+              <a:t>Title fusion + SASRec</a:t>
+            </a:r>
+          </a:p>
+        </p:txBody>
+      </p:sp>
+      <p:sp>
+        <p:nvSpPr>
+          <p:cNvPr id="129" name="TextBox 128"/>
           <p:cNvSpPr txBox="1"/>
           <p:nvPr/>
         </p:nvSpPr>
         <p:spPr>
           <a:xfrm>
-            <a:off x="16056863" y="6007608"/>
-            <a:ext cx="4818888" cy="320040"/>
+            <a:off x="16440912" y="9875520"/>
+            <a:ext cx="4462272" cy="274320"/>
           </a:xfrm>
           <a:prstGeom prst="rect">
             <a:avLst/>
@@ -7455,7 +8255,7 @@
           <a:noFill/>
         </p:spPr>
         <p:txBody>
-          <a:bodyPr wrap="square" lIns="18288" rIns="18288" tIns="13716" bIns="0">
+          <a:bodyPr wrap="square" lIns="0" rIns="0" tIns="0" bIns="0">
             <a:spAutoFit/>
           </a:bodyPr>
           <a:lstStyle/>
@@ -7466,40 +8266,294 @@
               </a:spcAft>
               <a:defRPr sz="1600" b="0">
                 <a:solidFill>
-                  <a:srgbClr val="FFFFFF"/>
+                  <a:srgbClr val="E5EBF5"/>
                 </a:solidFill>
                 <a:latin typeface="Liberation Sans"/>
               </a:defRPr>
             </a:pPr>
             <a:r>
-              <a:t>1024 → 512-D · trainable per arm</a:t>
-            </a:r>
-          </a:p>
-        </p:txBody>
-      </p:sp>
-      <p:sp>
-        <p:nvSpPr>
-          <p:cNvPr id="111" name="Rounded Rectangle 110"/>
+              <a:t>Optional title embedding</a:t>
+            </a:r>
+          </a:p>
+        </p:txBody>
+      </p:sp>
+      <p:cxnSp>
+        <p:nvCxnSpPr>
+          <p:cNvPr id="130" name="Connector 129"/>
+          <p:cNvCxnSpPr/>
+          <p:nvPr/>
+        </p:nvCxnSpPr>
+        <p:spPr>
+          <a:xfrm>
+            <a:off x="6922008" y="9765792"/>
+            <a:ext cx="411480" cy="0"/>
+          </a:xfrm>
+          <a:prstGeom prst="line">
+            <a:avLst/>
+          </a:prstGeom>
+          <a:ln w="19050">
+            <a:solidFill>
+              <a:srgbClr val="5742A1"/>
+            </a:solidFill>
+            <a:tailEnd type="triangle"/>
+          </a:ln>
+        </p:spPr>
+        <p:style>
+          <a:lnRef idx="2">
+            <a:schemeClr val="accent1"/>
+          </a:lnRef>
+          <a:fillRef idx="0">
+            <a:schemeClr val="accent1"/>
+          </a:fillRef>
+          <a:effectRef idx="0">
+            <a:schemeClr val="accent1"/>
+          </a:effectRef>
+          <a:fontRef idx="minor">
+            <a:schemeClr val="tx1"/>
+          </a:fontRef>
+        </p:style>
+      </p:cxnSp>
+      <p:cxnSp>
+        <p:nvCxnSpPr>
+          <p:cNvPr id="131" name="Connector 130"/>
+          <p:cNvCxnSpPr/>
+          <p:nvPr/>
+        </p:nvCxnSpPr>
+        <p:spPr>
+          <a:xfrm>
+            <a:off x="11923776" y="9765792"/>
+            <a:ext cx="411480" cy="0"/>
+          </a:xfrm>
+          <a:prstGeom prst="line">
+            <a:avLst/>
+          </a:prstGeom>
+          <a:ln w="19050">
+            <a:solidFill>
+              <a:srgbClr val="5742A1"/>
+            </a:solidFill>
+            <a:tailEnd type="triangle"/>
+          </a:ln>
+        </p:spPr>
+        <p:style>
+          <a:lnRef idx="2">
+            <a:schemeClr val="accent1"/>
+          </a:lnRef>
+          <a:fillRef idx="0">
+            <a:schemeClr val="accent1"/>
+          </a:fillRef>
+          <a:effectRef idx="0">
+            <a:schemeClr val="accent1"/>
+          </a:effectRef>
+          <a:fontRef idx="minor">
+            <a:schemeClr val="tx1"/>
+          </a:fontRef>
+        </p:style>
+      </p:cxnSp>
+      <p:cxnSp>
+        <p:nvCxnSpPr>
+          <p:cNvPr id="132" name="Connector 131"/>
+          <p:cNvCxnSpPr/>
+          <p:nvPr/>
+        </p:nvCxnSpPr>
+        <p:spPr>
+          <a:xfrm>
+            <a:off x="15828263" y="9765792"/>
+            <a:ext cx="411481" cy="0"/>
+          </a:xfrm>
+          <a:prstGeom prst="line">
+            <a:avLst/>
+          </a:prstGeom>
+          <a:ln w="19050">
+            <a:solidFill>
+              <a:srgbClr val="5742A1"/>
+            </a:solidFill>
+            <a:tailEnd type="triangle"/>
+          </a:ln>
+        </p:spPr>
+        <p:style>
+          <a:lnRef idx="2">
+            <a:schemeClr val="accent1"/>
+          </a:lnRef>
+          <a:fillRef idx="0">
+            <a:schemeClr val="accent1"/>
+          </a:fillRef>
+          <a:effectRef idx="0">
+            <a:schemeClr val="accent1"/>
+          </a:effectRef>
+          <a:fontRef idx="minor">
+            <a:schemeClr val="tx1"/>
+          </a:fontRef>
+        </p:style>
+      </p:cxnSp>
+      <p:sp>
+        <p:nvSpPr>
+          <p:cNvPr id="133" name="TextBox 132"/>
+          <p:cNvSpPr txBox="1"/>
+          <p:nvPr/>
+        </p:nvSpPr>
+        <p:spPr>
+          <a:xfrm>
+            <a:off x="786384" y="10497312"/>
+            <a:ext cx="12161520" cy="274320"/>
+          </a:xfrm>
+          <a:prstGeom prst="rect">
+            <a:avLst/>
+          </a:prstGeom>
+          <a:noFill/>
+        </p:spPr>
+        <p:txBody>
+          <a:bodyPr wrap="square" lIns="0" rIns="0" tIns="0" bIns="0">
+            <a:spAutoFit/>
+          </a:bodyPr>
+          <a:lstStyle/>
+          <a:p>
+            <a:pPr>
+              <a:spcAft>
+                <a:spcPts val="300"/>
+              </a:spcAft>
+              <a:defRPr sz="1500" b="0">
+                <a:solidFill>
+                  <a:srgbClr val="5742A1"/>
+                </a:solidFill>
+                <a:latin typeface="Liberation Sans"/>
+              </a:defRPr>
+            </a:pPr>
+            <a:r>
+              <a:t>Arms: meta · graph_qwen · graph_qwen_meta · graph_gemini_meta</a:t>
+            </a:r>
+          </a:p>
+        </p:txBody>
+      </p:sp>
+      <p:sp>
+        <p:nvSpPr>
+          <p:cNvPr id="134" name="TextBox 133"/>
+          <p:cNvSpPr txBox="1"/>
+          <p:nvPr/>
+        </p:nvSpPr>
+        <p:spPr>
+          <a:xfrm>
+            <a:off x="12893040" y="10497312"/>
+            <a:ext cx="8229600" cy="274320"/>
+          </a:xfrm>
+          <a:prstGeom prst="rect">
+            <a:avLst/>
+          </a:prstGeom>
+          <a:noFill/>
+        </p:spPr>
+        <p:txBody>
+          <a:bodyPr wrap="square" lIns="0" rIns="0" tIns="0" bIns="0">
+            <a:spAutoFit/>
+          </a:bodyPr>
+          <a:lstStyle/>
+          <a:p>
+            <a:pPr>
+              <a:spcAft>
+                <a:spcPts val="300"/>
+              </a:spcAft>
+              <a:defRPr sz="1500" b="0">
+                <a:solidFill>
+                  <a:srgbClr val="5742A1"/>
+                </a:solidFill>
+                <a:latin typeface="Liberation Sans"/>
+              </a:defRPr>
+            </a:pPr>
+            <a:r>
+              <a:t>Encoder + SASRec train jointly; meta uses title only.</a:t>
+            </a:r>
+          </a:p>
+        </p:txBody>
+      </p:sp>
+      <p:cxnSp>
+        <p:nvCxnSpPr>
+          <p:cNvPr id="135" name="Connector 134"/>
+          <p:cNvCxnSpPr/>
+          <p:nvPr/>
+        </p:nvCxnSpPr>
+        <p:spPr>
+          <a:xfrm>
+            <a:off x="14100048" y="4137660"/>
+            <a:ext cx="402336" cy="0"/>
+          </a:xfrm>
+          <a:prstGeom prst="line">
+            <a:avLst/>
+          </a:prstGeom>
+          <a:ln w="19050">
+            <a:solidFill>
+              <a:srgbClr val="636F80"/>
+            </a:solidFill>
+          </a:ln>
+        </p:spPr>
+        <p:style>
+          <a:lnRef idx="2">
+            <a:schemeClr val="accent1"/>
+          </a:lnRef>
+          <a:fillRef idx="0">
+            <a:schemeClr val="accent1"/>
+          </a:fillRef>
+          <a:effectRef idx="0">
+            <a:schemeClr val="accent1"/>
+          </a:effectRef>
+          <a:fontRef idx="minor">
+            <a:schemeClr val="tx1"/>
+          </a:fontRef>
+        </p:style>
+      </p:cxnSp>
+      <p:cxnSp>
+        <p:nvCxnSpPr>
+          <p:cNvPr id="136" name="Connector 135"/>
+          <p:cNvCxnSpPr/>
+          <p:nvPr/>
+        </p:nvCxnSpPr>
+        <p:spPr>
+          <a:xfrm>
+            <a:off x="14502384" y="3959352"/>
+            <a:ext cx="493775" cy="0"/>
+          </a:xfrm>
+          <a:prstGeom prst="line">
+            <a:avLst/>
+          </a:prstGeom>
+          <a:ln w="19050">
+            <a:solidFill>
+              <a:srgbClr val="142D50"/>
+            </a:solidFill>
+          </a:ln>
+        </p:spPr>
+        <p:style>
+          <a:lnRef idx="2">
+            <a:schemeClr val="accent1"/>
+          </a:lnRef>
+          <a:fillRef idx="0">
+            <a:schemeClr val="accent1"/>
+          </a:fillRef>
+          <a:effectRef idx="0">
+            <a:schemeClr val="accent1"/>
+          </a:effectRef>
+          <a:fontRef idx="minor">
+            <a:schemeClr val="tx1"/>
+          </a:fontRef>
+        </p:style>
+      </p:cxnSp>
+      <p:sp>
+        <p:nvSpPr>
+          <p:cNvPr id="137" name="Rounded Rectangle 136"/>
           <p:cNvSpPr/>
           <p:nvPr/>
         </p:nvSpPr>
         <p:spPr>
           <a:xfrm>
-            <a:off x="15828263" y="6995160"/>
-            <a:ext cx="5276088" cy="813816"/>
+            <a:off x="502920" y="11128248"/>
+            <a:ext cx="20894040" cy="832104"/>
           </a:xfrm>
           <a:prstGeom prst="roundRect">
             <a:avLst>
-              <a:gd name="adj" fmla="val 10000"/>
+              <a:gd name="adj" fmla="val 6000"/>
             </a:avLst>
           </a:prstGeom>
           <a:solidFill>
-            <a:srgbClr val="ECF2FC"/>
+            <a:srgbClr val="F2F5FA"/>
           </a:solidFill>
-          <a:ln w="12700">
-            <a:solidFill>
-              <a:srgbClr val="91ACCD"/>
-            </a:solidFill>
+          <a:ln>
+            <a:noFill/>
           </a:ln>
         </p:spPr>
         <p:style>
@@ -7526,14 +8580,14 @@
       </p:sp>
       <p:sp>
         <p:nvSpPr>
-          <p:cNvPr id="112" name="TextBox 111"/>
+          <p:cNvPr id="138" name="TextBox 137"/>
           <p:cNvSpPr txBox="1"/>
           <p:nvPr/>
         </p:nvSpPr>
         <p:spPr>
           <a:xfrm>
-            <a:off x="16056863" y="7095744"/>
-            <a:ext cx="4818888" cy="329184"/>
+            <a:off x="768096" y="11292840"/>
+            <a:ext cx="3931920" cy="365760"/>
           </a:xfrm>
           <a:prstGeom prst="rect">
             <a:avLst/>
@@ -7541,7 +8595,7 @@
           <a:noFill/>
         </p:spPr>
         <p:txBody>
-          <a:bodyPr wrap="square" lIns="18288" rIns="18288" tIns="13716" bIns="0">
+          <a:bodyPr wrap="square" lIns="0" rIns="0" tIns="0" bIns="0">
             <a:spAutoFit/>
           </a:bodyPr>
           <a:lstStyle/>
@@ -7558,21 +8612,21 @@
               </a:defRPr>
             </a:pPr>
             <a:r>
-              <a:t>Common user histories</a:t>
-            </a:r>
-          </a:p>
-        </p:txBody>
-      </p:sp>
-      <p:sp>
-        <p:nvSpPr>
-          <p:cNvPr id="113" name="TextBox 112"/>
+              <a:t>SHARED EVALUATION</a:t>
+            </a:r>
+          </a:p>
+        </p:txBody>
+      </p:sp>
+      <p:sp>
+        <p:nvSpPr>
+          <p:cNvPr id="139" name="TextBox 138"/>
           <p:cNvSpPr txBox="1"/>
           <p:nvPr/>
         </p:nvSpPr>
         <p:spPr>
           <a:xfrm>
-            <a:off x="16056863" y="7461504"/>
-            <a:ext cx="4818888" cy="274320"/>
+            <a:off x="4818888" y="11274552"/>
+            <a:ext cx="16184880" cy="310896"/>
           </a:xfrm>
           <a:prstGeom prst="rect">
             <a:avLst/>
@@ -7580,7 +8634,7 @@
           <a:noFill/>
         </p:spPr>
         <p:txBody>
-          <a:bodyPr wrap="square" lIns="18288" rIns="18288" tIns="13716" bIns="0">
+          <a:bodyPr wrap="square" lIns="0" rIns="0" tIns="0" bIns="0">
             <a:spAutoFit/>
           </a:bodyPr>
           <a:lstStyle/>
@@ -7589,65 +8643,29 @@
               <a:spcAft>
                 <a:spcPts val="300"/>
               </a:spcAft>
-              <a:defRPr sz="1600" b="0">
+              <a:defRPr sz="1800" b="0">
                 <a:solidFill>
-                  <a:srgbClr val="516985"/>
+                  <a:srgbClr val="142D50"/>
                 </a:solidFill>
                 <a:latin typeface="Liberation Sans"/>
               </a:defRPr>
             </a:pPr>
             <a:r>
-              <a:t>Strictly earlier events · last 10 items</a:t>
-            </a:r>
-          </a:p>
-        </p:txBody>
-      </p:sp>
-      <p:cxnSp>
-        <p:nvCxnSpPr>
-          <p:cNvPr id="114" name="Connector 113"/>
-          <p:cNvCxnSpPr/>
-          <p:nvPr/>
-        </p:nvCxnSpPr>
-        <p:spPr>
-          <a:xfrm flipV="1">
-            <a:off x="18470880" y="6428232"/>
-            <a:ext cx="0" cy="566928"/>
-          </a:xfrm>
-          <a:prstGeom prst="line">
-            <a:avLst/>
-          </a:prstGeom>
-          <a:ln w="25400">
-            <a:solidFill>
-              <a:srgbClr val="142D50"/>
-            </a:solidFill>
-            <a:tailEnd type="triangle" w="sm" len="sm"/>
-          </a:ln>
-        </p:spPr>
-        <p:style>
-          <a:lnRef idx="2">
-            <a:schemeClr val="accent1"/>
-          </a:lnRef>
-          <a:fillRef idx="0">
-            <a:schemeClr val="accent1"/>
-          </a:fillRef>
-          <a:effectRef idx="1">
-            <a:schemeClr val="accent1"/>
-          </a:effectRef>
-          <a:fontRef idx="minor">
-            <a:schemeClr val="tx1"/>
-          </a:fontRef>
-        </p:style>
-      </p:cxnSp>
-      <p:sp>
-        <p:nvSpPr>
-          <p:cNvPr id="115" name="TextBox 114"/>
+              <a:t>Rolling splits · Full catalog · NDCG@10 / HR@10 · User-level paired bootstrap</a:t>
+            </a:r>
+          </a:p>
+        </p:txBody>
+      </p:sp>
+      <p:sp>
+        <p:nvSpPr>
+          <p:cNvPr id="140" name="TextBox 139"/>
           <p:cNvSpPr txBox="1"/>
           <p:nvPr/>
         </p:nvSpPr>
         <p:spPr>
           <a:xfrm>
-            <a:off x="15937992" y="8037575"/>
-            <a:ext cx="5129784" cy="320040"/>
+            <a:off x="4818888" y="11676888"/>
+            <a:ext cx="16184880" cy="246888"/>
           </a:xfrm>
           <a:prstGeom prst="rect">
             <a:avLst/>
@@ -7655,642 +8673,7 @@
           <a:noFill/>
         </p:spPr>
         <p:txBody>
-          <a:bodyPr wrap="square" lIns="18288" rIns="18288" tIns="13716" bIns="0">
-            <a:spAutoFit/>
-          </a:bodyPr>
-          <a:lstStyle/>
-          <a:p>
-            <a:pPr>
-              <a:spcAft>
-                <a:spcPts val="300"/>
-              </a:spcAft>
-              <a:defRPr sz="1500" b="0">
-                <a:solidFill>
-                  <a:srgbClr val="516985"/>
-                </a:solidFill>
-                <a:latin typeface="Liberation Sans"/>
-              </a:defRPr>
-            </a:pPr>
-            <a:r>
-              <a:t>Same architecture · independent weights per arm</a:t>
-            </a:r>
-          </a:p>
-        </p:txBody>
-      </p:sp>
-      <p:sp>
-        <p:nvSpPr>
-          <p:cNvPr id="116" name="Rounded Rectangle 115"/>
-          <p:cNvSpPr/>
-          <p:nvPr/>
-        </p:nvSpPr>
-        <p:spPr>
-          <a:xfrm>
-            <a:off x="502920" y="8924544"/>
-            <a:ext cx="20894040" cy="3026664"/>
-          </a:xfrm>
-          <a:prstGeom prst="roundRect">
-            <a:avLst>
-              <a:gd name="adj" fmla="val 3500"/>
-            </a:avLst>
-          </a:prstGeom>
-          <a:solidFill>
-            <a:srgbClr val="F7F5FD"/>
-          </a:solidFill>
-          <a:ln w="12700">
-            <a:solidFill>
-              <a:srgbClr val="B7A8E5"/>
-            </a:solidFill>
-          </a:ln>
-        </p:spPr>
-        <p:style>
-          <a:lnRef idx="1">
-            <a:schemeClr val="accent1"/>
-          </a:lnRef>
-          <a:fillRef idx="3">
-            <a:schemeClr val="accent1"/>
-          </a:fillRef>
-          <a:effectRef idx="0">
-            <a:schemeClr val="accent1"/>
-          </a:effectRef>
-          <a:fontRef idx="minor">
-            <a:schemeClr val="lt1"/>
-          </a:fontRef>
-        </p:style>
-        <p:txBody>
-          <a:bodyPr rtlCol="0" anchor="ctr"/>
-          <a:lstStyle/>
-          <a:p>
-            <a:pPr algn="ctr"/>
-          </a:p>
-        </p:txBody>
-      </p:sp>
-      <p:sp>
-        <p:nvSpPr>
-          <p:cNvPr id="117" name="TextBox 116"/>
-          <p:cNvSpPr txBox="1"/>
-          <p:nvPr/>
-        </p:nvSpPr>
-        <p:spPr>
-          <a:xfrm>
-            <a:off x="749808" y="9089136"/>
-            <a:ext cx="20071080" cy="411480"/>
-          </a:xfrm>
-          <a:prstGeom prst="rect">
-            <a:avLst/>
-          </a:prstGeom>
-          <a:noFill/>
-        </p:spPr>
-        <p:txBody>
-          <a:bodyPr wrap="square" lIns="18288" rIns="18288" tIns="13716" bIns="0">
-            <a:spAutoFit/>
-          </a:bodyPr>
-          <a:lstStyle/>
-          <a:p>
-            <a:pPr>
-              <a:spcAft>
-                <a:spcPts val="300"/>
-              </a:spcAft>
-              <a:defRPr sz="2300" b="1">
-                <a:solidFill>
-                  <a:srgbClr val="5742A1"/>
-                </a:solidFill>
-                <a:latin typeface="Liberation Sans"/>
-              </a:defRPr>
-            </a:pPr>
-            <a:r>
-              <a:t>SHARED EVALUATION · ALL SIX ARMS</a:t>
-            </a:r>
-          </a:p>
-        </p:txBody>
-      </p:sp>
-      <p:sp>
-        <p:nvSpPr>
-          <p:cNvPr id="118" name="Rounded Rectangle 117"/>
-          <p:cNvSpPr/>
-          <p:nvPr/>
-        </p:nvSpPr>
-        <p:spPr>
-          <a:xfrm>
-            <a:off x="758952" y="9619488"/>
-            <a:ext cx="5715000" cy="1545336"/>
-          </a:xfrm>
-          <a:prstGeom prst="roundRect">
-            <a:avLst>
-              <a:gd name="adj" fmla="val 10000"/>
-            </a:avLst>
-          </a:prstGeom>
-          <a:solidFill>
-            <a:srgbClr val="FFFFFF"/>
-          </a:solidFill>
-          <a:ln w="12700">
-            <a:solidFill>
-              <a:srgbClr val="D0C5EF"/>
-            </a:solidFill>
-          </a:ln>
-        </p:spPr>
-        <p:style>
-          <a:lnRef idx="1">
-            <a:schemeClr val="accent1"/>
-          </a:lnRef>
-          <a:fillRef idx="3">
-            <a:schemeClr val="accent1"/>
-          </a:fillRef>
-          <a:effectRef idx="0">
-            <a:schemeClr val="accent1"/>
-          </a:effectRef>
-          <a:fontRef idx="minor">
-            <a:schemeClr val="lt1"/>
-          </a:fontRef>
-        </p:style>
-        <p:txBody>
-          <a:bodyPr rtlCol="0" anchor="ctr"/>
-          <a:lstStyle/>
-          <a:p>
-            <a:pPr algn="ctr"/>
-          </a:p>
-        </p:txBody>
-      </p:sp>
-      <p:sp>
-        <p:nvSpPr>
-          <p:cNvPr id="119" name="Rounded Rectangle 118"/>
-          <p:cNvSpPr/>
-          <p:nvPr/>
-        </p:nvSpPr>
-        <p:spPr>
-          <a:xfrm>
-            <a:off x="6684264" y="9619488"/>
-            <a:ext cx="5486400" cy="1545336"/>
-          </a:xfrm>
-          <a:prstGeom prst="roundRect">
-            <a:avLst>
-              <a:gd name="adj" fmla="val 10000"/>
-            </a:avLst>
-          </a:prstGeom>
-          <a:solidFill>
-            <a:srgbClr val="FFFFFF"/>
-          </a:solidFill>
-          <a:ln w="12700">
-            <a:solidFill>
-              <a:srgbClr val="D0C5EF"/>
-            </a:solidFill>
-          </a:ln>
-        </p:spPr>
-        <p:style>
-          <a:lnRef idx="1">
-            <a:schemeClr val="accent1"/>
-          </a:lnRef>
-          <a:fillRef idx="3">
-            <a:schemeClr val="accent1"/>
-          </a:fillRef>
-          <a:effectRef idx="0">
-            <a:schemeClr val="accent1"/>
-          </a:effectRef>
-          <a:fontRef idx="minor">
-            <a:schemeClr val="lt1"/>
-          </a:fontRef>
-        </p:style>
-        <p:txBody>
-          <a:bodyPr rtlCol="0" anchor="ctr"/>
-          <a:lstStyle/>
-          <a:p>
-            <a:pPr algn="ctr"/>
-          </a:p>
-        </p:txBody>
-      </p:sp>
-      <p:sp>
-        <p:nvSpPr>
-          <p:cNvPr id="120" name="Rounded Rectangle 119"/>
-          <p:cNvSpPr/>
-          <p:nvPr/>
-        </p:nvSpPr>
-        <p:spPr>
-          <a:xfrm>
-            <a:off x="12380976" y="9619488"/>
-            <a:ext cx="8741664" cy="1545336"/>
-          </a:xfrm>
-          <a:prstGeom prst="roundRect">
-            <a:avLst>
-              <a:gd name="adj" fmla="val 10000"/>
-            </a:avLst>
-          </a:prstGeom>
-          <a:solidFill>
-            <a:srgbClr val="FFFFFF"/>
-          </a:solidFill>
-          <a:ln w="12700">
-            <a:solidFill>
-              <a:srgbClr val="D0C5EF"/>
-            </a:solidFill>
-          </a:ln>
-        </p:spPr>
-        <p:style>
-          <a:lnRef idx="1">
-            <a:schemeClr val="accent1"/>
-          </a:lnRef>
-          <a:fillRef idx="3">
-            <a:schemeClr val="accent1"/>
-          </a:fillRef>
-          <a:effectRef idx="0">
-            <a:schemeClr val="accent1"/>
-          </a:effectRef>
-          <a:fontRef idx="minor">
-            <a:schemeClr val="lt1"/>
-          </a:fontRef>
-        </p:style>
-        <p:txBody>
-          <a:bodyPr rtlCol="0" anchor="ctr"/>
-          <a:lstStyle/>
-          <a:p>
-            <a:pPr algn="ctr"/>
-          </a:p>
-        </p:txBody>
-      </p:sp>
-      <p:sp>
-        <p:nvSpPr>
-          <p:cNvPr id="121" name="TextBox 120"/>
-          <p:cNvSpPr txBox="1"/>
-          <p:nvPr/>
-        </p:nvSpPr>
-        <p:spPr>
-          <a:xfrm>
-            <a:off x="932688" y="9747504"/>
-            <a:ext cx="5367528" cy="347472"/>
-          </a:xfrm>
-          <a:prstGeom prst="rect">
-            <a:avLst/>
-          </a:prstGeom>
-          <a:noFill/>
-        </p:spPr>
-        <p:txBody>
-          <a:bodyPr wrap="square" lIns="18288" rIns="18288" tIns="13716" bIns="0">
-            <a:spAutoFit/>
-          </a:bodyPr>
-          <a:lstStyle/>
-          <a:p>
-            <a:pPr>
-              <a:spcAft>
-                <a:spcPts val="300"/>
-              </a:spcAft>
-              <a:defRPr sz="1900" b="1">
-                <a:solidFill>
-                  <a:srgbClr val="5742A1"/>
-                </a:solidFill>
-                <a:latin typeface="Liberation Sans"/>
-              </a:defRPr>
-            </a:pPr>
-            <a:r>
-              <a:t>ROLLING PROTOCOL</a:t>
-            </a:r>
-          </a:p>
-        </p:txBody>
-      </p:sp>
-      <p:sp>
-        <p:nvSpPr>
-          <p:cNvPr id="122" name="TextBox 121"/>
-          <p:cNvSpPr txBox="1"/>
-          <p:nvPr/>
-        </p:nvSpPr>
-        <p:spPr>
-          <a:xfrm>
-            <a:off x="932688" y="10168128"/>
-            <a:ext cx="5367528" cy="850392"/>
-          </a:xfrm>
-          <a:prstGeom prst="rect">
-            <a:avLst/>
-          </a:prstGeom>
-          <a:noFill/>
-        </p:spPr>
-        <p:txBody>
-          <a:bodyPr wrap="square" lIns="18288" rIns="18288" tIns="13716" bIns="0">
-            <a:spAutoFit/>
-          </a:bodyPr>
-          <a:lstStyle/>
-          <a:p>
-            <a:pPr>
-              <a:spcAft>
-                <a:spcPts val="300"/>
-              </a:spcAft>
-              <a:defRPr sz="1700" b="0">
-                <a:solidFill>
-                  <a:srgbClr val="516985"/>
-                </a:solidFill>
-                <a:latin typeface="Liberation Sans"/>
-              </a:defRPr>
-            </a:pPr>
-            <a:r>
-              <a:t>7 days × 3 seeds × 6 arms = 126 runs</a:t>
-            </a:r>
-          </a:p>
-          <a:p>
-            <a:pPr>
-              <a:spcAft>
-                <a:spcPts val="300"/>
-              </a:spcAft>
-              <a:defRPr sz="1700" b="0">
-                <a:solidFill>
-                  <a:srgbClr val="516985"/>
-                </a:solidFill>
-                <a:latin typeface="Liberation Sans"/>
-              </a:defRPr>
-            </a:pPr>
-            <a:r>
-              <a:t>Select epoch → fresh refit → test</a:t>
-            </a:r>
-          </a:p>
-          <a:p>
-            <a:pPr>
-              <a:spcAft>
-                <a:spcPts val="300"/>
-              </a:spcAft>
-              <a:defRPr sz="1700" b="0">
-                <a:solidFill>
-                  <a:srgbClr val="516985"/>
-                </a:solidFill>
-                <a:latin typeface="Liberation Sans"/>
-              </a:defRPr>
-            </a:pPr>
-            <a:r>
-              <a:t>Same catalog and evaluation events</a:t>
-            </a:r>
-          </a:p>
-        </p:txBody>
-      </p:sp>
-      <p:sp>
-        <p:nvSpPr>
-          <p:cNvPr id="123" name="TextBox 122"/>
-          <p:cNvSpPr txBox="1"/>
-          <p:nvPr/>
-        </p:nvSpPr>
-        <p:spPr>
-          <a:xfrm>
-            <a:off x="6876288" y="9747504"/>
-            <a:ext cx="5102352" cy="347472"/>
-          </a:xfrm>
-          <a:prstGeom prst="rect">
-            <a:avLst/>
-          </a:prstGeom>
-          <a:noFill/>
-        </p:spPr>
-        <p:txBody>
-          <a:bodyPr wrap="square" lIns="18288" rIns="18288" tIns="13716" bIns="0">
-            <a:spAutoFit/>
-          </a:bodyPr>
-          <a:lstStyle/>
-          <a:p>
-            <a:pPr>
-              <a:spcAft>
-                <a:spcPts val="300"/>
-              </a:spcAft>
-              <a:defRPr sz="1900" b="1">
-                <a:solidFill>
-                  <a:srgbClr val="5742A1"/>
-                </a:solidFill>
-                <a:latin typeface="Liberation Sans"/>
-              </a:defRPr>
-            </a:pPr>
-            <a:r>
-              <a:t>FULL-CATALOG RANKING</a:t>
-            </a:r>
-          </a:p>
-        </p:txBody>
-      </p:sp>
-      <p:sp>
-        <p:nvSpPr>
-          <p:cNvPr id="124" name="TextBox 123"/>
-          <p:cNvSpPr txBox="1"/>
-          <p:nvPr/>
-        </p:nvSpPr>
-        <p:spPr>
-          <a:xfrm>
-            <a:off x="6876288" y="10168128"/>
-            <a:ext cx="5102352" cy="850392"/>
-          </a:xfrm>
-          <a:prstGeom prst="rect">
-            <a:avLst/>
-          </a:prstGeom>
-          <a:noFill/>
-        </p:spPr>
-        <p:txBody>
-          <a:bodyPr wrap="square" lIns="18288" rIns="18288" tIns="13716" bIns="0">
-            <a:spAutoFit/>
-          </a:bodyPr>
-          <a:lstStyle/>
-          <a:p>
-            <a:pPr>
-              <a:spcAft>
-                <a:spcPts val="300"/>
-              </a:spcAft>
-              <a:defRPr sz="1600" b="0">
-                <a:solidFill>
-                  <a:srgbClr val="516985"/>
-                </a:solidFill>
-                <a:latin typeface="Liberation Sans"/>
-              </a:defRPr>
-            </a:pPr>
-            <a:r>
-              <a:t>19,738 items · existing-history masking</a:t>
-            </a:r>
-          </a:p>
-          <a:p>
-            <a:pPr>
-              <a:spcAft>
-                <a:spcPts val="300"/>
-              </a:spcAft>
-              <a:defRPr sz="1600" b="0">
-                <a:solidFill>
-                  <a:srgbClr val="516985"/>
-                </a:solidFill>
-                <a:latin typeface="Liberation Sans"/>
-              </a:defRPr>
-            </a:pPr>
-            <a:r>
-              <a:t>Primary: NDCG@10 · Also: HR@10</a:t>
-            </a:r>
-          </a:p>
-          <a:p>
-            <a:pPr>
-              <a:spcAft>
-                <a:spcPts val="300"/>
-              </a:spcAft>
-              <a:defRPr sz="1600" b="0">
-                <a:solidFill>
-                  <a:srgbClr val="516985"/>
-                </a:solidFill>
-                <a:latin typeface="Liberation Sans"/>
-              </a:defRPr>
-            </a:pPr>
-            <a:r>
-              <a:t>Empty input → zero vector; retain item</a:t>
-            </a:r>
-          </a:p>
-        </p:txBody>
-      </p:sp>
-      <p:sp>
-        <p:nvSpPr>
-          <p:cNvPr id="125" name="TextBox 124"/>
-          <p:cNvSpPr txBox="1"/>
-          <p:nvPr/>
-        </p:nvSpPr>
-        <p:spPr>
-          <a:xfrm>
-            <a:off x="12573000" y="9747504"/>
-            <a:ext cx="8321040" cy="347472"/>
-          </a:xfrm>
-          <a:prstGeom prst="rect">
-            <a:avLst/>
-          </a:prstGeom>
-          <a:noFill/>
-        </p:spPr>
-        <p:txBody>
-          <a:bodyPr wrap="square" lIns="18288" rIns="18288" tIns="13716" bIns="0">
-            <a:spAutoFit/>
-          </a:bodyPr>
-          <a:lstStyle/>
-          <a:p>
-            <a:pPr>
-              <a:spcAft>
-                <a:spcPts val="300"/>
-              </a:spcAft>
-              <a:defRPr sz="1900" b="1">
-                <a:solidFill>
-                  <a:srgbClr val="5742A1"/>
-                </a:solidFill>
-                <a:latin typeface="Liberation Sans"/>
-              </a:defRPr>
-            </a:pPr>
-            <a:r>
-              <a:t>STATISTICAL COMPARISONS</a:t>
-            </a:r>
-          </a:p>
-        </p:txBody>
-      </p:sp>
-      <p:sp>
-        <p:nvSpPr>
-          <p:cNvPr id="126" name="TextBox 125"/>
-          <p:cNvSpPr txBox="1"/>
-          <p:nvPr/>
-        </p:nvSpPr>
-        <p:spPr>
-          <a:xfrm>
-            <a:off x="12573000" y="10168128"/>
-            <a:ext cx="8321040" cy="841248"/>
-          </a:xfrm>
-          <a:prstGeom prst="rect">
-            <a:avLst/>
-          </a:prstGeom>
-          <a:noFill/>
-        </p:spPr>
-        <p:txBody>
-          <a:bodyPr wrap="square" lIns="18288" rIns="18288" tIns="13716" bIns="0">
-            <a:spAutoFit/>
-          </a:bodyPr>
-          <a:lstStyle/>
-          <a:p>
-            <a:pPr>
-              <a:spcAft>
-                <a:spcPts val="300"/>
-              </a:spcAft>
-              <a:defRPr sz="1600" b="0">
-                <a:solidFill>
-                  <a:srgbClr val="516985"/>
-                </a:solidFill>
-                <a:latin typeface="Liberation Sans"/>
-              </a:defRPr>
-            </a:pPr>
-            <a:r>
-              <a:t>Two-sided Bonferroni CIs: vs Meta (5) · representation (2) · title (1)</a:t>
-            </a:r>
-          </a:p>
-          <a:p>
-            <a:pPr>
-              <a:spcAft>
-                <a:spcPts val="300"/>
-              </a:spcAft>
-              <a:defRPr sz="1600" b="0">
-                <a:solidFill>
-                  <a:srgbClr val="516985"/>
-                </a:solidFill>
-                <a:latin typeface="Liberation Sans"/>
-              </a:defRPr>
-            </a:pPr>
-            <a:r>
-              <a:t>Teacher reference: graph_gemini_meta − graph_qwen_meta</a:t>
-            </a:r>
-          </a:p>
-          <a:p>
-            <a:pPr>
-              <a:spcAft>
-                <a:spcPts val="300"/>
-              </a:spcAft>
-              <a:defRPr sz="1600" b="0">
-                <a:solidFill>
-                  <a:srgbClr val="516985"/>
-                </a:solidFill>
-                <a:latin typeface="Liberation Sans"/>
-              </a:defRPr>
-            </a:pPr>
-            <a:r>
-              <a:t>Exploratory, unadjusted 95% CI</a:t>
-            </a:r>
-          </a:p>
-        </p:txBody>
-      </p:sp>
-      <p:sp>
-        <p:nvSpPr>
-          <p:cNvPr id="127" name="TextBox 126"/>
-          <p:cNvSpPr txBox="1"/>
-          <p:nvPr/>
-        </p:nvSpPr>
-        <p:spPr>
-          <a:xfrm>
-            <a:off x="859536" y="11320272"/>
-            <a:ext cx="20098512" cy="329184"/>
-          </a:xfrm>
-          <a:prstGeom prst="rect">
-            <a:avLst/>
-          </a:prstGeom>
-          <a:noFill/>
-        </p:spPr>
-        <p:txBody>
-          <a:bodyPr wrap="square" lIns="18288" rIns="18288" tIns="13716" bIns="0">
-            <a:spAutoFit/>
-          </a:bodyPr>
-          <a:lstStyle/>
-          <a:p>
-            <a:pPr>
-              <a:spcAft>
-                <a:spcPts val="300"/>
-              </a:spcAft>
-              <a:defRPr sz="1700" b="0">
-                <a:solidFill>
-                  <a:srgbClr val="5742A1"/>
-                </a:solidFill>
-                <a:latin typeface="Liberation Sans"/>
-              </a:defRPr>
-            </a:pPr>
-            <a:r>
-              <a:t>User-level paired bootstrap · 10,000 samples · average seeds, then equally average days · familywise α = 0.05</a:t>
-            </a:r>
-          </a:p>
-        </p:txBody>
-      </p:sp>
-      <p:sp>
-        <p:nvSpPr>
-          <p:cNvPr id="128" name="TextBox 127"/>
-          <p:cNvSpPr txBox="1"/>
-          <p:nvPr/>
-        </p:nvSpPr>
-        <p:spPr>
-          <a:xfrm>
-            <a:off x="859536" y="11686032"/>
-            <a:ext cx="20098512" cy="237744"/>
-          </a:xfrm>
-          <a:prstGeom prst="rect">
-            <a:avLst/>
-          </a:prstGeom>
-          <a:noFill/>
-        </p:spPr>
-        <p:txBody>
-          <a:bodyPr wrap="square" lIns="18288" rIns="18288" tIns="13716" bIns="0">
+          <a:bodyPr wrap="square" lIns="0" rIns="0" tIns="0" bIns="0">
             <a:spAutoFit/>
           </a:bodyPr>
           <a:lstStyle/>
@@ -8307,7 +8690,7 @@
               </a:defRPr>
             </a:pPr>
             <a:r>
-              <a:t>Combined arms use the available title / Summary; neither available → zero vector. Standalone arms do not substitute another source.</a:t>
+              <a:t>Same histories and evaluation events; comparisons stay within each mode / pooling.</a:t>
             </a:r>
           </a:p>
         </p:txBody>
